--- a/SOCIAL_MEDIA_PREZENTARE.pptx
+++ b/SOCIAL_MEDIA_PREZENTARE.pptx
@@ -126,24 +126,24 @@
   <p:extLst>
     <p:ext uri="{521415D9-36F7-43E2-AB2F-B90AF26B5E84}">
       <p14:sectionLst xmlns:p14="http://schemas.microsoft.com/office/powerpoint/2010/main">
-        <p14:section name="Copertă" id="{92b56ca9-c58b-00e5-45bc-c8586ac5a7f8}">
+        <p14:section name="Copertă" id="{199d60e3-b97c-3266-7681-ac7b80510cdc}">
           <p14:sldIdLst>
             <p14:sldId id="256"/>
           </p14:sldIdLst>
         </p14:section>
-        <p14:section name="Partea I – Cum începem" id="{cb4140d7-8587-ed94-d823-a32620a9bde0}">
+        <p14:section name="Partea I – Cum începem" id="{220f3d85-b162-7ba4-c44d-7bc7427d17bc}">
           <p14:sldIdLst>
             <p14:sldId id="257"/>
             <p14:sldId id="258"/>
           </p14:sldIdLst>
         </p14:section>
-        <p14:section name="Partea II – Facebook" id="{1c08fe9a-1d22-2ad3-0b7c-fe007c962309}">
+        <p14:section name="Partea II – Facebook" id="{1ed3176e-5eb5-f751-a861-b7479b36b112}">
           <p14:sldIdLst>
             <p14:sldId id="259"/>
             <p14:sldId id="260"/>
           </p14:sldIdLst>
         </p14:section>
-        <p14:section name="Partea III – Instagram" id="{6246020a-41db-b0c2-df2f-b393ee03f9fe}">
+        <p14:section name="Partea III – Instagram" id="{9cf9305c-e6dd-6254-5237-c26ce01fe977}">
           <p14:sldIdLst>
             <p14:sldId id="261"/>
             <p14:sldId id="262"/>
@@ -152,7 +152,7 @@
             <p14:sldId id="265"/>
           </p14:sldIdLst>
         </p14:section>
-        <p14:section name="Partea IV – TikTok" id="{79d7baf5-4221-c05b-f20d-fd9e0600e63e}">
+        <p14:section name="Partea IV – TikTok" id="{ab6f6cb2-aa87-124e-7b3c-ff2fbfaf5790}">
           <p14:sldIdLst>
             <p14:sldId id="266"/>
             <p14:sldId id="267"/>
@@ -161,7 +161,7 @@
             <p14:sldId id="270"/>
           </p14:sldIdLst>
         </p14:section>
-        <p14:section name="Partea V – CapCut" id="{cc157896-39ac-0238-0acf-93fa19e37214}">
+        <p14:section name="Partea V – CapCut" id="{1c2fc6c3-3cfb-bd2d-684f-01494e30217f}">
           <p14:sldIdLst>
             <p14:sldId id="271"/>
             <p14:sldId id="272"/>
@@ -169,7 +169,7 @@
             <p14:sldId id="274"/>
           </p14:sldIdLst>
         </p14:section>
-        <p14:section name="Partea VI – Concluzie" id="{dd142f7d-bf0c-c1e1-675e-be5475a6e8cf}">
+        <p14:section name="Partea VI – Concluzie" id="{3c402a23-6466-2048-8910-9744f834e1fc}">
           <p14:sldIdLst>
             <p14:sldId id="275"/>
           </p14:sldIdLst>
@@ -586,7 +586,7 @@
 4. TikTok: algoritmul, trendurile, sunetele, monetizarea, LIVE-urile și comentariile negative.
 5. CapCut: editare video pas cu pas.
 6. Planul de acțiune pentru prima săptămână.
-Replică de deschidere: „Cea mai frumoasă transformare de blond din oraș nu aduce nicio clientă dacă stă doar în galeria telefonului."
+Replică de deschidere: „Cea mai frumoasă transformare de blond din oraș nu aduce nicio clientă dacă stă doar în galeria telefonului.”
 Notă pentru prezentator: ilustrațiile din prezentare sunt schematice. Ideal, înlocuiți-le cu fotografii reale înainte și după din portofoliul vostru (cu acordul clientelor).</a:t>
             </a:r>
             <a:endParaRPr lang="en-US" dirty="0"/>
@@ -676,26 +676,26 @@
             <a:r>
               <a:rPr lang="en-US" dirty="0"/>
               <a:t>SFATURI ȘI TRUCURI INSTAGRAM
-1. Rezultatul final în prima secundă. Apoi „uite de unde am pornit". Oamenii decid foarte repede dacă rămân.
-2. Text pe ecran. Mulți urmăresc videoclipurile fără sunet. Un titlu mare: „Din negru în blond, fără să rup părul".
+1. Rezultatul final în prima secundă. Apoi „uite de unde am pornit”. Oamenii decid foarte repede dacă rămân.
+2. Text pe ecran. Mulți urmăresc videoclipurile fără sunet. Un titlu mare: „Din negru în blond, fără să rup părul”.
 3. Coperta Reels-ului: alege un cadru cu rezultatul și un text scurt, în culorile grilei. Profilul arată ordonat și profesionist.
-4. Story-urile cu întrebări frecvente, recenzii și transformări le salvezi în Evidențiate. Devin „meniul" salonului.
+4. Story-urile cu întrebări frecvente, recenzii și transformări le salvezi în Evidențiate. Devin „meniul” salonului.
 5. Funcția Colaborare (Collab): o postare comună apare pe ambele profiluri – al tău și al clientei / makeup artistului / fotografului. Dublezi publicul.
 6. Statistici (Insights): o dată pe săptămână, uită-te care postări au avut cele mai multe salvări și distribuiri. Fă mai mult din ce funcționează.
 7. Bonus: răspunde la mesaje cu mesaje vocale – clientele simt omul din spatele contului.
 EXEMPLE DE DESCRIERI SCURTE
-• „De la negru vopsit acasă la bej rece, în 2 ședințe. Răbdarea e cel mai bun decolorant."
-• „AirTouch = blond care crește frumos. Revii peste 4 luni, nu peste 4 săptămâni."
-• „Ea a zis «doar vârfurile». Eu am auzit «dă-mi încredere». Rezultat →"
-• „Nivel de pornire: 5. Nivel final: 9. Nivel de fericire: 10."
+• „De la negru vopsit acasă la bej rece, în 2 ședințe. Răbdarea e cel mai bun decolorant.”
+• „AirTouch = blond care crește frumos. Revii peste 4 luni, nu peste 4 săptămâni.”
+• „Ea a zis «doar vârfurile». Eu am auzit «dă-mi încredere». Rezultat →”
+• „Nivel de pornire: 5. Nivel final: 9. Nivel de fericire: 10.”
 Structură: rezultat + o informație utilă + îndemn la acțiune.
 IDEI DE VIDEOCLIPURI
 • Transformare rapidă în 15 secunde, pe repede înainte.
-• „3 greșeli care îți strică blondul acasă" (apă fierbinte, placa fără protecție, șampon violet folosit greșit).
-• „Poza pe care mi-a arătat-o clienta vs. ce am putut realiza sănătos" – educă așteptările.
+• „3 greșeli care îți strică blondul acasă” (apă fierbinte, placa fără protecție, șampon violet folosit greșit).
+• „Poza pe care mi-a arătat-o clienta vs. ce am putut realiza sănătos” – educă așteptările.
 • Pașii unui AirTouch: secționare, uscătorul care separă firele, decolorare, toner.
-• „O zi din viața unei coloriste".
-• Răspunsuri la întrebări: „Pot face blond dacă am păr vopsit negru?"</a:t>
+• „O zi din viața unei coloriste”.
+• Răspunsuri la întrebări: „Pot face blond dacă am păr vopsit negru?”</a:t>
             </a:r>
             <a:endParaRPr lang="en-US" dirty="0"/>
           </a:p>
@@ -784,8 +784,8 @@
             <a:r>
               <a:rPr lang="en-US" dirty="0"/>
               <a:t>CUM SUNT RECOMANDATE VIDEOCLIPURILE
-• Pagina „Pentru tine" (For You) arată fiecărui om videoclipuri alese după ce i-a plăcut înainte – nu doar de la conturile pe care le urmărește. De aceea un cont nou, cu 0 urmăritori, poate ajunge la mii de oameni.
-• TikTok spune public că ia în calcul: interacțiunile utilizatorului (ce urmărește până la capăt, ce apreciază, comentează, distribuie, ce sare), informațiile despre videoclip (descriere, sunet, hashtaguri, text) și setări de cont/dispozitiv (limbă, țară). Formula exactă nu este publică – oricine vă vinde „secretul algoritmului" exagerează.
+• Pagina „Pentru tine” (For You) arată fiecărui om videoclipuri alese după ce i-a plăcut înainte – nu doar de la conturile pe care le urmărește. De aceea un cont nou, cu 0 urmăritori, poate ajunge la mii de oameni.
+• TikTok spune public că ia în calcul: interacțiunile utilizatorului (ce urmărește până la capăt, ce apreciază, comentează, distribuie, ce sare), informațiile despre videoclip (descriere, sunet, hashtaguri, text) și setări de cont/dispozitiv (limbă, țară). Formula exactă nu este publică – oricine vă vinde „secretul algoritmului” exagerează.
 PROCESUL, SIMPLIFICAT
 1. Publici.
 2. Videoclipul e arătat unui număr de oameni – inclusiv persoane care nu te urmăresc, dar care au arătat interes pentru beauty/păr.
@@ -793,12 +793,12 @@
 4. Dacă reacțiile sunt bune, îl arată unui grup mai mare. Și tot așa.
 DE CE CONTEAZĂ PRIMELE SECUNDE
 • În primele 1–3 secunde ale videoclipului omul decide dacă derulează. Dacă pleacă, timpul de vizionare scade.
-• De aceea începi cu ceva care oprește degetul: rezultatul final, o întrebare, un „înainte" șocant.
+• De aceea începi cu ceva care oprește degetul: rezultatul final, o întrebare, un „înainte” șocant.
 TIMPUL DE VIZIONARE ȘI FINALIZAREA
 • Un video de 10 secunde văzut până la capăt (și re-văzut) transmite mai mult decât un video de 60 de secunde abandonat la secunda 4.
 • Taie tot ce e mort: așteptarea procesării, ștersul periei.
 INTERACȚIUNI ȘI DISTRIBUIRI
-• Comentariile și distribuirile arată că videoclipul i-a provocat omului o reacție. Distribuirea („uite, așa vreau și eu!") e un semnal foarte puternic pentru beauty.
+• Comentariile și distribuirile arată că videoclipul i-a provocat omului o reacție. Distribuirea („uite, așa vreau și eu!”) e un semnal foarte puternic pentru beauty.
 ATENȚIE – DIFERENȚA:
 • Primele SECUNDE ale videoclipului = atenția omului. Le controlezi complet prin montaj.
 • Primele MINUTE / ore după publicare = primele reacții ale publicului de test. Sunt utile, dar NU decid definitiv soarta videoclipului. Multe videoclipuri cresc după câteva zile sau chiar săptămâni, când TikTok găsește publicul potrivit. Nu ștergeți un video doar pentru că a avut puține vizualizări în prima oră.
@@ -893,15 +893,15 @@
               <a:t>CE ESTE UN TREND
 • Un format pe care mulți creatori îl repetă în aceeași perioadă: un sunet, o structură de video, o glumă, o mișcare. Trendurile vin și pleacă repede (de la câteva zile la câteva săptămâni).
 CUM GĂSIM TRENDURI RELEVANTE
-• Derulează Pagina „Pentru tine" 10 minute pe zi ca „cercetare" (da, acum e muncă!). Salvează în favorite ce vezi des.
-• Caută „hair transformation", „balayage", „blonde" și uită-te ce formate se repetă.
+• Derulează Pagina „Pentru tine” 10 minute pe zi ca „cercetare” (da, acum e muncă!). Salvează în favorite ce vezi des.
+• Caută „hair transformation”, „balayage”, „blonde” și uită-te ce formate se repetă.
 • TikTok Creative Center (ads.tiktok.com/business/creativecenter) arată sunete și hashtaguri populare pe regiuni.
-• Când apare un sunet cu săgeată de „în creștere" sau vezi același sunet la multe videoclipuri recente – e un trend activ.
+• Când apare un sunet cu săgeată de „în creștere” sau vezi același sunet la multe videoclipuri recente – e un trend activ.
 CUM ADAPTĂM UN TREND PENTRU HAIRSTYLING
 • Păstrezi structura, înlocuiești subiectul. Exemple:
-  – „Tell me without telling me" → „Spune-mi că ești coloristă fără să-mi spui": arăți mâinile cu mănuși pătate de toner.
-  – Trendurile de tip „glow up" → transformarea clientei.
-  – Trendurile de tip „POV" → „POV: clienta spune «doar puțin mai deschis»".
+  – „Tell me without telling me” → „Spune-mi că ești coloristă fără să-mi spui”: arăți mâinile cu mănuși pătate de toner.
+  – Trendurile de tip „glow up” → transformarea clientei.
+  – Trendurile de tip „POV” → „POV: clienta spune «doar puțin mai deschis»”.
 • Nu orice trend ți se potrivește. Dacă nu are legătură cu publicul tău, sari peste el.
 SUNETELE
 • Un sunet popular poate ajuta la descoperire când: este încă în creștere (nu la final de trend), se potrivește cu ritmul tranziției și cu publicul tău. Oamenii care au interacționat cu acel sunet pot vedea mai ușor alte videoclipuri cu el. Dar sunetul NU garantează vizualizări.
@@ -912,9 +912,9 @@
 • Folosirea muzicii protejate în scop comercial (de ex. într-o reclamă pentru salon) poate duce la eliminarea sunetului sau a videoclipului.
 • Decizia cont personal vs. business: business oferă statistici și instrumente de afaceri, dar muzică limitată. Gândiți-vă ce vă e mai util; pentru salon, recomandarea sigură e să respectați regulile de muzică comercială.
 TRANZIȚII SIMPLE PENTRU ÎNAINTE ȘI DUPĂ
-1. Mâna pe cameră: acoperi obiectivul la finalul cadrului „înainte", începi cadrul „după" luând mâna de pe obiectiv.
+1. Mâna pe cameră: acoperi obiectivul la finalul cadrului „înainte”, începi cadrul „după” luând mâna de pe obiectiv.
 2. Pocnitul din degete / bătaia din palme: cadrul se schimbă exact pe sunet.
-3. Rotirea scaunului: clienta e întoarsă cu spatele în „înainte", se întoarce în „după".
+3. Rotirea scaunului: clienta e întoarsă cu spatele în „înainte”, se întoarce în „după”.
 4. Aruncarea părului: clienta își dă părul peste umăr – taie exact în mijlocul mișcării.
 Secretul: telefonul pe trepied, în același loc, clienta în aceeași poziție. Tranziția o lipești în CapCut.</a:t>
             </a:r>
@@ -1016,22 +1016,22 @@
 Disponibilitate: doar în anumite țări. Lista confirmată public în 2026 include SUA, Marea Britanie, Germania, Franța, Japonia, Coreea de Sud, Brazilia și Mexic. România NU apare pe această listă la data pregătirii prezentării (octombrie 2026). Nu promitem cursantelor acces la acest program.
 CE POATE FI DISPONIBIL ȘI ÎN ROMÂNIA (verificați în aplicație)
 • Cadouri LIVE (Gifts) – spectatorii trimit cadouri virtuale în timpul LIVE-ului; pentru a primi cadouri trebuie să ai minimum 18 ani și funcția trebuie să fie activă pentru contul tău.
-• Colaborări plătite cu branduri – marcate obligatoriu ca parteneriat plătit („Conținut de marcă").
-• Pentru un hairstilist, cea mai sigură „monetizare" rămâne: TikTok aduce cliente → cliente aduc venit.
+• Colaborări plătite cu branduri – marcate obligatoriu ca parteneriat plătit („Conținut de marcă”).
+• Pentru un hairstilist, cea mai sigură „monetizare” rămâne: TikTok aduce cliente → cliente aduc venit.
 UNDE VERIFICI ELIGIBILITATEA
-• Profil → meniul ☰ (dreapta sus) → TikTok Studio → secțiunea Monetizare / Programe. Acolo vezi exact pentru ce programe ești eligibilă și ce condiții îți lipsesc. În unele versiuni secțiunea se numește „Instrumente pentru creatori". Ce vezi în aplicație e mai sigur decât orice articol de pe internet.
+• Profil → meniul din dreapta sus → TikTok Studio → secțiunea Monetizare / Programe. Acolo vezi exact pentru ce programe ești eligibilă și ce condiții îți lipsesc. În unele versiuni secțiunea se numește „Instrumente pentru creatori”. Ce vezi în aplicație e mai sigur decât orice articol de pe internet.
 LIVE – CE ESTE: o transmisiune video în direct; urmăritorii îți pot scrie întrebări în timp real.
 CUM AJUTĂ UN HAIRSTILIST: construiește încredere (oamenii văd că știi ce faci, fără montaj), răspunzi la întrebări în timp real, demonstrezi o tehnică.
 ELIGIBILITATE LIVE
 • Minimum 18 ani (regula oficială TikTok din ghidul de siguranță LIVE).
 • Un număr minim de urmăritori care diferă în funcție de piață – frecvent este menționat pragul de 1.000, dar TikTok spune oficial că pragul poate varia pe regiune.
 • Cont în regulă, fără încălcări recente ale regulilor comunității.
-CUM VERIFICI: apasă butonul + (creare). Dacă în meniul de jos apare opțiunea „LIVE", ai acces. Altfel, verifică în TikTok Studio.
+CUM VERIFICI: apasă butonul + (creare). Dacă în meniul de jos apare opțiunea „LIVE”, ai acces. Altfel, verifică în TikTok Studio.
 IDEI DE LIVE PENTRU SALON
-• „Întreabă coloristă" – 20 de minute de întrebări despre blond.
+• „Întreabă colorista” – 20 de minute de întrebări despre blond.
 • Tonifiere sau uscare-coafare în direct (cu acordul clientei).
 • Rutina de îngrijire acasă, cu produsele pe masă.
-• „Diagnostic de culoare" – urmăritoarele trimit poze, tu le spui ce e realist.
+• „Diagnostic de culoare” – urmăritoarele trimit poze, tu le spui ce e realist.
 • Culisele unei zile în salon.
 Sfat: anunță LIVE-ul cu o zi înainte în Story și pe TikTok.
 Ghid oficial TikTok despre LIVE: https://www.tiktok.com/live/creator-networks/en/blog/how-to-go-live-on-tiktok
@@ -1123,21 +1123,21 @@
           <a:p>
             <a:r>
               <a:rPr lang="en-US" dirty="0"/>
-              <a:t>CE ESTE HATE-UL: comentarii răutăcioase, jignitoare, fără argumente, scrise ca să rănească sau să provoace. Nu orice critică e hate! „Mie mi se pare prea galben" e o opinie. „Ești o incompetentă" e hate.
+              <a:t>CE ESTE HATE-UL: comentarii răutăcioase, jignitoare, fără argumente, scrise ca să rănească sau să provoace. Nu orice critică e hate! „Mie mi se pare prea galben” e o opinie. „Ești o incompetentă” e hate.
 DE CE UNELE CONTROVERSE GENEREAZĂ MAI MULTE COMENTARII
 • Oamenii comentează când au o reacție puternică – fie că le place foarte mult, fie că nu sunt de acord.
 • Comentariile, răspunsurile și disputele sunt interacțiuni. Interacțiunile sunt unul dintre semnalele pe care platformele le pot lua în considerare când decid cui să mai arate un videoclip. De aceea uneori un video cu multe comentarii negative ajunge la mai mulți oameni.
 • DAR: atenția negativă nu e o strategie garantată și are un cost real – clientele potențiale citesc comentariile, iar reputația se reface greu. Nu provocăm intenționat conflicte, nu atacăm alți colegi de breaslă, nu răspundem cu jigniri.
 CUM RĂSPUNDEM LA CRITICA CONSTRUCTIVĂ
-• Mulțumește, explică, arată. Exemplu: comentariu „Iese galben". Răspuns: „Mulțumesc că ai observat! Lumina caldă din salon îl face să pară mai cald. Uite-l la lumina zilei 👇" – și faci un video-răspuns (funcția „Răspunde cu video"). Ai transformat critica în conținut util.
-• Comentariu „E prea scump": „Prețul include 2 decolorări cu protecție pentru fir și tonifiere. Prefer să fac blond sănătos decât blond rapid."
+• Mulțumește, explică, arată. Exemplu: comentariu „Iese galben”. Răspuns: „Mulțumesc că ai observat! Lumina caldă din salon îl face să pară mai cald. Uite-l la lumina zilei.” – și faci un video-răspuns (funcția „Răspunde cu video”). Ai transformat critica în conținut util.
+• Comentariu „E prea scump”: „Prețul include 2 decolorări cu protecție pentru fir și tonifiere. Prefer să fac blond sănătos decât blond rapid.”
 CÂND IGNORĂM, MODERĂM, BLOCĂM, RAPORTĂM
 • Ignorăm: răutatea fără argument. Nu hrănim provocarea.
 • Moderăm: TikTok și Instagram au filtre de cuvinte cheie (comentariile cu anumite cuvinte nu mai apar), opțiunea de a ascunde sau șterge comentarii, de a limita cine poate comenta. Setări → Confidențialitate → Comentarii.
 • Blocăm: când e atac personal sau hărțuire repetată.
 • Raportăm: amenințări, discriminare, hărțuire, conturi false care se dau drept tine. Apasă lung pe comentariu → Raportează.
 Pentru sănătatea mintală: nu citi comentariile seara târziu. Hate-ul spune mai mult despre cel care scrie decât despre lucrarea ta.
-Replică: „Haterii sunt ca firele rupte: nu le dai atenție, le tai și mergi mai departe."</a:t>
+Replică: „Haterii sunt ca firele rupte: nu le dai atenție, le tai și mergi mai departe.”</a:t>
             </a:r>
             <a:endParaRPr lang="en-US" dirty="0"/>
           </a:p>
@@ -1226,28 +1226,28 @@
             <a:r>
               <a:rPr lang="en-US" dirty="0"/>
               <a:t>SFATURI ȘI TRUCURI TIKTOK PENTRU BEAUTY
-1. Începe cu finalul. Primul cadru = blondul final fluturat în lumină. Apoi textul: „Uite de unde am pornit". Curiozitatea ține omul până la capăt.
+1. Începe cu finalul. Primul cadru = blondul final fluturat în lumină. Apoi textul: „Uite de unde am pornit”. Curiozitatea ține omul până la capăt.
 2. Lumina de zi. Filmează rezultatul lângă fereastră. Lumina caldă a salonului face blondul galben și pare că ai greșit nuanța.
 3. Text mare pe ecran, în zona sigură: sus sau la mijloc. Jos și în dreapta sunt descrierea și butoanele TikTok, care acoperă textul.
 4. Buclă: un final care se leagă natural de început (clienta își aruncă părul la final, iar videoclipul începe cu aceeași mișcare). Mulți îl revăd fără să-și dea seama – iar timpul de vizionare crește.
-5. Serii: „Blondul Mariei, ședința 1 din 3". Oamenii te urmăresc ca să vadă continuarea.
+5. Serii: „Blondul Mariei, ședința 1 din 3”. Oamenii te urmăresc ca să vadă continuarea.
 6. Răspunsuri video la comentarii: fiecare întrebare primită e o idee gata făcută de video.
 7. Bonus: durata – pentru transformări, 8–20 de secunde merg foarte bine. Videoclipurile educative pot fi mai lungi.
-8. Bonus: descriere cu cuvinte pe care oamenii le caută („balayage blond rece Iași") – mulți folosesc TikTok ca motor de căutare.
+8. Bonus: descriere cu cuvinte pe care oamenii le caută („balayage blond rece Iași”) – mulți folosesc TikTok ca motor de căutare.
 ÎNCEPUTURI CARE ATRAG ATENȚIA (primele 2–3 secunde)
-• „A venit cu negru vopsit acasă. A plecat blondă."
-• „Nu face asta cu blondul tău acasă!"
-• „Ce înseamnă de fapt AirTouch?"
-• „3 ore, 2 decolorări, o clientă fericită."
-• „Mi-a arătat poza asta. Am reușit?"
-• „Dacă ai blond și folosești placa zilnic, ascultă asta."
-• „Coloristele nu-ți spun asta, dar…" (doar dacă urmează ceva cu adevărat util!)
+• „A venit cu negru vopsit acasă. A plecat blondă.”
+• „Nu face asta cu blondul tău acasă!”
+• „Ce înseamnă de fapt AirTouch?”
+• „3 ore, 2 decolorări, o clientă fericită.”
+• „Mi-a arătat poza asta. Am reușit?”
+• „Dacă ai blond și folosești placa zilnic, ascultă asta.”
+• „Coloristele nu-ți spun asta, dar…” (doar dacă urmează ceva cu adevărat util!)
 IDEI DE CONȚINUT CARE POT GENERA INTERES
-• „Ghicește nivelul de pornire" – oamenii comentează cu răspunsul.
-• „Ce cer clientele vs. ce le trebuie de fapt".
-• Mituri despre păr: „Decolorantul nu arde părul dacă…".
-• Prețurile explicate: „De ce un balayage costă cât costă".
-• Cronometrul: „Un AirTouch în 60 de secunde".
+• „Ghicește nivelul de pornire” – oamenii comentează cu răspunsul.
+• „Ce cer clientele vs. ce le trebuie de fapt”.
+• Mituri despre păr: „Decolorantul nu arde părul dacă…”.
+• Prețurile explicate: „De ce un balayage costă cât costă”.
+• Cronometrul: „Un AirTouch în 60 de secunde”.
 Atenție: un început spectaculos trebuie să-și țină promisiunea. Dacă momeala nu are legătură cu videoclipul, oamenii pleacă și nu mai revin.</a:t>
             </a:r>
             <a:endParaRPr lang="en-US" dirty="0"/>
@@ -1337,13 +1337,13 @@
             <a:r>
               <a:rPr lang="en-US" dirty="0"/>
               <a:t>DEMONSTRAȚIE: dacă se poate, proiectați telefonul în timp ce faceți pașii live. Schema de pe slide e simplificată – NU este o captură reală a interfeței. Aplicația se actualizează des, iar meniurile pot avea alte denumiri sau altă poziție, în funcție de versiune, limba setată (română/engleză) și dispozitiv. Mai jos am folosit denumirile din interfața în engleză, cu traducerea.
-1. IMPORTUL: deschizi CapCut → „New project" (Proiect nou) → selectezi clipurile în ordinea dorită → „Add" (Adaugă). Format: atinge „Ratio"/Format → 9:16 pentru Reels/TikTok.
-2. TĂIERE ȘI SCURTARE: atingi clipul pe cronologie (timeline) – apare un chenar alb. Tragi marginile spre interior ca să scurtezi. Pentru a tăia la mijloc: pui linia albă (playhead) în punctul dorit → „Split" (Împarte) → selectezi bucata în plus → „Delete" (Șterge).
+1. IMPORTUL: deschizi CapCut → „New project” (Proiect nou) → selectezi clipurile în ordinea dorită → „Add” (Adaugă). Format: atinge „Ratio”/Format → 9:16 pentru Reels/TikTok.
+2. TĂIERE ȘI SCURTARE: atingi clipul pe cronologie (timeline) – apare un chenar alb. Tragi marginile spre interior ca să scurtezi. Pentru a tăia la mijloc: pui linia albă (playhead) în punctul dorit → „Split” (Împarte) → selectezi bucata în plus → „Delete” (Șterge).
 Regula: dacă nu se întâmplă nimic în cadru 2 secunde, taie.
 3. ORDINEA SECVENȚELOR: ții apăsat pe un clip; clipurile se micșorează în pătrățele; îl tragi în locul dorit.
-4. VITEZA: atingi clipul → „Speed" (Viteză) → „Normal" (glisor, ex. 2x, 5x – aplicarea decolorantului pe repede înainte) sau „Curve" (Curbă – încetinește și accelerează în același clip, efect spectaculos la fluturarea părului). Atenție: viteza schimbă și sunetul clipului – de obicei îl pui pe mut și adaugi muzică.
-5. MUZICĂ ȘI SUNETE: „Audio" în bara de jos → „Sounds" (biblioteca CapCut), „Extracted" (extragi sunetul dintr-un alt video din galerie), „Sound FX" (efecte – pocnet, „swoosh"). Pentru TikTok poți adăuga sunetul în trend direct în TikTok, la publicare, și să lași CapCut fără muzică.
-6. TRANZIȚII: între două clipuri apare un pătrățel alb mic. Îl atingi → alegi o tranziție (ex. „Blur", „Zoom", „Flash") → ajustezi durata → „Apply to all" doar dacă vrei aceeași peste tot. Pentru înainte/după, adesea cea mai bună tranziție e tăietura simplă exact pe sunet sau mâna pe cameră.
+4. VITEZA: atingi clipul → „Speed” (Viteză) → „Normal” (glisor, ex. 2x, 5x – aplicarea decolorantului pe repede înainte) sau „Curve” (Curbă – încetinește și accelerează în același clip, efect spectaculos la fluturarea părului). Atenție: viteza schimbă și sunetul clipului – de obicei îl pui pe mut și adaugi muzică.
+5. MUZICĂ ȘI SUNETE: „Audio” în bara de jos → „Sounds” (biblioteca CapCut), „Extracted” (extragi sunetul dintr-un alt video din galerie), „Sound FX” (efecte – pocnet, „swoosh”). Pentru TikTok poți adăuga sunetul în trend direct în TikTok, la publicare, și să lași CapCut fără muzică.
+6. TRANZIȚII: între două clipuri apare un pătrățel alb mic. Îl atingi → alegi o tranziție (ex. „Blur”, „Zoom”, „Flash”) → ajustezi durata → „Apply to all” doar dacă vrei aceeași peste tot. Pentru înainte/după, adesea cea mai bună tranziție e tăietura simplă exact pe sunet sau mâna pe cameră.
 Tutoriale oficiale CapCut (verificabile):
 • Viteză: https://www.capcut.com/resource/how-to-speed-up-a-video
 • Adăugare voce/sunet: https://www.capcut.com/resource/how-to-add-voice-in-a-video</a:t>
@@ -1434,13 +1434,13 @@
           <a:p>
             <a:r>
               <a:rPr lang="en-US" dirty="0"/>
-              <a:t>7. TEXT: bara de jos → „Text" → „Add text" (Adaugă text). Scrii, alegi stilul, îl muți cu degetul. Pe cronologie apare o bandă de text pe care o lungești/scurtezi ca să stea cât vrei. Fonturi lizibile, cel mult 2 fonturi într-un video. Pune textul sus sau la mijloc, nu jos-dreapta (acolo sunt butoanele aplicațiilor).
-8. SUBTITRĂRI AUTOMATE: „Text" → „Auto captions" (Subtitrări automate) → alegi limba vorbită (verifică dacă româna e disponibilă în versiunea ta) → generezi. CapCut transcrie vocea. Citește-le întotdeauna: „balayage" poate deveni „bala iaje". Le poți stiliza pe toate odată. Ajută enorm, pentru că mulți privesc fără sunet. În versiunea gratuită pot exista limite de utilizare.
-9. VOCEA PESTE VIDEO: pui playhead-ul la început → „Audio" → „Record"/„Voiceover" (Înregistrare) → ții apăsat butonul și vorbești. Apoi poți micșora volumul sunetului original (atingi clipul → „Volume"). Sfat: înregistrează într-o cameră mică, cu telefonul aproape, fără uscătoare pornite.
-10. EDITARE PERSONALIZATĂ: aceeași „semnătură" în toate videoclipurile – același font, aceleași culori pentru text, același tip de introducere. „Adjust" (Ajustare) pentru luminozitate/contrast – DAR nu modifica nuanța părului cu filtre; blondul trebuie să arate ca în realitate. Poți salva un proiect ca „model" și îl duplici de fiecare dată.
-11. ȘABLOANE (TEMPLATES): fila „Templates" (Șabloane) din aplicație → cauți ex. „before after", „hair transformation" → „Use template" → alegi clipurile tale → export. Ritmul, tranzițiile și muzica sunt deja făcute. Șabloanele marcate cu diamant/coroană sunt Pro. Atenție: muzica din șablon poate să nu fie permisă pe conturile de business.
+              <a:t>7. TEXT: bara de jos → „Text” → „Add text” (Adaugă text). Scrii, alegi stilul, îl muți cu degetul. Pe cronologie apare o bandă de text pe care o lungești/scurtezi ca să stea cât vrei. Fonturi lizibile, cel mult 2 fonturi într-un video. Pune textul sus sau la mijloc, nu jos-dreapta (acolo sunt butoanele aplicațiilor).
+8. SUBTITRĂRI AUTOMATE: „Text” → „Auto captions” (Subtitrări automate) → alegi limba vorbită (verifică dacă româna e disponibilă în versiunea ta) → generezi. CapCut transcrie vocea. Citește-le întotdeauna: „balayage” poate deveni „bala iaje”. Le poți stiliza pe toate odată. Ajută enorm, pentru că mulți privesc fără sunet. În versiunea gratuită pot exista limite de utilizare.
+9. VOCEA PESTE VIDEO: pui playhead-ul la început → „Audio” → „Record”/„Voiceover” (Înregistrare) → ții apăsat butonul și vorbești. Apoi poți micșora volumul sunetului original (atingi clipul → „Volume”). Sfat: înregistrează într-o cameră mică, cu telefonul aproape, fără uscătoare pornite.
+10. EDITARE PERSONALIZATĂ: aceeași „semnătură” în toate videoclipurile – același font, aceleași culori pentru text, același tip de introducere. „Adjust” (Ajustare) pentru luminozitate/contrast – DAR nu modifica nuanța părului cu filtre; blondul trebuie să arate ca în realitate. Poți salva un proiect ca „model” și îl duplici de fiecare dată.
+11. ȘABLOANE (TEMPLATES): fila „Templates” (Șabloane) din aplicație → cauți ex. „before after”, „hair transformation” → „Use template” → alegi clipurile tale → export. Ritmul, tranzițiile și muzica sunt deja făcute. Șabloanele marcate cu diamant/coroană sunt Pro. Atenție: muzica din șablon poate să nu fie permisă pe conturile de business.
 Ghid oficial: https://www.capcut.com/help/use-template
-12. EXPORT: săgeata/butonul „Export" din dreapta sus → rezoluție 1080p, 30 fps (suficient pentru toate platformele) → salvezi în galerie. Format 9:16 (1080×1920) – același fișier merge pe Instagram Reels, Facebook Reels, TikTok și Story. Poți distribui direct în TikTok din ecranul de export.
+12. EXPORT: săgeata/butonul „Export” din dreapta sus → rezoluție 1080p, 30 fps (suficient pentru toate platformele) → salvezi în galerie. Format 9:16 (1080×1920) – același fișier merge pe Instagram Reels, Facebook Reels, TikTok și Story. Poți distribui direct în TikTok din ecranul de export.
 Sfat: încarcă videoclipul nativ în fiecare aplicație (nu distribui linkul de pe TikTok pe Instagram). Dacă exporți din TikTok, video-ul are filigranul TikTok – pe Instagram e mai bine fișierul curat din CapCut.
 Ghid oficial pentru subtitrări: https://www.capcut.com/resource/how-to-add-subtitle-in-capcut</a:t>
             </a:r>
@@ -1533,9 +1533,9 @@
               <a:t>GRATUIT vs PRO – pe scurt
 • Versiunea gratuită are tot ce trebuie pentru un hairstilist la început: tăiere, ordine, viteză (inclusiv curbă), text, muzică din bibliotecă, înregistrare voce, multe tranziții, efecte și șabloane gratuite, export la 1080p.
 • Pro (abonament) adaugă de obicei: elementele marcate cu diamant/coroană (efecte, filtre, tranziții, fonturi, șabloane premium), limite mai mari la funcțiile AI (subtitrări automate, eliminarea fundalului, îmbunătățirea vocii etc.), export până la 4K/60 fps, fără filigran, spațiu cloud mai mare.
-• Filigranul: în multe situații, folosirea unui element Pro într-un proiect gratuit cere abonament la export sau adaugă filigran. Sursele nu sunt unanime pentru toate versiunile, de aceea pe slide scrie „poate apărea, după caz".
+• Filigranul: în multe situații, folosirea unui element Pro într-un proiect gratuit cere abonament la export sau adaugă filigran. Sursele nu sunt unanime pentru toate versiunile, de aceea pe slide scrie „poate apărea, după caz”.
 PREȚ: diferă în funcție de țară, platformă (iOS/Android/desktop) și ofertă (lunar/anual). Verificați prețul direct în aplicație, nu pe internet.
-ATENȚIE: CapCut își schimbă des pachetele (ex. „Standard" și „Pro" în unele regiuni). Ce e gratuit azi poate deveni Pro mâine și invers. Verificați înainte de curs pe telefonul vostru.
+ATENȚIE: CapCut își schimbă des pachetele (ex. „Standard” și „Pro” în unele regiuni). Ce e gratuit azi poate deveni Pro mâine și invers. Verificați înainte de curs pe telefonul vostru.
 RECOMANDARE PENTRU ÎNCEPĂTOARE: rămâneți pe gratuit primele 2–3 luni. Dacă editați zilnic și vă lovesc limitele (subtitrări, filigran, șabloane), testați Pro o lună și vedeți dacă vă economisește timp. Un abonament care vă scade timpul de editare de la 40 la 15 minute pe video se poate plăti singur.
 Comparație oficială CapCut (Standard vs Pro): https://www.capcut.com/resource/capcut-standard-vs-pro</a:t>
             </a:r>
@@ -1627,7 +1627,7 @@
               <a:rPr lang="en-US" dirty="0"/>
               <a:t>SFATURI ȘI TRUCURI CAPCUT
 1. Filmează vertical (9:16) de la început. Dacă filmezi orizontal, la editare tai din cadru tocmai lungimile blondului.
-2. Trepied fix + marcaj pe podea pentru scaun. Când „înainte" și „după" sunt filmate exact din același punct, tranziția arată ca magie – clienta pare că se transformă într-o clipă.
+2. Trepied fix + marcaj pe podea pentru scaun. Când „înainte” și „după” sunt filmate exact din același punct, tranziția arată ca magie – clienta pare că se transformă într-o clipă.
 3. Viteză inteligentă: aplicarea decolorantului sau secționarea pentru AirTouch pe 3x–5x (procesul devine hipnotic), rezultatul final pe 1x sau în reluare lentă la 0,5x când clienta își scutură părul. Contrastul de viteză face finalul să pară și mai spectaculos.
 4. Taie așteptarea: timpul de procesare, ștersul, căutatul pensulei. Un video de transformare bun are 8–20 de secunde, nu 2 minute.
 5. Fără filtre pe păr: corectezi doar lumina (Adjust: luminozitate, contrast). Dacă blondul bej devine roz din filtru, clienta nouă va cere ceva ce nu există.
@@ -1642,7 +1642,7 @@
 • Șabloane – folosire și export: https://www.capcut.com/help/use-and-export-templates-in-capcut
 • Tranziții cu șablon: https://www.capcut.com/resource/epic-transitions-template-tutorial
 • Gratuit vs Pro: https://www.capcut.com/resource/capcut-standard-vs-pro
-Sfat pentru prezentator: verificați linkurile înainte de curs (CapCut își reorganizează uneori site-ul). Ca demonstrație live, puteți căuta în YouTube „CapCut tutorial beginner" sau „CapCut hair transformation" și alege un tutorial recent, din ultimele luni.</a:t>
+Sfat pentru prezentator: verificați linkurile înainte de curs (CapCut își reorganizează uneori site-ul). Ca demonstrație live, puteți căuta în YouTube „CapCut tutorial beginner” sau „CapCut hair transformation” și alege un tutorial recent, din ultimele luni.</a:t>
             </a:r>
             <a:endParaRPr lang="en-US" dirty="0"/>
           </a:p>
@@ -1731,11 +1731,11 @@
             <a:r>
               <a:rPr lang="en-US" dirty="0"/>
               <a:t>DE CE ONLINE: Astăzi, majoritatea clientelor noi vă verifică pe Instagram, Facebook sau TikTok înainte să sune. Contul vostru este vitrina salonului – și e deschisă 24 din 24.
-NIȘA: Nișa înseamnă „pentru ce vreau să fiu cunoscută". Nu ești „hairstilist pentru toată lumea", ești „specialista în blonduri reci din Cluj". Paradoxal, cu cât e mai îngustă nișa la început, cu atât crești mai repede, pentru că algoritmul și oamenii înțeleg imediat despre ce e contul tău.
+NIȘA: Nișa înseamnă „pentru ce vreau să fiu cunoscută”. Nu ești „hairstilist pentru toată lumea”, ești „specialista în blonduri reci din Cluj”. Paradoxal, cu cât e mai îngustă nișa la început, cu atât crești mai repede, pentru că algoritmul și oamenii înțeleg imediat despre ce e contul tău.
 Exemplu: dacă cele mai bune lucrări ale tale sunt balayage-urile, primele 20 de postări să fie balayage. Abia apoi extinzi spre tunsori, îngrijire, coafuri.
 DE CE ÎNAINTE ȘI DUPĂ: este cel mai simplu conținut posibil – nu trebuie să vorbești, nu trebuie să apari, iar rezultatul vorbește singur. E și cel mai convingător: clienta își imaginează propria transformare.
-IDENTITATE VIZUALĂ: alege un perete sau un colț din salon cu lumină bună (ideal lângă fereastră). Toate pozele „după" se fac acolo. În 2 luni, oamenii vor recunoaște lucrările tale din derulare înainte să vadă numele contului.
-Replică: „Consecvența e ca tonerul: nu se vede din prima, dar fără ea totul arată galben."</a:t>
+IDENTITATE VIZUALĂ: alege un perete sau un colț din salon cu lumină bună (ideal lângă fereastră). Toate pozele „după” se fac acolo. În 2 luni, oamenii vor recunoaște lucrările tale din derulare înainte să vadă numele contului.
+Replică: „Consecvența e ca tonerul: nu se vede din prima, dar fără ea totul arată galben.”</a:t>
             </a:r>
             <a:endParaRPr lang="en-US" dirty="0"/>
           </a:p>
@@ -1823,16 +1823,16 @@
           <a:p>
             <a:r>
               <a:rPr lang="en-US" dirty="0"/>
-              <a:t>MESAJUL FINAL: „Nu trebuie să fii influencer ca să îți promovezi munca. Trebuie doar să începi să o arăți."
+              <a:t>MESAJUL FINAL: „Nu trebuie să fii influencer ca să îți promovezi munca. Trebuie doar să începi să o arăți.”
 Nu aveți nevoie de 100.000 de urmăritori. Aveți nevoie de cele 300 de femei din orașul vostru care vor să arate bine și încă nu știu că existați.
 PLANUL DE ACȚIUNE PENTRU SĂPTĂMÂNA ASTA
 1. Filmează o transformare – mâine, la prima clientă care acceptă. Trepied, lumină de fereastră, înainte și după din același punct.
 2. Editează un videoclip scurt în CapCut – 10–20 de secunde, text pe ecran, tranziție simplă, subtitrări dacă vorbești.
-3. Publică-l pe platforma potrivită – Reels pe Instagram și Facebook, același fișier pe TikTok; un Story cu „locuri libere".
+3. Publică-l pe platforma potrivită – Reels pe Instagram și Facebook, același fișier pe TikTok; un Story cu „locuri libere”.
 4. Analizează reacțiile după câteva zile (nu după o oră!) – vizualizări, cât au privit, salvări, comentarii, mesaje.
 5. Repetă și îmbunătățește – schimbă un singur lucru o dată: începutul, sunetul sau textul.
 Exercițiu de final (opțional, 5 minute): fiecare cursantă scrie pe o hârtie: nișa ei, 3 idei de videoclipuri și ziua în care publică primul video. O fotografiază și o pune ca fundal de ecran.
-Replică de final: „Cel mai bun moment să începi a fost acum un an. Al doilea cel mai bun e la următoarea clientă."
+Replică de final: „Cel mai bun moment să începi a fost acum un an. Al doilea cel mai bun e la următoarea clientă.”
 Mulțumesc! Întrebări?</a:t>
             </a:r>
             <a:endParaRPr lang="en-US" dirty="0"/>
@@ -1925,21 +1925,21 @@
 ETAPA 1 – Doar transformarea (săptămânile 1–4)
 • Telefonul pe trepied, filmezi doar părul.
 • Exemple foarte simple: părul ud vs. uscat și coafat; clienta își scutură părul în lumina ferestrei; o rotire lentă a scaunului; perie trasă prin lungimi.
-• Nu ai nevoie de față, nu ai nevoie de voce. Pune un text pe ecran: „Din negru vopsit în bej rece".
+• Nu ai nevoie de față, nu ai nevoie de voce. Pune un text pe ecran: „Din negru vopsit în bej rece”.
 ETAPA 2 – Vocea ta pe fundal (după ce te obișnuiești)
 • Înregistrezi vocea în CapCut, acasă, liniștită, peste video deja filmat. Poți reînregistra de câte ori vrei.
-• Structură simplă: „De unde am pornit – ce am făcut – ce rezultat am obținut – cum se întreține".
+• Structură simplă: „De unde am pornit – ce am făcut – ce rezultat am obținut – cum se întreține”.
 • Sfat: scrie 3 propoziții pe hârtie și citește-le. Nimeni nu vede foaia.
 ETAPA 3 – Apari în cadru
 • Începe cu ceva ce faci oricum: explici clientei ce urmează. Filmează conversația.
 • Apoi: un singur sfat, 15 secunde, privind în cameră.
 • Oamenii vin pentru rezultat, dar rămân pentru omul din spatele lui. Personalitatea ta e diferența față de alte saloane.
 Sfaturi anti-emoții:
-• Gândește-te că vorbești cu o singură clientă, nu cu „internetul".
+• Gândește-te că vorbești cu o singură clientă, nu cu „internetul”.
 • Filmează mai multe dubluri; nimeni nu vede ce n-ai publicat.
 • Primele 10 videoclipuri vor fi cele mai slabe – și e perfect normal. Așa a început toată lumea.
 • Lumină din față (fereastra în fața ta, nu în spate).
-Replică: „Camera nu e o clientă dificilă. Nu cere retușuri gratuite."</a:t>
+Replică: „Camera nu e o clientă dificilă. Nu cere retușuri gratuite.”</a:t>
             </a:r>
             <a:endParaRPr lang="en-US" dirty="0"/>
           </a:p>
@@ -2029,20 +2029,20 @@
               <a:rPr lang="en-US" dirty="0"/>
               <a:t>PROFIL vs PAGINĂ
 • Profilul personal e pentru tine ca persoană. Are limită de prieteni (5.000) și nu oferă statistici sau reclame pentru afacere.
-• Pagina profesională (pe care multe o numesc „pagina de like-uri") este pentru salon: oricine o poate urmări, are recenzii, program, hartă, statistici și posibilitatea de a face reclame plătite.
+• Pagina profesională (pe care multe o numesc „pagina de like-uri”) este pentru salon: oricine o poate urmări, are recenzii, program, hartă, statistici și posibilitatea de a face reclame plătite.
 CUM O CREEZI
-• Din aplicația Facebook: Meniu (☰) → Pagini → Creează o pagină. Denumirile exacte pot varia ușor în funcție de versiunea aplicației.
-• Nume: numele salonului + ce faci, ex: „Studio Ana – Blond &amp; Balayage". Ajută la căutare.
+• Din aplicația Facebook: Meniu → Pagini → Creează o pagină. Denumirile exacte pot varia ușor în funcție de versiunea aplicației.
+• Nume: numele salonului + ce faci, ex: „Studio Ana – Blond &amp; Balayage”. Ajută la căutare.
 • Categoria: Salon de înfrumusețare / Salon de coafură.
 CE COMPLETĂM OBLIGATORIU
 • Adresa exactă (apare pe hartă – foarte important pentru clientele din zonă).
 • Programul de lucru, telefonul, WhatsApp-ul, site-ul sau linkul de programări.
 • Fotografia de profil: logo sau poza ta zâmbind; copertă: o transformare reprezentativă sau salonul.
-• Descriere scurtă: „Specialist blond, balayage și AirTouch în Cluj. Programări prin mesaj."
+• Descriere scurtă: „Specialist blond, balayage și AirTouch în Cluj. Programări prin mesaj.”
 PROGRAMĂRI MAI UȘOARE
-• Adaugă butonul de acțiune: „Trimite mesaj", „WhatsApp", „Sună" sau „Rezervă" (care poate duce la linkul aplicației de programări pe care o folosești).
-• Activează răspunsurile automate din Messenger: „Mulțumesc pentru mesaj! Spune-mi ce serviciu dorești și ziua preferată." – nicio clientă nu așteaptă fără răspuns.
-Replică: „Profilul personal e pentru poze de la mare. Pagina e pentru balayage."</a:t>
+• Adaugă butonul de acțiune: „Trimite mesaj”, „WhatsApp”, „Sună” sau „Rezervă” (care poate duce la linkul aplicației de programări pe care o folosești).
+• Activează răspunsurile automate din Messenger: „Mulțumesc pentru mesaj! Spune-mi ce serviciu dorești și ziua preferată.” – nicio clientă nu așteaptă fără răspuns.
+Replică: „Profilul personal e pentru poze de la mare. Pagina e pentru balayage.”</a:t>
             </a:r>
             <a:endParaRPr lang="en-US" dirty="0"/>
           </a:p>
@@ -2136,16 +2136,16 @@
 • Ordinea recomandată: 1. DUPĂ (cea mai frumoasă), 2. ÎNAINTE, 3. proces, 4. detaliu, 5. tu cu clienta (dacă acceptă).
 ÎNAINTE ȘI DUPĂ: aceeași lumină, același unghi, părul pieptănat în ambele. Altfel pare că ai schimbat lumina, nu culoarea.
 SFATURI PENTRU UN SALON LOCAL PE FACEBOOK
-1. Scrie orașul și cartierul în text: „Balayage bej în Mănăștur, Cluj". Etichetează locația salonului.
-2. Postează în grupurile locale (ex. „Mămici din Cluj", „Recomandări Iași") DOAR dacă regulile grupului permit promovarea. Mai bine: răspunde util la întrebările „Cine îmi recomandă o coloristă?".
+1. Scrie orașul și cartierul în text: „Balayage bej în Mănăștur, Cluj”. Etichetează locația salonului.
+2. Postează în grupurile locale (ex. „Mămici din Cluj”, „Recomandări Iași”) DOAR dacă regulile grupului permit promovarea. Mai bine: răspunde util la întrebările „Cine îmi recomandă o coloristă?”.
 3. Cere recenzii clientelor mulțumite – trimite-le linkul direct după programare.
-4. Postează „locuri libere" în Story: „Mai am 2 locuri joi după-amiază".
+4. Postează „locuri libere” în Story: „Mai am 2 locuri joi după-amiază”.
 5. Răspunde rapid la mesaje. O clientă care întreabă de preț întreabă, de obicei, și la alte 3 saloane.
 DE LA LIKE LA PROGRAMARE
-• Cineva comentează „Preț?". Nu răspunde doar „PM". Răspunde public scurt și cald: „Mulțumesc! Prețul depinde de lungime și de culoarea de pornire – ți-am scris în privat." Apoi chiar scrie-i.
-• În privat: o întrebare care duce spre programare: „Ce culoare ai acum și ce zi îți convine?"
+• Cineva comentează „Preț?”. Nu răspunde doar „PM”. Răspunde public scurt și cald: „Mulțumesc! Prețul depinde de lungime și de culoarea de pornire – ți-am scris în privat.” Apoi chiar scrie-i.
+• În privat: o întrebare care duce spre programare: „Ce culoare ai acum și ce zi îți convine?”
 • Trimite linkul de programare sau propune 2 variante de oră. Cu cât sunt mai puțini pași, cu atât mai multe programări.
-Replică: „«Preț în privat» fără mesaj în privat e ca decolorantul fără developer – nu se întâmplă nimic."</a:t>
+Replică: „«Preț în privat» fără mesaj în privat e ca decolorantul fără developer – nu se întâmplă nimic.”</a:t>
             </a:r>
             <a:endParaRPr lang="en-US" dirty="0"/>
           </a:p>
@@ -2235,8 +2235,8 @@
               <a:rPr lang="en-US" dirty="0"/>
               <a:t>STORY (POVESTE)
 • Ce este: fotografii sau videoclipuri afișate pe tot ecranul, în cerculețul de sus.
-• Cât rămâne: în mod obișnuit 24 de ore. Dacă îl salvezi în „Evidențiate" (Highlights), rămâne permanent pe profil.
-• Când îl folosim: culise (amestecul de culoare, cafeaua de dimineață, salonul), anunțuri rapide („Am un loc liber azi la 15:00"), sondaje („Bej sau miere?"), caseta de întrebări („Întreabă-mă orice despre blond").
+• Cât rămâne: în mod obișnuit 24 de ore. Dacă îl salvezi în „Evidențiate” (Highlights), rămâne permanent pe profil.
+• Când îl folosim: culise (amestecul de culoare, cafeaua de dimineață, salonul), anunțuri rapide („Am un loc liber azi la 15:00”), sondaje („Bej sau miere?”), caseta de întrebări („Întreabă-mă orice despre blond”).
 • Story-urile sunt pentru relația cu cei care te urmăresc deja – aici se nasc multe programări.
 REELS (VIDEOCLIPURI SCURTE)
 • Ce sunt: videoclipuri verticale, de obicei între câteva secunde și câteva minute (Instagram permite în prezent Reels de până la 3 minute; pentru transformări, 7–30 secunde funcționează foarte bine).
@@ -2337,22 +2337,22 @@
               <a:rPr lang="en-US" dirty="0"/>
               <a:t>PROFIL PROFESIONAL ATRACTIV
 • Treci pe cont profesional (Setări → Tipul contului și instrumente → Treci la un cont profesional → Afacere sau Creator). Primești statistici și butoane de contact.
-• Numele afișat se poate căuta: „Ana | Blond &amp; Balayage" te face găsibilă când cineva caută „balayage".
-• Bio în 3 rânduri: ce faci + pentru cine/unde + cum te programezi. Exemplu: „Specialist blond rece &amp; AirTouch · Cluj · Programări: link mai jos".
+• Numele afișat se poate căuta: „Ana | Blond &amp; Balayage” te face găsibilă când cineva caută „balayage”.
+• Bio în 3 rânduri: ce faci + pentru cine/unde + cum te programezi. Exemplu: „Specialist blond rece &amp; AirTouch · Cluj · Programări: link mai jos”.
 • Link de programare (aplicația de programări, WhatsApp, site).
 • Evidențiate (Highlights) cu coperte în aceleași culori: Prețuri, Înainte/După, Recenzii, Locație, Îngrijire acasă. Ele răspund la întrebările pe care le primești de 20 de ori pe zi.
 • Grila: aceleași culori și aceeași lumină. Când cineva intră pe profil, trebuie să înțeleagă în 3 secunde ce faci.
 CUM ATRAGEM URMĂRITORI INTERESAȚI DE HAIRSTYLING (nu orice urmăritori)
 • Locația pe fiecare postare și 3–5 hashtaguri specifice (#balayagecluj #blondrece #airtouchromania), nu 30 de hashtaguri generale.
-• Conținut util care se salvează: „De ce se îngălbenește blondul", „Cât ține un AirTouch".
+• Conținut util care se salvează: „De ce se îngălbenește blondul”, „Cât ține un AirTouch”.
 • Colaborări (funcția Collab): postare comună cu makeup artistul, fotograful de nunți sau chiar cu clienta – postarea apare pe ambele profiluri.
 • Interacțiune: răspunde la comentarii, comentează la conturile din orașul tău (saloane de unghii, rochii de mireasă, fotografi).
 • Nu cumpăra urmăritori. Urmăritorii falși nu se programează și strică statisticile.
 RITM REALIST
 • Constanța bate perfecțiunea. Mai bine 3 Reels pe săptămână timp de 6 luni decât 2 pe zi o săptămână și apoi nimic.
-• „Zilnic" înseamnă realist: un Story pe zi din salon (5 secunde de culori amestecate contează!).
+• „Zilnic” înseamnă realist: un Story pe zi din salon (5 secunde de culori amestecate contează!).
 • Filmează în ziua cu programări, editează într-o seară, programează postările (Instagram permite programarea postărilor din aplicație).
-Replică: „Algoritmul e ca o clientă fidelă: vrea să te vadă regulat, nu o dată pe an la nuntă."</a:t>
+Replică: „Algoritmul e ca o clientă fidelă: vrea să te vadă regulat, nu o dată pe an la nuntă.”</a:t>
             </a:r>
             <a:endParaRPr lang="en-US" dirty="0"/>
           </a:p>
@@ -2445,24 +2445,24 @@
 • Un singur îndemn pe postare. Dacă ceri și comentariu, și salvare, și distribuire, și programare – nu se face nimic.
 EXEMPLE
 Comentarii:
-• „Bej sau miere? Scrie în comentarii ce ai alege."
-• „Scrie BLOND și îți spun ce nuanță ți se potrivește după tenul tău."
+• „Bej sau miere? Scrie în comentarii ce ai alege.”
+• „Scrie BLOND și îți spun ce nuanță ți se potrivește după tenul tău.”
 Salvări:
-• „Salvează postarea – ți-o va cere coloristă ta la următoarea programare."
-• „Salvează lista asta pentru îngrijirea blondului acasă."
+• „Salvează postarea și arată-mi-o la următoarea programare.”
+• „Salvează lista asta pentru îngrijirea blondului acasă.”
 Programări:
-• „Mai am 2 locuri vineri. Scrie-mi «VINERI» în mesaj."
-• „Programări prin linkul din bio – consultația de culoare e gratuită."
+• „Mai am 2 locuri vineri. Scrie-mi «VINERI» în mesaj.”
+• „Programări prin linkul din bio – consultația de culoare e gratuită.”
 Distribuiri:
-• „Trimite-i asta prietenei care vrea blond de 3 ani și tot amână."
+• „Trimite-i asta prietenei care vrea blond de 3 ani și tot amână.”
 ÎNAINTE ȘI DUPĂ CORECT
 • Aceeași lumină – ideal lumină naturală, în fața ferestrei. Lumina caldă a salonului îngălbenește blondul.
 • Același unghi și aceeași distanță – marchează un punct pe podea unde stă clienta.
 • Părul pieptănat la ambele, ca să compari culoarea, nu coafura.
-• Fără filtre care schimbă nuanța. Dacă se descoperă că blondul „rece" era un filtru, pierzi încrederea. Poți ajusta lumina, dar nu culoarea părului.
+• Fără filtre care schimbă nuanța. Dacă se descoperă că blondul „rece” era un filtru, pierzi încrederea. Poți ajusta lumina, dar nu culoarea părului.
 • Acordul clientei pentru fotografiere și publicare – mai ales dacă i se vede fața. Poți filma doar părul, din spate.
-• Bonus: scrie în descriere de unde ai pornit și ce ai făcut: „Pornire: nivel 4 vopsit acasă. 2 ședințe. Rezultat: nivel 9 bej rece."
-Replică: „Filtrul pe păr e ca toner-ul pus pe poză: arată bine până vine clienta în salon."</a:t>
+• Bonus: scrie în descriere de unde ai pornit și ce ai făcut: „Pornire: nivel 4 vopsit acasă. 2 ședințe. Rezultat: nivel 9 bej rece.”
+Replică: „Filtrul pe păr e ca toner-ul pus pe poză: arată bine până vine clienta în salon.”</a:t>
             </a:r>
             <a:endParaRPr lang="en-US" dirty="0"/>
           </a:p>
@@ -2559,7 +2559,7 @@
 5. Extragere corectă: aleatorie (aplicații de extragere a comentariilor sau filmezi tragerea la sorți), anunți câștigătoarea public și o contactezi în privat. Atenție la conturile false care pretind că sunt tu și cer date de card câștigătoarelor – avertizează urmăritoarele.
 ALEGEREA PREMIULUI
 • Premiul trebuie să atragă exact oamenii pe care îi vrei în scaun: tratament de reconstrucție + tuns, voucher pentru împrospătarea blondului, kit de produse profesionale pentru acasă.
-• Un premiu de tip telefon sau bani atrage „vânători de concursuri" din toată țara, care nu se vor programa niciodată.
+• Un premiu de tip telefon sau bani atrage „vânători de concursuri” din toată țara, care nu se vor programa niciodată.
 • Poți colabora cu un brand de produse sau cu un salon de unghii din zonă – premiu mai mare, public dublu.
 REGULI
 • Regulile Meta pentru promoții: tu ești responsabilă pentru concurs; trebuie să precizezi că Instagram/Facebook nu sponsorizează, nu susțin și nu administrează concursul; nu cere oamenilor să eticheteze în mod greșit conținut (de exemplu, să se eticheteze în poze în care nu apar).
@@ -2680,8 +2680,8 @@
         </p:nvSpPr>
         <p:spPr>
           <a:xfrm>
-            <a:off x="548640" y="1417320"/>
-            <a:ext cx="5120640" cy="1737360"/>
+            <a:off x="548640" y="1234440"/>
+            <a:ext cx="5486400" cy="1828800"/>
           </a:xfrm>
           <a:prstGeom prst="rect">
             <a:avLst/>
@@ -2694,13 +2694,13 @@
           <a:lstStyle>
             <a:lvl1pPr algn="l" indent="0" marL="0">
               <a:buNone/>
-              <a:defRPr lang="en-US" sz="5000" b="1" dirty="0">
+              <a:defRPr lang="en-US" sz="4400" b="1" dirty="0">
                 <a:solidFill>
                   <a:schemeClr val="bg1"/>
                 </a:solidFill>
-                <a:latin typeface="Cambria" pitchFamily="34" charset="0"/>
-                <a:ea typeface="Cambria" pitchFamily="34" charset="-122"/>
-                <a:cs typeface="Cambria" pitchFamily="34" charset="-120"/>
+                <a:latin typeface="Georgia" pitchFamily="34" charset="0"/>
+                <a:ea typeface="Georgia" pitchFamily="34" charset="-122"/>
+                <a:cs typeface="Georgia" pitchFamily="34" charset="-120"/>
               </a:defRPr>
             </a:lvl1pPr>
           </a:lstStyle>
@@ -2708,7 +2708,7 @@
             <a:pPr algn="l" indent="0" marL="0">
               <a:buNone/>
             </a:pPr>
-            <a:endParaRPr lang="en-US" sz="5000" dirty="0"/>
+            <a:endParaRPr lang="en-US" sz="4400" dirty="0"/>
           </a:p>
         </p:txBody>
       </p:sp>
@@ -2772,9 +2772,9 @@
                 <a:solidFill>
                   <a:schemeClr val="accent2"/>
                 </a:solidFill>
-                <a:latin typeface="Calibri" pitchFamily="34" charset="0"/>
-                <a:ea typeface="Calibri" pitchFamily="34" charset="-122"/>
-                <a:cs typeface="Calibri" pitchFamily="34" charset="-120"/>
+                <a:latin typeface="Arial" pitchFamily="34" charset="0"/>
+                <a:ea typeface="Arial" pitchFamily="34" charset="-122"/>
+                <a:cs typeface="Arial" pitchFamily="34" charset="-120"/>
               </a:defRPr>
             </a:lvl1pPr>
           </a:lstStyle>
@@ -2814,9 +2814,9 @@
                 <a:solidFill>
                   <a:schemeClr val="tx1"/>
                 </a:solidFill>
-                <a:latin typeface="Cambria" pitchFamily="34" charset="0"/>
-                <a:ea typeface="Cambria" pitchFamily="34" charset="-122"/>
-                <a:cs typeface="Cambria" pitchFamily="34" charset="-120"/>
+                <a:latin typeface="Georgia" pitchFamily="34" charset="0"/>
+                <a:ea typeface="Georgia" pitchFamily="34" charset="-122"/>
+                <a:cs typeface="Georgia" pitchFamily="34" charset="-120"/>
               </a:defRPr>
             </a:lvl1pPr>
           </a:lstStyle>
@@ -2853,14 +2853,14 @@
               <a:buNone/>
             </a:pPr>
             <a:r>
-              <a:rPr lang="en-US" sz="800" spc="200" kern="0" dirty="0">
+              <a:rPr lang="en-US" sz="900" spc="200" kern="0" dirty="0">
                 <a:solidFill>
                   <a:schemeClr val="tx2"/>
                 </a:solidFill>
               </a:rPr>
               <a:t>SOCIAL MEDIA PREZENTARE</a:t>
             </a:r>
-            <a:endParaRPr lang="en-US" sz="800" dirty="0"/>
+            <a:endParaRPr lang="en-US" sz="900" dirty="0"/>
           </a:p>
         </p:txBody>
       </p:sp>
@@ -2892,7 +2892,7 @@
           <a:bodyPr lIns="0" tIns="0" rIns="0" bIns="0"/>
           <a:lstStyle>
             <a:lvl1pPr>
-              <a:defRPr sz="800">
+              <a:defRPr sz="900">
                 <a:solidFill>
                   <a:schemeClr val="tx2"/>
                 </a:solidFill>
@@ -3001,7 +3001,7 @@
           <a:bodyPr lIns="0" tIns="0" rIns="0" bIns="0"/>
           <a:lstStyle>
             <a:lvl1pPr>
-              <a:defRPr sz="800">
+              <a:defRPr sz="900">
                 <a:solidFill>
                   <a:schemeClr val="tx2"/>
                 </a:solidFill>
@@ -3308,8 +3308,8 @@
         </p:nvSpPr>
         <p:spPr>
           <a:xfrm>
-            <a:off x="548640" y="1417320"/>
-            <a:ext cx="5120640" cy="1737360"/>
+            <a:off x="548640" y="1234440"/>
+            <a:ext cx="5486400" cy="1828800"/>
           </a:xfrm>
           <a:prstGeom prst="rect">
             <a:avLst/>
@@ -3325,17 +3325,17 @@
               <a:buNone/>
             </a:pPr>
             <a:r>
-              <a:rPr lang="en-US" sz="5000" b="1" dirty="0">
+              <a:rPr lang="en-US" sz="4400" b="1" dirty="0">
                 <a:solidFill>
                   <a:schemeClr val="bg1"/>
                 </a:solidFill>
-                <a:latin typeface="Cambria" pitchFamily="34" charset="0"/>
-                <a:ea typeface="Cambria" pitchFamily="34" charset="-122"/>
-                <a:cs typeface="Cambria" pitchFamily="34" charset="-120"/>
+                <a:latin typeface="Georgia" pitchFamily="34" charset="0"/>
+                <a:ea typeface="Georgia" pitchFamily="34" charset="-122"/>
+                <a:cs typeface="Georgia" pitchFamily="34" charset="-120"/>
               </a:rPr>
               <a:t>SOCIAL MEDIA PREZENTARE</a:t>
             </a:r>
-            <a:endParaRPr lang="en-US" sz="5000" dirty="0"/>
+            <a:endParaRPr lang="en-US" sz="4400" dirty="0"/>
           </a:p>
         </p:txBody>
       </p:sp>
@@ -3353,11 +3353,6 @@
           <a:prstGeom prst="ellipse">
             <a:avLst/>
           </a:prstGeom>
-          <a:solidFill>
-            <a:schemeClr val="tx1">
-              <a:alpha val="0"/>
-            </a:schemeClr>
-          </a:solidFill>
           <a:ln w="15875">
             <a:solidFill>
               <a:schemeClr val="accent1"/>
@@ -3440,11 +3435,6 @@
           <a:prstGeom prst="ellipse">
             <a:avLst/>
           </a:prstGeom>
-          <a:solidFill>
-            <a:schemeClr val="tx1">
-              <a:alpha val="0"/>
-            </a:schemeClr>
-          </a:solidFill>
           <a:ln w="15875">
             <a:solidFill>
               <a:schemeClr val="accent1"/>
@@ -3527,11 +3517,6 @@
           <a:prstGeom prst="ellipse">
             <a:avLst/>
           </a:prstGeom>
-          <a:solidFill>
-            <a:schemeClr val="tx1">
-              <a:alpha val="0"/>
-            </a:schemeClr>
-          </a:solidFill>
           <a:ln w="15875">
             <a:solidFill>
               <a:schemeClr val="accent1"/>
@@ -3614,11 +3599,6 @@
           <a:prstGeom prst="ellipse">
             <a:avLst/>
           </a:prstGeom>
-          <a:solidFill>
-            <a:schemeClr val="tx1">
-              <a:alpha val="0"/>
-            </a:schemeClr>
-          </a:solidFill>
           <a:ln w="15875">
             <a:solidFill>
               <a:schemeClr val="accent1"/>
@@ -3926,9 +3906,9 @@
                 <a:solidFill>
                   <a:schemeClr val="accent2"/>
                 </a:solidFill>
-                <a:latin typeface="Calibri" pitchFamily="34" charset="0"/>
-                <a:ea typeface="Calibri" pitchFamily="34" charset="-122"/>
-                <a:cs typeface="Calibri" pitchFamily="34" charset="-120"/>
+                <a:latin typeface="Arial" pitchFamily="34" charset="0"/>
+                <a:ea typeface="Arial" pitchFamily="34" charset="-122"/>
+                <a:cs typeface="Arial" pitchFamily="34" charset="-120"/>
               </a:rPr>
               <a:t>PARTEA III · INSTAGRAM</a:t>
             </a:r>
@@ -3967,9 +3947,9 @@
                 <a:solidFill>
                   <a:schemeClr val="tx1"/>
                 </a:solidFill>
-                <a:latin typeface="Cambria" pitchFamily="34" charset="0"/>
-                <a:ea typeface="Cambria" pitchFamily="34" charset="-122"/>
-                <a:cs typeface="Cambria" pitchFamily="34" charset="-120"/>
+                <a:latin typeface="Georgia" pitchFamily="34" charset="0"/>
+                <a:ea typeface="Georgia" pitchFamily="34" charset="-122"/>
+                <a:cs typeface="Georgia" pitchFamily="34" charset="-120"/>
               </a:rPr>
               <a:t>Sfaturi și trucuri pentru Instagram</a:t>
             </a:r>
@@ -3979,16 +3959,14 @@
       </p:sp>
       <p:pic>
         <p:nvPicPr>
-          <p:cNvPr id="4" name="watermark-274" descr="preencoded.png">    </p:cNvPr>
+          <p:cNvPr id="4" name="watermark-272" descr="preencoded.png">    </p:cNvPr>
           <p:cNvPicPr>
             <a:picLocks noChangeAspect="1"/>
           </p:cNvPicPr>
           <p:nvPr/>
         </p:nvPicPr>
         <p:blipFill>
-          <a:blip r:embed="rId1">
-            <a:alphaModFix amt="7000"/>
-          </a:blip>
+          <a:blip r:embed="rId1"/>
           <a:stretch>
             <a:fillRect/>
           </a:stretch>
@@ -4005,7 +3983,7 @@
       </p:pic>
       <p:sp>
         <p:nvSpPr>
-          <p:cNvPr id="5" name="card-275"/>
+          <p:cNvPr id="5" name="card-273"/>
           <p:cNvSpPr/>
           <p:nvPr/>
         </p:nvSpPr>
@@ -4032,7 +4010,7 @@
       </p:sp>
       <p:sp>
         <p:nvSpPr>
-          <p:cNvPr id="6" name="num-276"/>
+          <p:cNvPr id="6" name="num-274"/>
           <p:cNvSpPr/>
           <p:nvPr/>
         </p:nvSpPr>
@@ -4057,7 +4035,7 @@
       </p:sp>
       <p:sp>
         <p:nvSpPr>
-          <p:cNvPr id="7" name="text-277"/>
+          <p:cNvPr id="7" name="text-275"/>
           <p:cNvSpPr txBox="1"/>
           <p:nvPr/>
         </p:nvSpPr>
@@ -4093,7 +4071,7 @@
       </p:sp>
       <p:sp>
         <p:nvSpPr>
-          <p:cNvPr id="8" name="text-278"/>
+          <p:cNvPr id="8" name="text-276"/>
           <p:cNvSpPr txBox="1"/>
           <p:nvPr/>
         </p:nvSpPr>
@@ -4129,7 +4107,7 @@
       </p:sp>
       <p:sp>
         <p:nvSpPr>
-          <p:cNvPr id="9" name="card-279"/>
+          <p:cNvPr id="9" name="card-277"/>
           <p:cNvSpPr/>
           <p:nvPr/>
         </p:nvSpPr>
@@ -4156,7 +4134,7 @@
       </p:sp>
       <p:sp>
         <p:nvSpPr>
-          <p:cNvPr id="10" name="num-280"/>
+          <p:cNvPr id="10" name="num-278"/>
           <p:cNvSpPr/>
           <p:nvPr/>
         </p:nvSpPr>
@@ -4181,7 +4159,7 @@
       </p:sp>
       <p:sp>
         <p:nvSpPr>
-          <p:cNvPr id="11" name="text-281"/>
+          <p:cNvPr id="11" name="text-279"/>
           <p:cNvSpPr txBox="1"/>
           <p:nvPr/>
         </p:nvSpPr>
@@ -4217,7 +4195,7 @@
       </p:sp>
       <p:sp>
         <p:nvSpPr>
-          <p:cNvPr id="12" name="text-282"/>
+          <p:cNvPr id="12" name="text-280"/>
           <p:cNvSpPr txBox="1"/>
           <p:nvPr/>
         </p:nvSpPr>
@@ -4253,7 +4231,7 @@
       </p:sp>
       <p:sp>
         <p:nvSpPr>
-          <p:cNvPr id="13" name="card-283"/>
+          <p:cNvPr id="13" name="card-281"/>
           <p:cNvSpPr/>
           <p:nvPr/>
         </p:nvSpPr>
@@ -4280,7 +4258,7 @@
       </p:sp>
       <p:sp>
         <p:nvSpPr>
-          <p:cNvPr id="14" name="num-284"/>
+          <p:cNvPr id="14" name="num-282"/>
           <p:cNvSpPr/>
           <p:nvPr/>
         </p:nvSpPr>
@@ -4305,7 +4283,7 @@
       </p:sp>
       <p:sp>
         <p:nvSpPr>
-          <p:cNvPr id="15" name="text-285"/>
+          <p:cNvPr id="15" name="text-283"/>
           <p:cNvSpPr txBox="1"/>
           <p:nvPr/>
         </p:nvSpPr>
@@ -4341,7 +4319,7 @@
       </p:sp>
       <p:sp>
         <p:nvSpPr>
-          <p:cNvPr id="16" name="text-286"/>
+          <p:cNvPr id="16" name="text-284"/>
           <p:cNvSpPr txBox="1"/>
           <p:nvPr/>
         </p:nvSpPr>
@@ -4377,7 +4355,7 @@
       </p:sp>
       <p:sp>
         <p:nvSpPr>
-          <p:cNvPr id="17" name="card-287"/>
+          <p:cNvPr id="17" name="card-285"/>
           <p:cNvSpPr/>
           <p:nvPr/>
         </p:nvSpPr>
@@ -4404,7 +4382,7 @@
       </p:sp>
       <p:sp>
         <p:nvSpPr>
-          <p:cNvPr id="18" name="num-288"/>
+          <p:cNvPr id="18" name="num-286"/>
           <p:cNvSpPr/>
           <p:nvPr/>
         </p:nvSpPr>
@@ -4429,7 +4407,7 @@
       </p:sp>
       <p:sp>
         <p:nvSpPr>
-          <p:cNvPr id="19" name="text-289"/>
+          <p:cNvPr id="19" name="text-287"/>
           <p:cNvSpPr txBox="1"/>
           <p:nvPr/>
         </p:nvSpPr>
@@ -4465,7 +4443,7 @@
       </p:sp>
       <p:sp>
         <p:nvSpPr>
-          <p:cNvPr id="20" name="text-290"/>
+          <p:cNvPr id="20" name="text-288"/>
           <p:cNvSpPr txBox="1"/>
           <p:nvPr/>
         </p:nvSpPr>
@@ -4501,7 +4479,7 @@
       </p:sp>
       <p:sp>
         <p:nvSpPr>
-          <p:cNvPr id="21" name="card-291"/>
+          <p:cNvPr id="21" name="card-289"/>
           <p:cNvSpPr/>
           <p:nvPr/>
         </p:nvSpPr>
@@ -4528,7 +4506,7 @@
       </p:sp>
       <p:sp>
         <p:nvSpPr>
-          <p:cNvPr id="22" name="num-292"/>
+          <p:cNvPr id="22" name="num-290"/>
           <p:cNvSpPr/>
           <p:nvPr/>
         </p:nvSpPr>
@@ -4553,7 +4531,7 @@
       </p:sp>
       <p:sp>
         <p:nvSpPr>
-          <p:cNvPr id="23" name="text-293"/>
+          <p:cNvPr id="23" name="text-291"/>
           <p:cNvSpPr txBox="1"/>
           <p:nvPr/>
         </p:nvSpPr>
@@ -4589,7 +4567,7 @@
       </p:sp>
       <p:sp>
         <p:nvSpPr>
-          <p:cNvPr id="24" name="text-294"/>
+          <p:cNvPr id="24" name="text-292"/>
           <p:cNvSpPr txBox="1"/>
           <p:nvPr/>
         </p:nvSpPr>
@@ -4617,7 +4595,7 @@
                   <a:schemeClr val="tx1"/>
                 </a:solidFill>
               </a:rPr>
-              <a:t>Colaborare cu clienta sau MUA-ul</a:t>
+              <a:t>Colaborare cu clienta sau makeup artistul</a:t>
             </a:r>
             <a:endParaRPr lang="en-US" sz="1300" dirty="0"/>
           </a:p>
@@ -4625,7 +4603,7 @@
       </p:sp>
       <p:sp>
         <p:nvSpPr>
-          <p:cNvPr id="25" name="card-295"/>
+          <p:cNvPr id="25" name="card-293"/>
           <p:cNvSpPr/>
           <p:nvPr/>
         </p:nvSpPr>
@@ -4652,7 +4630,7 @@
       </p:sp>
       <p:sp>
         <p:nvSpPr>
-          <p:cNvPr id="26" name="num-296"/>
+          <p:cNvPr id="26" name="num-294"/>
           <p:cNvSpPr/>
           <p:nvPr/>
         </p:nvSpPr>
@@ -4677,7 +4655,7 @@
       </p:sp>
       <p:sp>
         <p:nvSpPr>
-          <p:cNvPr id="27" name="text-297"/>
+          <p:cNvPr id="27" name="text-295"/>
           <p:cNvSpPr txBox="1"/>
           <p:nvPr/>
         </p:nvSpPr>
@@ -4713,7 +4691,7 @@
       </p:sp>
       <p:sp>
         <p:nvSpPr>
-          <p:cNvPr id="28" name="text-298"/>
+          <p:cNvPr id="28" name="text-296"/>
           <p:cNvSpPr txBox="1"/>
           <p:nvPr/>
         </p:nvSpPr>
@@ -4741,7 +4719,7 @@
                   <a:schemeClr val="tx1"/>
                 </a:solidFill>
               </a:rPr>
-              <a:t>Statistici o dată pe săptămână</a:t>
+              <a:t>Verifică statisticile săptămânal</a:t>
             </a:r>
             <a:endParaRPr lang="en-US" sz="1300" dirty="0"/>
           </a:p>
@@ -4749,7 +4727,7 @@
       </p:sp>
       <p:sp>
         <p:nvSpPr>
-          <p:cNvPr id="29" name="text-299"/>
+          <p:cNvPr id="29" name="text-297"/>
           <p:cNvSpPr txBox="1"/>
           <p:nvPr/>
         </p:nvSpPr>
@@ -4776,9 +4754,9 @@
                 <a:solidFill>
                   <a:schemeClr val="tx1"/>
                 </a:solidFill>
-                <a:latin typeface="Cambria" pitchFamily="34" charset="0"/>
-                <a:ea typeface="Cambria" pitchFamily="34" charset="-122"/>
-                <a:cs typeface="Cambria" pitchFamily="34" charset="-120"/>
+                <a:latin typeface="Georgia" pitchFamily="34" charset="0"/>
+                <a:ea typeface="Georgia" pitchFamily="34" charset="-122"/>
+                <a:cs typeface="Georgia" pitchFamily="34" charset="-120"/>
               </a:rPr>
               <a:t>Descrieri scurte</a:t>
             </a:r>
@@ -4788,7 +4766,7 @@
       </p:sp>
       <p:sp>
         <p:nvSpPr>
-          <p:cNvPr id="30" name="text-300"/>
+          <p:cNvPr id="30" name="text-298"/>
           <p:cNvSpPr txBox="1"/>
           <p:nvPr/>
         </p:nvSpPr>
@@ -4844,7 +4822,7 @@
       </p:sp>
       <p:sp>
         <p:nvSpPr>
-          <p:cNvPr id="31" name="text-301"/>
+          <p:cNvPr id="31" name="text-299"/>
           <p:cNvSpPr txBox="1"/>
           <p:nvPr/>
         </p:nvSpPr>
@@ -4871,9 +4849,9 @@
                 <a:solidFill>
                   <a:schemeClr val="tx1"/>
                 </a:solidFill>
-                <a:latin typeface="Cambria" pitchFamily="34" charset="0"/>
-                <a:ea typeface="Cambria" pitchFamily="34" charset="-122"/>
-                <a:cs typeface="Cambria" pitchFamily="34" charset="-120"/>
+                <a:latin typeface="Georgia" pitchFamily="34" charset="0"/>
+                <a:ea typeface="Georgia" pitchFamily="34" charset="-122"/>
+                <a:cs typeface="Georgia" pitchFamily="34" charset="-120"/>
               </a:rPr>
               <a:t>Idei de videoclipuri</a:t>
             </a:r>
@@ -4883,7 +4861,7 @@
       </p:sp>
       <p:sp>
         <p:nvSpPr>
-          <p:cNvPr id="32" name="text-302"/>
+          <p:cNvPr id="32" name="text-300"/>
           <p:cNvSpPr txBox="1"/>
           <p:nvPr/>
         </p:nvSpPr>
@@ -4951,7 +4929,7 @@
                   <a:schemeClr val="tx1"/>
                 </a:solidFill>
               </a:rPr>
-              <a:t>Poza cerută vs. ce s-a putut realist</a:t>
+              <a:t>Poza cerută vs. rezultatul realist</a:t>
             </a:r>
             <a:endParaRPr lang="en-US" sz="1400" dirty="0"/>
           </a:p>
@@ -5003,7 +4981,7 @@
           <a:bodyPr lIns="0" tIns="0" rIns="0" bIns="0"/>
           <a:lstStyle>
             <a:lvl1pPr>
-              <a:defRPr sz="800">
+              <a:defRPr sz="900">
                 <a:solidFill>
                   <a:schemeClr val="tx2"/>
                 </a:solidFill>
@@ -5076,9 +5054,9 @@
                 <a:solidFill>
                   <a:schemeClr val="accent2"/>
                 </a:solidFill>
-                <a:latin typeface="Calibri" pitchFamily="34" charset="0"/>
-                <a:ea typeface="Calibri" pitchFamily="34" charset="-122"/>
-                <a:cs typeface="Calibri" pitchFamily="34" charset="-120"/>
+                <a:latin typeface="Arial" pitchFamily="34" charset="0"/>
+                <a:ea typeface="Arial" pitchFamily="34" charset="-122"/>
+                <a:cs typeface="Arial" pitchFamily="34" charset="-120"/>
               </a:rPr>
               <a:t>PARTEA IV · TIKTOK</a:t>
             </a:r>
@@ -5117,9 +5095,9 @@
                 <a:solidFill>
                   <a:schemeClr val="tx1"/>
                 </a:solidFill>
-                <a:latin typeface="Cambria" pitchFamily="34" charset="0"/>
-                <a:ea typeface="Cambria" pitchFamily="34" charset="-122"/>
-                <a:cs typeface="Cambria" pitchFamily="34" charset="-120"/>
+                <a:latin typeface="Georgia" pitchFamily="34" charset="0"/>
+                <a:ea typeface="Georgia" pitchFamily="34" charset="-122"/>
+                <a:cs typeface="Georgia" pitchFamily="34" charset="-120"/>
               </a:rPr>
               <a:t>Algoritmul TikTok, pe înțelesul tuturor</a:t>
             </a:r>
@@ -5129,16 +5107,14 @@
       </p:sp>
       <p:pic>
         <p:nvPicPr>
-          <p:cNvPr id="4" name="watermark-303" descr="preencoded.png">    </p:cNvPr>
+          <p:cNvPr id="4" name="watermark-301" descr="preencoded.png">    </p:cNvPr>
           <p:cNvPicPr>
             <a:picLocks noChangeAspect="1"/>
           </p:cNvPicPr>
           <p:nvPr/>
         </p:nvPicPr>
         <p:blipFill>
-          <a:blip r:embed="rId1">
-            <a:alphaModFix amt="5000"/>
-          </a:blip>
+          <a:blip r:embed="rId1"/>
           <a:stretch>
             <a:fillRect/>
           </a:stretch>
@@ -5155,7 +5131,7 @@
       </p:pic>
       <p:sp>
         <p:nvSpPr>
-          <p:cNvPr id="5" name="badge-304"/>
+          <p:cNvPr id="5" name="badge-302"/>
           <p:cNvSpPr/>
           <p:nvPr/>
         </p:nvSpPr>
@@ -5180,7 +5156,7 @@
       </p:sp>
       <p:pic>
         <p:nvPicPr>
-          <p:cNvPr id="6" name="icon-305" descr="preencoded.png">    </p:cNvPr>
+          <p:cNvPr id="6" name="icon-303" descr="preencoded.png">    </p:cNvPr>
           <p:cNvPicPr>
             <a:picLocks noChangeAspect="1"/>
           </p:cNvPicPr>
@@ -5204,7 +5180,7 @@
       </p:pic>
       <p:sp>
         <p:nvSpPr>
-          <p:cNvPr id="7" name="text-306"/>
+          <p:cNvPr id="7" name="text-304"/>
           <p:cNvSpPr txBox="1"/>
           <p:nvPr/>
         </p:nvSpPr>
@@ -5240,7 +5216,7 @@
       </p:sp>
       <p:sp>
         <p:nvSpPr>
-          <p:cNvPr id="8" name="arrow-307"/>
+          <p:cNvPr id="8" name="arrow-305"/>
           <p:cNvSpPr/>
           <p:nvPr/>
         </p:nvSpPr>
@@ -5264,7 +5240,7 @@
       </p:sp>
       <p:sp>
         <p:nvSpPr>
-          <p:cNvPr id="9" name="badge-308"/>
+          <p:cNvPr id="9" name="badge-306"/>
           <p:cNvSpPr/>
           <p:nvPr/>
         </p:nvSpPr>
@@ -5289,7 +5265,7 @@
       </p:sp>
       <p:pic>
         <p:nvPicPr>
-          <p:cNvPr id="10" name="icon-309" descr="preencoded.png">    </p:cNvPr>
+          <p:cNvPr id="10" name="icon-307" descr="preencoded.png">    </p:cNvPr>
           <p:cNvPicPr>
             <a:picLocks noChangeAspect="1"/>
           </p:cNvPicPr>
@@ -5313,7 +5289,7 @@
       </p:pic>
       <p:sp>
         <p:nvSpPr>
-          <p:cNvPr id="11" name="text-310"/>
+          <p:cNvPr id="11" name="text-308"/>
           <p:cNvSpPr txBox="1"/>
           <p:nvPr/>
         </p:nvSpPr>
@@ -5341,7 +5317,7 @@
                   <a:schemeClr val="tx1"/>
                 </a:solidFill>
               </a:rPr>
-              <a:t>Îl vede un grup mic, și persoane care nu te urmăresc</a:t>
+              <a:t>Îl vede un grup mic, inclusiv oameni care nu te urmăresc</a:t>
             </a:r>
             <a:endParaRPr lang="en-US" sz="1400" dirty="0"/>
           </a:p>
@@ -5349,7 +5325,7 @@
       </p:sp>
       <p:sp>
         <p:nvSpPr>
-          <p:cNvPr id="12" name="arrow-311"/>
+          <p:cNvPr id="12" name="arrow-309"/>
           <p:cNvSpPr/>
           <p:nvPr/>
         </p:nvSpPr>
@@ -5373,7 +5349,7 @@
       </p:sp>
       <p:sp>
         <p:nvSpPr>
-          <p:cNvPr id="13" name="badge-312"/>
+          <p:cNvPr id="13" name="badge-310"/>
           <p:cNvSpPr/>
           <p:nvPr/>
         </p:nvSpPr>
@@ -5398,7 +5374,7 @@
       </p:sp>
       <p:pic>
         <p:nvPicPr>
-          <p:cNvPr id="14" name="icon-313" descr="preencoded.png">    </p:cNvPr>
+          <p:cNvPr id="14" name="icon-311" descr="preencoded.png">    </p:cNvPr>
           <p:cNvPicPr>
             <a:picLocks noChangeAspect="1"/>
           </p:cNvPicPr>
@@ -5422,7 +5398,7 @@
       </p:pic>
       <p:sp>
         <p:nvSpPr>
-          <p:cNvPr id="15" name="text-314"/>
+          <p:cNvPr id="15" name="text-312"/>
           <p:cNvSpPr txBox="1"/>
           <p:nvPr/>
         </p:nvSpPr>
@@ -5458,7 +5434,7 @@
       </p:sp>
       <p:sp>
         <p:nvSpPr>
-          <p:cNvPr id="16" name="arrow-315"/>
+          <p:cNvPr id="16" name="arrow-313"/>
           <p:cNvSpPr/>
           <p:nvPr/>
         </p:nvSpPr>
@@ -5482,7 +5458,7 @@
       </p:sp>
       <p:sp>
         <p:nvSpPr>
-          <p:cNvPr id="17" name="badge-316"/>
+          <p:cNvPr id="17" name="badge-314"/>
           <p:cNvSpPr/>
           <p:nvPr/>
         </p:nvSpPr>
@@ -5507,7 +5483,7 @@
       </p:sp>
       <p:pic>
         <p:nvPicPr>
-          <p:cNvPr id="18" name="icon-317" descr="preencoded.png">    </p:cNvPr>
+          <p:cNvPr id="18" name="icon-315" descr="preencoded.png">    </p:cNvPr>
           <p:cNvPicPr>
             <a:picLocks noChangeAspect="1"/>
           </p:cNvPicPr>
@@ -5531,7 +5507,7 @@
       </p:pic>
       <p:sp>
         <p:nvSpPr>
-          <p:cNvPr id="19" name="text-318"/>
+          <p:cNvPr id="19" name="text-316"/>
           <p:cNvSpPr txBox="1"/>
           <p:nvPr/>
         </p:nvSpPr>
@@ -5559,7 +5535,7 @@
                   <a:schemeClr val="tx1"/>
                 </a:solidFill>
               </a:rPr>
-              <a:t>Dacă plac, îl arată mai multor oameni cu interese similare</a:t>
+              <a:t>Dacă reacțiile sunt bune, îl arată mai multor oameni</a:t>
             </a:r>
             <a:endParaRPr lang="en-US" sz="1400" dirty="0"/>
           </a:p>
@@ -5567,7 +5543,7 @@
       </p:sp>
       <p:sp>
         <p:nvSpPr>
-          <p:cNvPr id="20" name="card-319"/>
+          <p:cNvPr id="20" name="card-317"/>
           <p:cNvSpPr/>
           <p:nvPr/>
         </p:nvSpPr>
@@ -5594,7 +5570,7 @@
       </p:sp>
       <p:sp>
         <p:nvSpPr>
-          <p:cNvPr id="21" name="text-320"/>
+          <p:cNvPr id="21" name="text-318"/>
           <p:cNvSpPr txBox="1"/>
           <p:nvPr/>
         </p:nvSpPr>
@@ -5630,7 +5606,7 @@
       </p:sp>
       <p:pic>
         <p:nvPicPr>
-          <p:cNvPr id="22" name="ui-321" descr="preencoded.png">    </p:cNvPr>
+          <p:cNvPr id="22" name="ui-319" descr="preencoded.png">    </p:cNvPr>
           <p:cNvPicPr>
             <a:picLocks noChangeAspect="1"/>
           </p:cNvPicPr>
@@ -5654,7 +5630,7 @@
       </p:pic>
       <p:sp>
         <p:nvSpPr>
-          <p:cNvPr id="23" name="text-322"/>
+          <p:cNvPr id="23" name="text-320"/>
           <p:cNvSpPr txBox="1"/>
           <p:nvPr/>
         </p:nvSpPr>
@@ -5690,7 +5666,7 @@
       </p:sp>
       <p:pic>
         <p:nvPicPr>
-          <p:cNvPr id="24" name="ui-323" descr="preencoded.png">    </p:cNvPr>
+          <p:cNvPr id="24" name="ui-321" descr="preencoded.png">    </p:cNvPr>
           <p:cNvPicPr>
             <a:picLocks noChangeAspect="1"/>
           </p:cNvPicPr>
@@ -5714,7 +5690,7 @@
       </p:pic>
       <p:sp>
         <p:nvSpPr>
-          <p:cNvPr id="25" name="text-324"/>
+          <p:cNvPr id="25" name="text-322"/>
           <p:cNvSpPr txBox="1"/>
           <p:nvPr/>
         </p:nvSpPr>
@@ -5742,7 +5718,7 @@
                   <a:schemeClr val="tx1"/>
                 </a:solidFill>
               </a:rPr>
-              <a:t>Vizionare completă / re-vizionare</a:t>
+              <a:t>Vizionare până la capăt</a:t>
             </a:r>
             <a:endParaRPr lang="en-US" sz="1200" dirty="0"/>
           </a:p>
@@ -5750,7 +5726,7 @@
       </p:sp>
       <p:pic>
         <p:nvPicPr>
-          <p:cNvPr id="26" name="ui-325" descr="preencoded.png">    </p:cNvPr>
+          <p:cNvPr id="26" name="ui-323" descr="preencoded.png">    </p:cNvPr>
           <p:cNvPicPr>
             <a:picLocks noChangeAspect="1"/>
           </p:cNvPicPr>
@@ -5774,7 +5750,7 @@
       </p:pic>
       <p:sp>
         <p:nvSpPr>
-          <p:cNvPr id="27" name="text-326"/>
+          <p:cNvPr id="27" name="text-324"/>
           <p:cNvSpPr txBox="1"/>
           <p:nvPr/>
         </p:nvSpPr>
@@ -5810,7 +5786,7 @@
       </p:sp>
       <p:pic>
         <p:nvPicPr>
-          <p:cNvPr id="28" name="ui-327" descr="preencoded.png">    </p:cNvPr>
+          <p:cNvPr id="28" name="ui-325" descr="preencoded.png">    </p:cNvPr>
           <p:cNvPicPr>
             <a:picLocks noChangeAspect="1"/>
           </p:cNvPicPr>
@@ -5834,7 +5810,7 @@
       </p:pic>
       <p:sp>
         <p:nvSpPr>
-          <p:cNvPr id="29" name="text-328"/>
+          <p:cNvPr id="29" name="text-326"/>
           <p:cNvSpPr txBox="1"/>
           <p:nvPr/>
         </p:nvSpPr>
@@ -5870,7 +5846,7 @@
       </p:sp>
       <p:sp>
         <p:nvSpPr>
-          <p:cNvPr id="30" name="card-329"/>
+          <p:cNvPr id="30" name="card-327"/>
           <p:cNvSpPr/>
           <p:nvPr/>
         </p:nvSpPr>
@@ -5897,7 +5873,7 @@
       </p:sp>
       <p:sp>
         <p:nvSpPr>
-          <p:cNvPr id="31" name="card-330"/>
+          <p:cNvPr id="31" name="card-328"/>
           <p:cNvSpPr/>
           <p:nvPr/>
         </p:nvSpPr>
@@ -5924,7 +5900,7 @@
       </p:sp>
       <p:sp>
         <p:nvSpPr>
-          <p:cNvPr id="32" name="text-331"/>
+          <p:cNvPr id="32" name="text-329"/>
           <p:cNvSpPr txBox="1"/>
           <p:nvPr/>
         </p:nvSpPr>
@@ -5960,7 +5936,7 @@
       </p:sp>
       <p:sp>
         <p:nvSpPr>
-          <p:cNvPr id="33" name="text-332"/>
+          <p:cNvPr id="33" name="text-330"/>
           <p:cNvSpPr txBox="1"/>
           <p:nvPr/>
         </p:nvSpPr>
@@ -5996,7 +5972,7 @@
       </p:sp>
       <p:sp>
         <p:nvSpPr>
-          <p:cNvPr id="34" name="text-333"/>
+          <p:cNvPr id="34" name="text-331"/>
           <p:cNvSpPr txBox="1"/>
           <p:nvPr/>
         </p:nvSpPr>
@@ -6032,7 +6008,7 @@
       </p:sp>
       <p:sp>
         <p:nvSpPr>
-          <p:cNvPr id="35" name="text-334"/>
+          <p:cNvPr id="35" name="text-332"/>
           <p:cNvSpPr txBox="1"/>
           <p:nvPr/>
         </p:nvSpPr>
@@ -6094,7 +6070,7 @@
           <a:bodyPr lIns="0" tIns="0" rIns="0" bIns="0"/>
           <a:lstStyle>
             <a:lvl1pPr>
-              <a:defRPr sz="800">
+              <a:defRPr sz="900">
                 <a:solidFill>
                   <a:schemeClr val="tx2"/>
                 </a:solidFill>
@@ -6167,9 +6143,9 @@
                 <a:solidFill>
                   <a:schemeClr val="accent2"/>
                 </a:solidFill>
-                <a:latin typeface="Calibri" pitchFamily="34" charset="0"/>
-                <a:ea typeface="Calibri" pitchFamily="34" charset="-122"/>
-                <a:cs typeface="Calibri" pitchFamily="34" charset="-120"/>
+                <a:latin typeface="Arial" pitchFamily="34" charset="0"/>
+                <a:ea typeface="Arial" pitchFamily="34" charset="-122"/>
+                <a:cs typeface="Arial" pitchFamily="34" charset="-120"/>
               </a:rPr>
               <a:t>PARTEA IV · TIKTOK</a:t>
             </a:r>
@@ -6208,9 +6184,9 @@
                 <a:solidFill>
                   <a:schemeClr val="tx1"/>
                 </a:solidFill>
-                <a:latin typeface="Cambria" pitchFamily="34" charset="0"/>
-                <a:ea typeface="Cambria" pitchFamily="34" charset="-122"/>
-                <a:cs typeface="Cambria" pitchFamily="34" charset="-120"/>
+                <a:latin typeface="Georgia" pitchFamily="34" charset="0"/>
+                <a:ea typeface="Georgia" pitchFamily="34" charset="-122"/>
+                <a:cs typeface="Georgia" pitchFamily="34" charset="-120"/>
               </a:rPr>
               <a:t>Trenduri, sunete și tranziții</a:t>
             </a:r>
@@ -6220,16 +6196,14 @@
       </p:sp>
       <p:pic>
         <p:nvPicPr>
-          <p:cNvPr id="4" name="watermark-335" descr="preencoded.png">    </p:cNvPr>
+          <p:cNvPr id="4" name="watermark-333" descr="preencoded.png">    </p:cNvPr>
           <p:cNvPicPr>
             <a:picLocks noChangeAspect="1"/>
           </p:cNvPicPr>
           <p:nvPr/>
         </p:nvPicPr>
         <p:blipFill>
-          <a:blip r:embed="rId1">
-            <a:alphaModFix amt="5000"/>
-          </a:blip>
+          <a:blip r:embed="rId1"/>
           <a:stretch>
             <a:fillRect/>
           </a:stretch>
@@ -6246,7 +6220,7 @@
       </p:pic>
       <p:sp>
         <p:nvSpPr>
-          <p:cNvPr id="5" name="card-336"/>
+          <p:cNvPr id="5" name="card-334"/>
           <p:cNvSpPr/>
           <p:nvPr/>
         </p:nvSpPr>
@@ -6273,7 +6247,7 @@
       </p:sp>
       <p:sp>
         <p:nvSpPr>
-          <p:cNvPr id="6" name="badge-337"/>
+          <p:cNvPr id="6" name="badge-335"/>
           <p:cNvSpPr/>
           <p:nvPr/>
         </p:nvSpPr>
@@ -6298,7 +6272,7 @@
       </p:sp>
       <p:pic>
         <p:nvPicPr>
-          <p:cNvPr id="7" name="icon-338" descr="preencoded.png">    </p:cNvPr>
+          <p:cNvPr id="7" name="icon-336" descr="preencoded.png">    </p:cNvPr>
           <p:cNvPicPr>
             <a:picLocks noChangeAspect="1"/>
           </p:cNvPicPr>
@@ -6322,7 +6296,7 @@
       </p:pic>
       <p:sp>
         <p:nvSpPr>
-          <p:cNvPr id="8" name="text-339"/>
+          <p:cNvPr id="8" name="text-337"/>
           <p:cNvSpPr txBox="1"/>
           <p:nvPr/>
         </p:nvSpPr>
@@ -6349,9 +6323,9 @@
                 <a:solidFill>
                   <a:schemeClr val="tx1"/>
                 </a:solidFill>
-                <a:latin typeface="Cambria" pitchFamily="34" charset="0"/>
-                <a:ea typeface="Cambria" pitchFamily="34" charset="-122"/>
-                <a:cs typeface="Cambria" pitchFamily="34" charset="-120"/>
+                <a:latin typeface="Georgia" pitchFamily="34" charset="0"/>
+                <a:ea typeface="Georgia" pitchFamily="34" charset="-122"/>
+                <a:cs typeface="Georgia" pitchFamily="34" charset="-120"/>
               </a:rPr>
               <a:t>Trenduri</a:t>
             </a:r>
@@ -6361,7 +6335,7 @@
       </p:sp>
       <p:sp>
         <p:nvSpPr>
-          <p:cNvPr id="9" name="text-340"/>
+          <p:cNvPr id="9" name="text-338"/>
           <p:cNvSpPr txBox="1"/>
           <p:nvPr/>
         </p:nvSpPr>
@@ -6437,7 +6411,7 @@
       </p:sp>
       <p:sp>
         <p:nvSpPr>
-          <p:cNvPr id="10" name="text-341"/>
+          <p:cNvPr id="10" name="text-339"/>
           <p:cNvSpPr txBox="1"/>
           <p:nvPr/>
         </p:nvSpPr>
@@ -6473,7 +6447,7 @@
       </p:sp>
       <p:sp>
         <p:nvSpPr>
-          <p:cNvPr id="11" name="card-342"/>
+          <p:cNvPr id="11" name="card-340"/>
           <p:cNvSpPr/>
           <p:nvPr/>
         </p:nvSpPr>
@@ -6500,7 +6474,7 @@
       </p:sp>
       <p:sp>
         <p:nvSpPr>
-          <p:cNvPr id="12" name="badge-343"/>
+          <p:cNvPr id="12" name="badge-341"/>
           <p:cNvSpPr/>
           <p:nvPr/>
         </p:nvSpPr>
@@ -6525,7 +6499,7 @@
       </p:sp>
       <p:pic>
         <p:nvPicPr>
-          <p:cNvPr id="13" name="icon-344" descr="preencoded.png">    </p:cNvPr>
+          <p:cNvPr id="13" name="icon-342" descr="preencoded.png">    </p:cNvPr>
           <p:cNvPicPr>
             <a:picLocks noChangeAspect="1"/>
           </p:cNvPicPr>
@@ -6549,7 +6523,7 @@
       </p:pic>
       <p:sp>
         <p:nvSpPr>
-          <p:cNvPr id="14" name="text-345"/>
+          <p:cNvPr id="14" name="text-343"/>
           <p:cNvSpPr txBox="1"/>
           <p:nvPr/>
         </p:nvSpPr>
@@ -6576,9 +6550,9 @@
                 <a:solidFill>
                   <a:schemeClr val="tx1"/>
                 </a:solidFill>
-                <a:latin typeface="Cambria" pitchFamily="34" charset="0"/>
-                <a:ea typeface="Cambria" pitchFamily="34" charset="-122"/>
-                <a:cs typeface="Cambria" pitchFamily="34" charset="-120"/>
+                <a:latin typeface="Georgia" pitchFamily="34" charset="0"/>
+                <a:ea typeface="Georgia" pitchFamily="34" charset="-122"/>
+                <a:cs typeface="Georgia" pitchFamily="34" charset="-120"/>
               </a:rPr>
               <a:t>Sunete</a:t>
             </a:r>
@@ -6588,7 +6562,7 @@
       </p:sp>
       <p:sp>
         <p:nvSpPr>
-          <p:cNvPr id="15" name="text-346"/>
+          <p:cNvPr id="15" name="text-344"/>
           <p:cNvSpPr txBox="1"/>
           <p:nvPr/>
         </p:nvSpPr>
@@ -6664,7 +6638,7 @@
       </p:sp>
       <p:sp>
         <p:nvSpPr>
-          <p:cNvPr id="16" name="text-347"/>
+          <p:cNvPr id="16" name="text-345"/>
           <p:cNvSpPr txBox="1"/>
           <p:nvPr/>
         </p:nvSpPr>
@@ -6700,7 +6674,7 @@
       </p:sp>
       <p:sp>
         <p:nvSpPr>
-          <p:cNvPr id="17" name="card-348"/>
+          <p:cNvPr id="17" name="card-346"/>
           <p:cNvSpPr/>
           <p:nvPr/>
         </p:nvSpPr>
@@ -6727,7 +6701,7 @@
       </p:sp>
       <p:sp>
         <p:nvSpPr>
-          <p:cNvPr id="18" name="badge-349"/>
+          <p:cNvPr id="18" name="badge-347"/>
           <p:cNvSpPr/>
           <p:nvPr/>
         </p:nvSpPr>
@@ -6752,7 +6726,7 @@
       </p:sp>
       <p:pic>
         <p:nvPicPr>
-          <p:cNvPr id="19" name="icon-350" descr="preencoded.png">    </p:cNvPr>
+          <p:cNvPr id="19" name="icon-348" descr="preencoded.png">    </p:cNvPr>
           <p:cNvPicPr>
             <a:picLocks noChangeAspect="1"/>
           </p:cNvPicPr>
@@ -6776,7 +6750,7 @@
       </p:pic>
       <p:sp>
         <p:nvSpPr>
-          <p:cNvPr id="20" name="text-351"/>
+          <p:cNvPr id="20" name="text-349"/>
           <p:cNvSpPr txBox="1"/>
           <p:nvPr/>
         </p:nvSpPr>
@@ -6803,9 +6777,9 @@
                 <a:solidFill>
                   <a:schemeClr val="tx1"/>
                 </a:solidFill>
-                <a:latin typeface="Cambria" pitchFamily="34" charset="0"/>
-                <a:ea typeface="Cambria" pitchFamily="34" charset="-122"/>
-                <a:cs typeface="Cambria" pitchFamily="34" charset="-120"/>
+                <a:latin typeface="Georgia" pitchFamily="34" charset="0"/>
+                <a:ea typeface="Georgia" pitchFamily="34" charset="-122"/>
+                <a:cs typeface="Georgia" pitchFamily="34" charset="-120"/>
               </a:rPr>
               <a:t>Tranziții</a:t>
             </a:r>
@@ -6815,7 +6789,7 @@
       </p:sp>
       <p:sp>
         <p:nvSpPr>
-          <p:cNvPr id="21" name="text-352"/>
+          <p:cNvPr id="21" name="text-350"/>
           <p:cNvSpPr txBox="1"/>
           <p:nvPr/>
         </p:nvSpPr>
@@ -6851,7 +6825,7 @@
       </p:sp>
       <p:pic>
         <p:nvPicPr>
-          <p:cNvPr id="22" name="before-353" descr="preencoded.png">    </p:cNvPr>
+          <p:cNvPr id="22" name="before-351" descr="preencoded.png">    </p:cNvPr>
           <p:cNvPicPr>
             <a:picLocks noChangeAspect="1"/>
           </p:cNvPicPr>
@@ -6875,7 +6849,7 @@
       </p:pic>
       <p:sp>
         <p:nvSpPr>
-          <p:cNvPr id="23" name="badge-354"/>
+          <p:cNvPr id="23" name="badge-352"/>
           <p:cNvSpPr/>
           <p:nvPr/>
         </p:nvSpPr>
@@ -6900,7 +6874,7 @@
       </p:sp>
       <p:pic>
         <p:nvPicPr>
-          <p:cNvPr id="24" name="icon-355" descr="preencoded.png">    </p:cNvPr>
+          <p:cNvPr id="24" name="icon-353" descr="preencoded.png">    </p:cNvPr>
           <p:cNvPicPr>
             <a:picLocks noChangeAspect="1"/>
           </p:cNvPicPr>
@@ -6924,7 +6898,7 @@
       </p:pic>
       <p:pic>
         <p:nvPicPr>
-          <p:cNvPr id="25" name="after-356" descr="preencoded.png">    </p:cNvPr>
+          <p:cNvPr id="25" name="after-354" descr="preencoded.png">    </p:cNvPr>
           <p:cNvPicPr>
             <a:picLocks noChangeAspect="1"/>
           </p:cNvPicPr>
@@ -6948,7 +6922,7 @@
       </p:pic>
       <p:sp>
         <p:nvSpPr>
-          <p:cNvPr id="26" name="arrow-357"/>
+          <p:cNvPr id="26" name="arrow-355"/>
           <p:cNvSpPr/>
           <p:nvPr/>
         </p:nvSpPr>
@@ -6972,7 +6946,7 @@
       </p:sp>
       <p:sp>
         <p:nvSpPr>
-          <p:cNvPr id="27" name="arrow-358"/>
+          <p:cNvPr id="27" name="arrow-356"/>
           <p:cNvSpPr/>
           <p:nvPr/>
         </p:nvSpPr>
@@ -6996,7 +6970,7 @@
       </p:sp>
       <p:sp>
         <p:nvSpPr>
-          <p:cNvPr id="28" name="text-359"/>
+          <p:cNvPr id="28" name="text-357"/>
           <p:cNvSpPr txBox="1"/>
           <p:nvPr/>
         </p:nvSpPr>
@@ -7032,7 +7006,7 @@
       </p:sp>
       <p:sp>
         <p:nvSpPr>
-          <p:cNvPr id="29" name="text-360"/>
+          <p:cNvPr id="29" name="text-358"/>
           <p:cNvSpPr txBox="1"/>
           <p:nvPr/>
         </p:nvSpPr>
@@ -7094,7 +7068,7 @@
           <a:bodyPr lIns="0" tIns="0" rIns="0" bIns="0"/>
           <a:lstStyle>
             <a:lvl1pPr>
-              <a:defRPr sz="800">
+              <a:defRPr sz="900">
                 <a:solidFill>
                   <a:schemeClr val="tx2"/>
                 </a:solidFill>
@@ -7167,9 +7141,9 @@
                 <a:solidFill>
                   <a:schemeClr val="accent2"/>
                 </a:solidFill>
-                <a:latin typeface="Calibri" pitchFamily="34" charset="0"/>
-                <a:ea typeface="Calibri" pitchFamily="34" charset="-122"/>
-                <a:cs typeface="Calibri" pitchFamily="34" charset="-120"/>
+                <a:latin typeface="Arial" pitchFamily="34" charset="0"/>
+                <a:ea typeface="Arial" pitchFamily="34" charset="-122"/>
+                <a:cs typeface="Arial" pitchFamily="34" charset="-120"/>
               </a:rPr>
               <a:t>PARTEA IV · TIKTOK</a:t>
             </a:r>
@@ -7208,11 +7182,11 @@
                 <a:solidFill>
                   <a:schemeClr val="tx1"/>
                 </a:solidFill>
-                <a:latin typeface="Cambria" pitchFamily="34" charset="0"/>
-                <a:ea typeface="Cambria" pitchFamily="34" charset="-122"/>
-                <a:cs typeface="Cambria" pitchFamily="34" charset="-120"/>
-              </a:rPr>
-              <a:t>Monetizare și LIVE: ce poți accesa din România</a:t>
+                <a:latin typeface="Georgia" pitchFamily="34" charset="0"/>
+                <a:ea typeface="Georgia" pitchFamily="34" charset="-122"/>
+                <a:cs typeface="Georgia" pitchFamily="34" charset="-120"/>
+              </a:rPr>
+              <a:t>Monetizare și LIVE din România</a:t>
             </a:r>
             <a:endParaRPr lang="en-US" sz="2800" dirty="0"/>
           </a:p>
@@ -7220,16 +7194,14 @@
       </p:sp>
       <p:pic>
         <p:nvPicPr>
-          <p:cNvPr id="4" name="watermark-361" descr="preencoded.png">    </p:cNvPr>
+          <p:cNvPr id="4" name="watermark-359" descr="preencoded.png">    </p:cNvPr>
           <p:cNvPicPr>
             <a:picLocks noChangeAspect="1"/>
           </p:cNvPicPr>
           <p:nvPr/>
         </p:nvPicPr>
         <p:blipFill>
-          <a:blip r:embed="rId1">
-            <a:alphaModFix amt="5000"/>
-          </a:blip>
+          <a:blip r:embed="rId1"/>
           <a:stretch>
             <a:fillRect/>
           </a:stretch>
@@ -7246,7 +7218,7 @@
       </p:pic>
       <p:sp>
         <p:nvSpPr>
-          <p:cNvPr id="5" name="card-362"/>
+          <p:cNvPr id="5" name="card-360"/>
           <p:cNvSpPr/>
           <p:nvPr/>
         </p:nvSpPr>
@@ -7273,7 +7245,7 @@
       </p:sp>
       <p:sp>
         <p:nvSpPr>
-          <p:cNvPr id="6" name="badge-363"/>
+          <p:cNvPr id="6" name="badge-361"/>
           <p:cNvSpPr/>
           <p:nvPr/>
         </p:nvSpPr>
@@ -7298,7 +7270,7 @@
       </p:sp>
       <p:pic>
         <p:nvPicPr>
-          <p:cNvPr id="7" name="icon-364" descr="preencoded.png">    </p:cNvPr>
+          <p:cNvPr id="7" name="icon-362" descr="preencoded.png">    </p:cNvPr>
           <p:cNvPicPr>
             <a:picLocks noChangeAspect="1"/>
           </p:cNvPicPr>
@@ -7322,7 +7294,7 @@
       </p:pic>
       <p:sp>
         <p:nvSpPr>
-          <p:cNvPr id="8" name="text-365"/>
+          <p:cNvPr id="8" name="text-363"/>
           <p:cNvSpPr txBox="1"/>
           <p:nvPr/>
         </p:nvSpPr>
@@ -7350,7 +7322,7 @@
                   <a:schemeClr val="tx1"/>
                 </a:solidFill>
               </a:rPr>
-              <a:t>Monetizare = bani direct din platformă</a:t>
+              <a:t>Monetizare = bani din platformă</a:t>
             </a:r>
             <a:endParaRPr lang="en-US" sz="1400" dirty="0"/>
           </a:p>
@@ -7358,7 +7330,7 @@
       </p:sp>
       <p:sp>
         <p:nvSpPr>
-          <p:cNvPr id="9" name="text-366"/>
+          <p:cNvPr id="9" name="text-364"/>
           <p:cNvSpPr txBox="1"/>
           <p:nvPr/>
         </p:nvSpPr>
@@ -7394,7 +7366,7 @@
       </p:sp>
       <p:sp>
         <p:nvSpPr>
-          <p:cNvPr id="10" name="text-367"/>
+          <p:cNvPr id="10" name="text-365"/>
           <p:cNvSpPr txBox="1"/>
           <p:nvPr/>
         </p:nvSpPr>
@@ -7488,7 +7460,7 @@
       </p:sp>
       <p:sp>
         <p:nvSpPr>
-          <p:cNvPr id="11" name="card-368"/>
+          <p:cNvPr id="11" name="card-366"/>
           <p:cNvSpPr/>
           <p:nvPr/>
         </p:nvSpPr>
@@ -7515,7 +7487,7 @@
       </p:sp>
       <p:sp>
         <p:nvSpPr>
-          <p:cNvPr id="12" name="text-369"/>
+          <p:cNvPr id="12" name="text-367"/>
           <p:cNvSpPr txBox="1"/>
           <p:nvPr/>
         </p:nvSpPr>
@@ -7562,7 +7534,7 @@
       </p:sp>
       <p:sp>
         <p:nvSpPr>
-          <p:cNvPr id="13" name="card-370"/>
+          <p:cNvPr id="13" name="card-368"/>
           <p:cNvSpPr/>
           <p:nvPr/>
         </p:nvSpPr>
@@ -7589,7 +7561,7 @@
       </p:sp>
       <p:sp>
         <p:nvSpPr>
-          <p:cNvPr id="14" name="badge-371"/>
+          <p:cNvPr id="14" name="badge-369"/>
           <p:cNvSpPr/>
           <p:nvPr/>
         </p:nvSpPr>
@@ -7614,7 +7586,7 @@
       </p:sp>
       <p:pic>
         <p:nvPicPr>
-          <p:cNvPr id="15" name="icon-372" descr="preencoded.png">    </p:cNvPr>
+          <p:cNvPr id="15" name="icon-370" descr="preencoded.png">    </p:cNvPr>
           <p:cNvPicPr>
             <a:picLocks noChangeAspect="1"/>
           </p:cNvPicPr>
@@ -7638,7 +7610,7 @@
       </p:pic>
       <p:sp>
         <p:nvSpPr>
-          <p:cNvPr id="16" name="text-373"/>
+          <p:cNvPr id="16" name="text-371"/>
           <p:cNvSpPr txBox="1"/>
           <p:nvPr/>
         </p:nvSpPr>
@@ -7674,7 +7646,7 @@
       </p:sp>
       <p:sp>
         <p:nvSpPr>
-          <p:cNvPr id="17" name="text-374"/>
+          <p:cNvPr id="17" name="text-372"/>
           <p:cNvSpPr txBox="1"/>
           <p:nvPr/>
         </p:nvSpPr>
@@ -7710,7 +7682,7 @@
       </p:sp>
       <p:sp>
         <p:nvSpPr>
-          <p:cNvPr id="18" name="text-375"/>
+          <p:cNvPr id="18" name="text-373"/>
           <p:cNvSpPr txBox="1"/>
           <p:nvPr/>
         </p:nvSpPr>
@@ -7760,7 +7732,7 @@
                   <a:schemeClr val="tx1"/>
                 </a:solidFill>
               </a:rPr>
-              <a:t>Prag de urmăritori stabilit pe piață (des: 1.000)</a:t>
+              <a:t>Prag de urmăritori (adesea 1.000)</a:t>
             </a:r>
             <a:endParaRPr lang="en-US" sz="1300" dirty="0"/>
           </a:p>
@@ -7786,7 +7758,7 @@
       </p:sp>
       <p:sp>
         <p:nvSpPr>
-          <p:cNvPr id="19" name="text-376"/>
+          <p:cNvPr id="19" name="text-374"/>
           <p:cNvSpPr txBox="1"/>
           <p:nvPr/>
         </p:nvSpPr>
@@ -7822,7 +7794,7 @@
       </p:sp>
       <p:sp>
         <p:nvSpPr>
-          <p:cNvPr id="20" name="card-377"/>
+          <p:cNvPr id="20" name="card-375"/>
           <p:cNvSpPr/>
           <p:nvPr/>
         </p:nvSpPr>
@@ -7849,7 +7821,7 @@
       </p:sp>
       <p:sp>
         <p:nvSpPr>
-          <p:cNvPr id="21" name="text-378"/>
+          <p:cNvPr id="21" name="text-376"/>
           <p:cNvSpPr txBox="1"/>
           <p:nvPr/>
         </p:nvSpPr>
@@ -7888,7 +7860,7 @@
                   <a:schemeClr val="bg1"/>
                 </a:solidFill>
               </a:rPr>
-              <a:t>Profil → ☰ → TikTok Studio → Monetizare. LIVE: butonul + → vezi dacă apare „LIVE”.</a:t>
+              <a:t>Profil → meniul din dreapta sus → TikTok Studio → Monetizare. LIVE: butonul + → vezi dacă apare „LIVE”.</a:t>
             </a:r>
             <a:endParaRPr lang="en-US" sz="1200" dirty="0"/>
           </a:p>
@@ -7922,7 +7894,7 @@
           <a:bodyPr lIns="0" tIns="0" rIns="0" bIns="0"/>
           <a:lstStyle>
             <a:lvl1pPr>
-              <a:defRPr sz="800">
+              <a:defRPr sz="900">
                 <a:solidFill>
                   <a:schemeClr val="tx2"/>
                 </a:solidFill>
@@ -7995,9 +7967,9 @@
                 <a:solidFill>
                   <a:schemeClr val="accent2"/>
                 </a:solidFill>
-                <a:latin typeface="Calibri" pitchFamily="34" charset="0"/>
-                <a:ea typeface="Calibri" pitchFamily="34" charset="-122"/>
-                <a:cs typeface="Calibri" pitchFamily="34" charset="-120"/>
+                <a:latin typeface="Arial" pitchFamily="34" charset="0"/>
+                <a:ea typeface="Arial" pitchFamily="34" charset="-122"/>
+                <a:cs typeface="Arial" pitchFamily="34" charset="-120"/>
               </a:rPr>
               <a:t>PARTEA IV · TIKTOK</a:t>
             </a:r>
@@ -8036,9 +8008,9 @@
                 <a:solidFill>
                   <a:schemeClr val="tx1"/>
                 </a:solidFill>
-                <a:latin typeface="Cambria" pitchFamily="34" charset="0"/>
-                <a:ea typeface="Cambria" pitchFamily="34" charset="-122"/>
-                <a:cs typeface="Cambria" pitchFamily="34" charset="-120"/>
+                <a:latin typeface="Georgia" pitchFamily="34" charset="0"/>
+                <a:ea typeface="Georgia" pitchFamily="34" charset="-122"/>
+                <a:cs typeface="Georgia" pitchFamily="34" charset="-120"/>
               </a:rPr>
               <a:t>Comentarii negative: răspunde, nu reacționa</a:t>
             </a:r>
@@ -8048,16 +8020,14 @@
       </p:sp>
       <p:pic>
         <p:nvPicPr>
-          <p:cNvPr id="4" name="watermark-379" descr="preencoded.png">    </p:cNvPr>
+          <p:cNvPr id="4" name="watermark-377" descr="preencoded.png">    </p:cNvPr>
           <p:cNvPicPr>
             <a:picLocks noChangeAspect="1"/>
           </p:cNvPicPr>
           <p:nvPr/>
         </p:nvPicPr>
         <p:blipFill>
-          <a:blip r:embed="rId1">
-            <a:alphaModFix amt="5000"/>
-          </a:blip>
+          <a:blip r:embed="rId1"/>
           <a:stretch>
             <a:fillRect/>
           </a:stretch>
@@ -8074,7 +8044,7 @@
       </p:pic>
       <p:sp>
         <p:nvSpPr>
-          <p:cNvPr id="5" name="card-380"/>
+          <p:cNvPr id="5" name="card-378"/>
           <p:cNvSpPr/>
           <p:nvPr/>
         </p:nvSpPr>
@@ -8101,7 +8071,7 @@
       </p:sp>
       <p:sp>
         <p:nvSpPr>
-          <p:cNvPr id="6" name="text-381"/>
+          <p:cNvPr id="6" name="text-379"/>
           <p:cNvSpPr txBox="1"/>
           <p:nvPr/>
         </p:nvSpPr>
@@ -8128,9 +8098,9 @@
                 <a:solidFill>
                   <a:schemeClr val="tx1"/>
                 </a:solidFill>
-                <a:latin typeface="Cambria" pitchFamily="34" charset="0"/>
-                <a:ea typeface="Cambria" pitchFamily="34" charset="-122"/>
-                <a:cs typeface="Cambria" pitchFamily="34" charset="-120"/>
+                <a:latin typeface="Georgia" pitchFamily="34" charset="0"/>
+                <a:ea typeface="Georgia" pitchFamily="34" charset="-122"/>
+                <a:cs typeface="Georgia" pitchFamily="34" charset="-120"/>
               </a:rPr>
               <a:t>Ce e hate-ul</a:t>
             </a:r>
@@ -8140,7 +8110,7 @@
       </p:sp>
       <p:sp>
         <p:nvSpPr>
-          <p:cNvPr id="7" name="text-382"/>
+          <p:cNvPr id="7" name="text-380"/>
           <p:cNvSpPr txBox="1"/>
           <p:nvPr/>
         </p:nvSpPr>
@@ -8176,7 +8146,7 @@
       </p:sp>
       <p:sp>
         <p:nvSpPr>
-          <p:cNvPr id="8" name="text-383"/>
+          <p:cNvPr id="8" name="text-381"/>
           <p:cNvSpPr txBox="1"/>
           <p:nvPr/>
         </p:nvSpPr>
@@ -8212,7 +8182,7 @@
       </p:sp>
       <p:sp>
         <p:nvSpPr>
-          <p:cNvPr id="9" name="text-384"/>
+          <p:cNvPr id="9" name="text-382"/>
           <p:cNvSpPr txBox="1"/>
           <p:nvPr/>
         </p:nvSpPr>
@@ -8248,7 +8218,7 @@
       </p:sp>
       <p:sp>
         <p:nvSpPr>
-          <p:cNvPr id="10" name="text-385"/>
+          <p:cNvPr id="10" name="text-383"/>
           <p:cNvSpPr txBox="1"/>
           <p:nvPr/>
         </p:nvSpPr>
@@ -8284,7 +8254,7 @@
       </p:sp>
       <p:sp>
         <p:nvSpPr>
-          <p:cNvPr id="11" name="card-386"/>
+          <p:cNvPr id="11" name="card-384"/>
           <p:cNvSpPr/>
           <p:nvPr/>
         </p:nvSpPr>
@@ -8311,7 +8281,7 @@
       </p:sp>
       <p:sp>
         <p:nvSpPr>
-          <p:cNvPr id="12" name="badge-387"/>
+          <p:cNvPr id="12" name="badge-385"/>
           <p:cNvSpPr/>
           <p:nvPr/>
         </p:nvSpPr>
@@ -8336,7 +8306,7 @@
       </p:sp>
       <p:pic>
         <p:nvPicPr>
-          <p:cNvPr id="13" name="icon-388" descr="preencoded.png">    </p:cNvPr>
+          <p:cNvPr id="13" name="icon-386" descr="preencoded.png">    </p:cNvPr>
           <p:cNvPicPr>
             <a:picLocks noChangeAspect="1"/>
           </p:cNvPicPr>
@@ -8360,7 +8330,7 @@
       </p:pic>
       <p:sp>
         <p:nvSpPr>
-          <p:cNvPr id="14" name="text-389"/>
+          <p:cNvPr id="14" name="text-387"/>
           <p:cNvSpPr txBox="1"/>
           <p:nvPr/>
         </p:nvSpPr>
@@ -8396,7 +8366,7 @@
       </p:sp>
       <p:sp>
         <p:nvSpPr>
-          <p:cNvPr id="15" name="text-390"/>
+          <p:cNvPr id="15" name="text-388"/>
           <p:cNvSpPr txBox="1"/>
           <p:nvPr/>
         </p:nvSpPr>
@@ -8432,7 +8402,7 @@
       </p:sp>
       <p:sp>
         <p:nvSpPr>
-          <p:cNvPr id="16" name="card-391"/>
+          <p:cNvPr id="16" name="card-389"/>
           <p:cNvSpPr/>
           <p:nvPr/>
         </p:nvSpPr>
@@ -8459,7 +8429,7 @@
       </p:sp>
       <p:sp>
         <p:nvSpPr>
-          <p:cNvPr id="17" name="badge-392"/>
+          <p:cNvPr id="17" name="badge-390"/>
           <p:cNvSpPr/>
           <p:nvPr/>
         </p:nvSpPr>
@@ -8484,7 +8454,7 @@
       </p:sp>
       <p:pic>
         <p:nvPicPr>
-          <p:cNvPr id="18" name="icon-393" descr="preencoded.png">    </p:cNvPr>
+          <p:cNvPr id="18" name="icon-391" descr="preencoded.png">    </p:cNvPr>
           <p:cNvPicPr>
             <a:picLocks noChangeAspect="1"/>
           </p:cNvPicPr>
@@ -8508,7 +8478,7 @@
       </p:pic>
       <p:sp>
         <p:nvSpPr>
-          <p:cNvPr id="19" name="text-394"/>
+          <p:cNvPr id="19" name="text-392"/>
           <p:cNvSpPr txBox="1"/>
           <p:nvPr/>
         </p:nvSpPr>
@@ -8544,7 +8514,7 @@
       </p:sp>
       <p:sp>
         <p:nvSpPr>
-          <p:cNvPr id="20" name="text-395"/>
+          <p:cNvPr id="20" name="text-393"/>
           <p:cNvSpPr txBox="1"/>
           <p:nvPr/>
         </p:nvSpPr>
@@ -8580,7 +8550,7 @@
       </p:sp>
       <p:sp>
         <p:nvSpPr>
-          <p:cNvPr id="21" name="card-396"/>
+          <p:cNvPr id="21" name="card-394"/>
           <p:cNvSpPr/>
           <p:nvPr/>
         </p:nvSpPr>
@@ -8607,7 +8577,7 @@
       </p:sp>
       <p:sp>
         <p:nvSpPr>
-          <p:cNvPr id="22" name="badge-397"/>
+          <p:cNvPr id="22" name="badge-395"/>
           <p:cNvSpPr/>
           <p:nvPr/>
         </p:nvSpPr>
@@ -8632,7 +8602,7 @@
       </p:sp>
       <p:pic>
         <p:nvPicPr>
-          <p:cNvPr id="23" name="icon-398" descr="preencoded.png">    </p:cNvPr>
+          <p:cNvPr id="23" name="icon-396" descr="preencoded.png">    </p:cNvPr>
           <p:cNvPicPr>
             <a:picLocks noChangeAspect="1"/>
           </p:cNvPicPr>
@@ -8656,7 +8626,7 @@
       </p:pic>
       <p:sp>
         <p:nvSpPr>
-          <p:cNvPr id="24" name="text-399"/>
+          <p:cNvPr id="24" name="text-397"/>
           <p:cNvSpPr txBox="1"/>
           <p:nvPr/>
         </p:nvSpPr>
@@ -8692,7 +8662,7 @@
       </p:sp>
       <p:sp>
         <p:nvSpPr>
-          <p:cNvPr id="25" name="text-400"/>
+          <p:cNvPr id="25" name="text-398"/>
           <p:cNvSpPr txBox="1"/>
           <p:nvPr/>
         </p:nvSpPr>
@@ -8728,7 +8698,7 @@
       </p:sp>
       <p:sp>
         <p:nvSpPr>
-          <p:cNvPr id="26" name="card-401"/>
+          <p:cNvPr id="26" name="card-399"/>
           <p:cNvSpPr/>
           <p:nvPr/>
         </p:nvSpPr>
@@ -8755,7 +8725,7 @@
       </p:sp>
       <p:sp>
         <p:nvSpPr>
-          <p:cNvPr id="27" name="badge-402"/>
+          <p:cNvPr id="27" name="badge-400"/>
           <p:cNvSpPr/>
           <p:nvPr/>
         </p:nvSpPr>
@@ -8780,7 +8750,7 @@
       </p:sp>
       <p:pic>
         <p:nvPicPr>
-          <p:cNvPr id="28" name="icon-403" descr="preencoded.png">    </p:cNvPr>
+          <p:cNvPr id="28" name="icon-401" descr="preencoded.png">    </p:cNvPr>
           <p:cNvPicPr>
             <a:picLocks noChangeAspect="1"/>
           </p:cNvPicPr>
@@ -8804,7 +8774,7 @@
       </p:pic>
       <p:sp>
         <p:nvSpPr>
-          <p:cNvPr id="29" name="text-404"/>
+          <p:cNvPr id="29" name="text-402"/>
           <p:cNvSpPr txBox="1"/>
           <p:nvPr/>
         </p:nvSpPr>
@@ -8840,7 +8810,7 @@
       </p:sp>
       <p:sp>
         <p:nvSpPr>
-          <p:cNvPr id="30" name="text-405"/>
+          <p:cNvPr id="30" name="text-403"/>
           <p:cNvSpPr txBox="1"/>
           <p:nvPr/>
         </p:nvSpPr>
@@ -8876,7 +8846,7 @@
       </p:sp>
       <p:sp>
         <p:nvSpPr>
-          <p:cNvPr id="31" name="card-406"/>
+          <p:cNvPr id="31" name="card-404"/>
           <p:cNvSpPr/>
           <p:nvPr/>
         </p:nvSpPr>
@@ -8903,7 +8873,7 @@
       </p:sp>
       <p:sp>
         <p:nvSpPr>
-          <p:cNvPr id="32" name="badge-407"/>
+          <p:cNvPr id="32" name="badge-405"/>
           <p:cNvSpPr/>
           <p:nvPr/>
         </p:nvSpPr>
@@ -8928,7 +8898,7 @@
       </p:sp>
       <p:pic>
         <p:nvPicPr>
-          <p:cNvPr id="33" name="icon-408" descr="preencoded.png">    </p:cNvPr>
+          <p:cNvPr id="33" name="icon-406" descr="preencoded.png">    </p:cNvPr>
           <p:cNvPicPr>
             <a:picLocks noChangeAspect="1"/>
           </p:cNvPicPr>
@@ -8952,7 +8922,7 @@
       </p:pic>
       <p:sp>
         <p:nvSpPr>
-          <p:cNvPr id="34" name="text-409"/>
+          <p:cNvPr id="34" name="text-407"/>
           <p:cNvSpPr txBox="1"/>
           <p:nvPr/>
         </p:nvSpPr>
@@ -8988,7 +8958,7 @@
       </p:sp>
       <p:sp>
         <p:nvSpPr>
-          <p:cNvPr id="35" name="text-410"/>
+          <p:cNvPr id="35" name="text-408"/>
           <p:cNvSpPr txBox="1"/>
           <p:nvPr/>
         </p:nvSpPr>
@@ -9050,7 +9020,7 @@
           <a:bodyPr lIns="0" tIns="0" rIns="0" bIns="0"/>
           <a:lstStyle>
             <a:lvl1pPr>
-              <a:defRPr sz="800">
+              <a:defRPr sz="900">
                 <a:solidFill>
                   <a:schemeClr val="tx2"/>
                 </a:solidFill>
@@ -9123,9 +9093,9 @@
                 <a:solidFill>
                   <a:schemeClr val="accent2"/>
                 </a:solidFill>
-                <a:latin typeface="Calibri" pitchFamily="34" charset="0"/>
-                <a:ea typeface="Calibri" pitchFamily="34" charset="-122"/>
-                <a:cs typeface="Calibri" pitchFamily="34" charset="-120"/>
+                <a:latin typeface="Arial" pitchFamily="34" charset="0"/>
+                <a:ea typeface="Arial" pitchFamily="34" charset="-122"/>
+                <a:cs typeface="Arial" pitchFamily="34" charset="-120"/>
               </a:rPr>
               <a:t>PARTEA IV · TIKTOK</a:t>
             </a:r>
@@ -9164,9 +9134,9 @@
                 <a:solidFill>
                   <a:schemeClr val="tx1"/>
                 </a:solidFill>
-                <a:latin typeface="Cambria" pitchFamily="34" charset="0"/>
-                <a:ea typeface="Cambria" pitchFamily="34" charset="-122"/>
-                <a:cs typeface="Cambria" pitchFamily="34" charset="-120"/>
+                <a:latin typeface="Georgia" pitchFamily="34" charset="0"/>
+                <a:ea typeface="Georgia" pitchFamily="34" charset="-122"/>
+                <a:cs typeface="Georgia" pitchFamily="34" charset="-120"/>
               </a:rPr>
               <a:t>Sfaturi și trucuri TikTok pentru beauty</a:t>
             </a:r>
@@ -9176,16 +9146,14 @@
       </p:sp>
       <p:pic>
         <p:nvPicPr>
-          <p:cNvPr id="4" name="watermark-411" descr="preencoded.png">    </p:cNvPr>
+          <p:cNvPr id="4" name="watermark-409" descr="preencoded.png">    </p:cNvPr>
           <p:cNvPicPr>
             <a:picLocks noChangeAspect="1"/>
           </p:cNvPicPr>
           <p:nvPr/>
         </p:nvPicPr>
         <p:blipFill>
-          <a:blip r:embed="rId1">
-            <a:alphaModFix amt="5000"/>
-          </a:blip>
+          <a:blip r:embed="rId1"/>
           <a:stretch>
             <a:fillRect/>
           </a:stretch>
@@ -9202,7 +9170,7 @@
       </p:pic>
       <p:sp>
         <p:nvSpPr>
-          <p:cNvPr id="5" name="badge-412"/>
+          <p:cNvPr id="5" name="badge-410"/>
           <p:cNvSpPr/>
           <p:nvPr/>
         </p:nvSpPr>
@@ -9227,7 +9195,7 @@
       </p:sp>
       <p:pic>
         <p:nvPicPr>
-          <p:cNvPr id="6" name="icon-413" descr="preencoded.png">    </p:cNvPr>
+          <p:cNvPr id="6" name="icon-411" descr="preencoded.png">    </p:cNvPr>
           <p:cNvPicPr>
             <a:picLocks noChangeAspect="1"/>
           </p:cNvPicPr>
@@ -9251,7 +9219,7 @@
       </p:pic>
       <p:sp>
         <p:nvSpPr>
-          <p:cNvPr id="7" name="text-414"/>
+          <p:cNvPr id="7" name="text-412"/>
           <p:cNvSpPr txBox="1"/>
           <p:nvPr/>
         </p:nvSpPr>
@@ -9287,7 +9255,7 @@
       </p:sp>
       <p:sp>
         <p:nvSpPr>
-          <p:cNvPr id="8" name="badge-415"/>
+          <p:cNvPr id="8" name="badge-413"/>
           <p:cNvSpPr/>
           <p:nvPr/>
         </p:nvSpPr>
@@ -9312,7 +9280,7 @@
       </p:sp>
       <p:pic>
         <p:nvPicPr>
-          <p:cNvPr id="9" name="icon-416" descr="preencoded.png">    </p:cNvPr>
+          <p:cNvPr id="9" name="icon-414" descr="preencoded.png">    </p:cNvPr>
           <p:cNvPicPr>
             <a:picLocks noChangeAspect="1"/>
           </p:cNvPicPr>
@@ -9336,7 +9304,7 @@
       </p:pic>
       <p:sp>
         <p:nvSpPr>
-          <p:cNvPr id="10" name="text-417"/>
+          <p:cNvPr id="10" name="text-415"/>
           <p:cNvSpPr txBox="1"/>
           <p:nvPr/>
         </p:nvSpPr>
@@ -9372,7 +9340,7 @@
       </p:sp>
       <p:sp>
         <p:nvSpPr>
-          <p:cNvPr id="11" name="badge-418"/>
+          <p:cNvPr id="11" name="badge-416"/>
           <p:cNvSpPr/>
           <p:nvPr/>
         </p:nvSpPr>
@@ -9397,7 +9365,7 @@
       </p:sp>
       <p:pic>
         <p:nvPicPr>
-          <p:cNvPr id="12" name="icon-419" descr="preencoded.png">    </p:cNvPr>
+          <p:cNvPr id="12" name="icon-417" descr="preencoded.png">    </p:cNvPr>
           <p:cNvPicPr>
             <a:picLocks noChangeAspect="1"/>
           </p:cNvPicPr>
@@ -9421,7 +9389,7 @@
       </p:pic>
       <p:sp>
         <p:nvSpPr>
-          <p:cNvPr id="13" name="text-420"/>
+          <p:cNvPr id="13" name="text-418"/>
           <p:cNvSpPr txBox="1"/>
           <p:nvPr/>
         </p:nvSpPr>
@@ -9457,7 +9425,7 @@
       </p:sp>
       <p:sp>
         <p:nvSpPr>
-          <p:cNvPr id="14" name="badge-421"/>
+          <p:cNvPr id="14" name="badge-419"/>
           <p:cNvSpPr/>
           <p:nvPr/>
         </p:nvSpPr>
@@ -9482,7 +9450,7 @@
       </p:sp>
       <p:pic>
         <p:nvPicPr>
-          <p:cNvPr id="15" name="icon-422" descr="preencoded.png">    </p:cNvPr>
+          <p:cNvPr id="15" name="icon-420" descr="preencoded.png">    </p:cNvPr>
           <p:cNvPicPr>
             <a:picLocks noChangeAspect="1"/>
           </p:cNvPicPr>
@@ -9506,7 +9474,7 @@
       </p:pic>
       <p:sp>
         <p:nvSpPr>
-          <p:cNvPr id="16" name="text-423"/>
+          <p:cNvPr id="16" name="text-421"/>
           <p:cNvSpPr txBox="1"/>
           <p:nvPr/>
         </p:nvSpPr>
@@ -9542,7 +9510,7 @@
       </p:sp>
       <p:sp>
         <p:nvSpPr>
-          <p:cNvPr id="17" name="badge-424"/>
+          <p:cNvPr id="17" name="badge-422"/>
           <p:cNvSpPr/>
           <p:nvPr/>
         </p:nvSpPr>
@@ -9567,7 +9535,7 @@
       </p:sp>
       <p:pic>
         <p:nvPicPr>
-          <p:cNvPr id="18" name="icon-425" descr="preencoded.png">    </p:cNvPr>
+          <p:cNvPr id="18" name="icon-423" descr="preencoded.png">    </p:cNvPr>
           <p:cNvPicPr>
             <a:picLocks noChangeAspect="1"/>
           </p:cNvPicPr>
@@ -9591,7 +9559,7 @@
       </p:pic>
       <p:sp>
         <p:nvSpPr>
-          <p:cNvPr id="19" name="text-426"/>
+          <p:cNvPr id="19" name="text-424"/>
           <p:cNvSpPr txBox="1"/>
           <p:nvPr/>
         </p:nvSpPr>
@@ -9627,7 +9595,7 @@
       </p:sp>
       <p:sp>
         <p:nvSpPr>
-          <p:cNvPr id="20" name="badge-427"/>
+          <p:cNvPr id="20" name="badge-425"/>
           <p:cNvSpPr/>
           <p:nvPr/>
         </p:nvSpPr>
@@ -9652,7 +9620,7 @@
       </p:sp>
       <p:pic>
         <p:nvPicPr>
-          <p:cNvPr id="21" name="icon-428" descr="preencoded.png">    </p:cNvPr>
+          <p:cNvPr id="21" name="icon-426" descr="preencoded.png">    </p:cNvPr>
           <p:cNvPicPr>
             <a:picLocks noChangeAspect="1"/>
           </p:cNvPicPr>
@@ -9676,7 +9644,7 @@
       </p:pic>
       <p:sp>
         <p:nvSpPr>
-          <p:cNvPr id="22" name="text-429"/>
+          <p:cNvPr id="22" name="text-427"/>
           <p:cNvSpPr txBox="1"/>
           <p:nvPr/>
         </p:nvSpPr>
@@ -9712,7 +9680,7 @@
       </p:sp>
       <p:sp>
         <p:nvSpPr>
-          <p:cNvPr id="23" name="card-430"/>
+          <p:cNvPr id="23" name="card-428"/>
           <p:cNvSpPr/>
           <p:nvPr/>
         </p:nvSpPr>
@@ -9739,7 +9707,7 @@
       </p:sp>
       <p:sp>
         <p:nvSpPr>
-          <p:cNvPr id="24" name="text-431"/>
+          <p:cNvPr id="24" name="text-429"/>
           <p:cNvSpPr txBox="1"/>
           <p:nvPr/>
         </p:nvSpPr>
@@ -9766,9 +9734,9 @@
                 <a:solidFill>
                   <a:schemeClr val="accent3"/>
                 </a:solidFill>
-                <a:latin typeface="Cambria" pitchFamily="34" charset="0"/>
-                <a:ea typeface="Cambria" pitchFamily="34" charset="-122"/>
-                <a:cs typeface="Cambria" pitchFamily="34" charset="-120"/>
+                <a:latin typeface="Georgia" pitchFamily="34" charset="0"/>
+                <a:ea typeface="Georgia" pitchFamily="34" charset="-122"/>
+                <a:cs typeface="Georgia" pitchFamily="34" charset="-120"/>
               </a:rPr>
               <a:t>Începuturi care opresc derularea</a:t>
             </a:r>
@@ -9778,7 +9746,7 @@
       </p:sp>
       <p:sp>
         <p:nvSpPr>
-          <p:cNvPr id="25" name="text-432"/>
+          <p:cNvPr id="25" name="text-430"/>
           <p:cNvSpPr txBox="1"/>
           <p:nvPr/>
         </p:nvSpPr>
@@ -9911,7 +9879,7 @@
           <a:bodyPr lIns="0" tIns="0" rIns="0" bIns="0"/>
           <a:lstStyle>
             <a:lvl1pPr>
-              <a:defRPr sz="800">
+              <a:defRPr sz="900">
                 <a:solidFill>
                   <a:schemeClr val="tx2"/>
                 </a:solidFill>
@@ -9984,9 +9952,9 @@
                 <a:solidFill>
                   <a:schemeClr val="accent2"/>
                 </a:solidFill>
-                <a:latin typeface="Calibri" pitchFamily="34" charset="0"/>
-                <a:ea typeface="Calibri" pitchFamily="34" charset="-122"/>
-                <a:cs typeface="Calibri" pitchFamily="34" charset="-120"/>
+                <a:latin typeface="Arial" pitchFamily="34" charset="0"/>
+                <a:ea typeface="Arial" pitchFamily="34" charset="-122"/>
+                <a:cs typeface="Arial" pitchFamily="34" charset="-120"/>
               </a:rPr>
               <a:t>PARTEA V · EDITARE VIDEO CU CAPCUT</a:t>
             </a:r>
@@ -10025,9 +9993,9 @@
                 <a:solidFill>
                   <a:schemeClr val="tx1"/>
                 </a:solidFill>
-                <a:latin typeface="Cambria" pitchFamily="34" charset="0"/>
-                <a:ea typeface="Cambria" pitchFamily="34" charset="-122"/>
-                <a:cs typeface="Cambria" pitchFamily="34" charset="-120"/>
+                <a:latin typeface="Georgia" pitchFamily="34" charset="0"/>
+                <a:ea typeface="Georgia" pitchFamily="34" charset="-122"/>
+                <a:cs typeface="Georgia" pitchFamily="34" charset="-120"/>
               </a:rPr>
               <a:t>CapCut, pas cu pas: de la clipuri la poveste</a:t>
             </a:r>
@@ -10037,16 +10005,14 @@
       </p:sp>
       <p:pic>
         <p:nvPicPr>
-          <p:cNvPr id="4" name="watermark-433" descr="preencoded.png">    </p:cNvPr>
+          <p:cNvPr id="4" name="watermark-431" descr="preencoded.png">    </p:cNvPr>
           <p:cNvPicPr>
             <a:picLocks noChangeAspect="1"/>
           </p:cNvPicPr>
           <p:nvPr/>
         </p:nvPicPr>
         <p:blipFill>
-          <a:blip r:embed="rId1">
-            <a:alphaModFix amt="5000"/>
-          </a:blip>
+          <a:blip r:embed="rId1"/>
           <a:stretch>
             <a:fillRect/>
           </a:stretch>
@@ -10063,7 +10029,7 @@
       </p:pic>
       <p:sp>
         <p:nvSpPr>
-          <p:cNvPr id="5" name="phone-434"/>
+          <p:cNvPr id="5" name="phone-432"/>
           <p:cNvSpPr/>
           <p:nvPr/>
         </p:nvSpPr>
@@ -10097,7 +10063,7 @@
       </p:sp>
       <p:sp>
         <p:nvSpPr>
-          <p:cNvPr id="6" name="screen-435"/>
+          <p:cNvPr id="6" name="screen-433"/>
           <p:cNvSpPr/>
           <p:nvPr/>
         </p:nvSpPr>
@@ -10124,7 +10090,7 @@
       </p:sp>
       <p:sp>
         <p:nvSpPr>
-          <p:cNvPr id="7" name="notch-436"/>
+          <p:cNvPr id="7" name="notch-434"/>
           <p:cNvSpPr/>
           <p:nvPr/>
         </p:nvSpPr>
@@ -10151,7 +10117,7 @@
       </p:sp>
       <p:pic>
         <p:nvPicPr>
-          <p:cNvPr id="8" name="preview-437" descr="preencoded.png">    </p:cNvPr>
+          <p:cNvPr id="8" name="preview-435" descr="preencoded.png">    </p:cNvPr>
           <p:cNvPicPr>
             <a:picLocks noChangeAspect="1"/>
           </p:cNvPicPr>
@@ -10175,7 +10141,7 @@
       </p:pic>
       <p:sp>
         <p:nvSpPr>
-          <p:cNvPr id="9" name="clip-438"/>
+          <p:cNvPr id="9" name="clip-436"/>
           <p:cNvSpPr/>
           <p:nvPr/>
         </p:nvSpPr>
@@ -10200,7 +10166,7 @@
       </p:sp>
       <p:sp>
         <p:nvSpPr>
-          <p:cNvPr id="10" name="trans-439"/>
+          <p:cNvPr id="10" name="trans-437"/>
           <p:cNvSpPr/>
           <p:nvPr/>
         </p:nvSpPr>
@@ -10225,7 +10191,7 @@
       </p:sp>
       <p:sp>
         <p:nvSpPr>
-          <p:cNvPr id="11" name="clip-440"/>
+          <p:cNvPr id="11" name="clip-438"/>
           <p:cNvSpPr/>
           <p:nvPr/>
         </p:nvSpPr>
@@ -10250,7 +10216,7 @@
       </p:sp>
       <p:sp>
         <p:nvSpPr>
-          <p:cNvPr id="12" name="trans-441"/>
+          <p:cNvPr id="12" name="trans-439"/>
           <p:cNvSpPr/>
           <p:nvPr/>
         </p:nvSpPr>
@@ -10275,7 +10241,7 @@
       </p:sp>
       <p:sp>
         <p:nvSpPr>
-          <p:cNvPr id="13" name="clip-442"/>
+          <p:cNvPr id="13" name="clip-440"/>
           <p:cNvSpPr/>
           <p:nvPr/>
         </p:nvSpPr>
@@ -10300,7 +10266,7 @@
       </p:sp>
       <p:sp>
         <p:nvSpPr>
-          <p:cNvPr id="14" name="audio-443"/>
+          <p:cNvPr id="14" name="audio-441"/>
           <p:cNvSpPr/>
           <p:nvPr/>
         </p:nvSpPr>
@@ -10325,7 +10291,7 @@
       </p:sp>
       <p:sp>
         <p:nvSpPr>
-          <p:cNvPr id="15" name="playhead-444"/>
+          <p:cNvPr id="15" name="playhead-442"/>
           <p:cNvSpPr/>
           <p:nvPr/>
         </p:nvSpPr>
@@ -10348,7 +10314,7 @@
       </p:sp>
       <p:sp>
         <p:nvSpPr>
-          <p:cNvPr id="16" name="text-445"/>
+          <p:cNvPr id="16" name="text-443"/>
           <p:cNvSpPr txBox="1"/>
           <p:nvPr/>
         </p:nvSpPr>
@@ -10371,20 +10337,20 @@
               <a:buNone/>
             </a:pPr>
             <a:r>
-              <a:rPr lang="en-US" sz="800" dirty="0">
+              <a:rPr lang="en-US" sz="900" dirty="0">
                 <a:solidFill>
                   <a:srgbClr val="FFFFFF"/>
                 </a:solidFill>
               </a:rPr>
               <a:t>Edit</a:t>
             </a:r>
-            <a:endParaRPr lang="en-US" sz="800" dirty="0"/>
-          </a:p>
-        </p:txBody>
-      </p:sp>
-      <p:sp>
-        <p:nvSpPr>
-          <p:cNvPr id="17" name="text-446"/>
+            <a:endParaRPr lang="en-US" sz="900" dirty="0"/>
+          </a:p>
+        </p:txBody>
+      </p:sp>
+      <p:sp>
+        <p:nvSpPr>
+          <p:cNvPr id="17" name="text-444"/>
           <p:cNvSpPr txBox="1"/>
           <p:nvPr/>
         </p:nvSpPr>
@@ -10407,20 +10373,20 @@
               <a:buNone/>
             </a:pPr>
             <a:r>
-              <a:rPr lang="en-US" sz="800" dirty="0">
+              <a:rPr lang="en-US" sz="900" dirty="0">
                 <a:solidFill>
                   <a:srgbClr val="FFFFFF"/>
                 </a:solidFill>
               </a:rPr>
               <a:t>Audio</a:t>
             </a:r>
-            <a:endParaRPr lang="en-US" sz="800" dirty="0"/>
-          </a:p>
-        </p:txBody>
-      </p:sp>
-      <p:sp>
-        <p:nvSpPr>
-          <p:cNvPr id="18" name="text-447"/>
+            <a:endParaRPr lang="en-US" sz="900" dirty="0"/>
+          </a:p>
+        </p:txBody>
+      </p:sp>
+      <p:sp>
+        <p:nvSpPr>
+          <p:cNvPr id="18" name="text-445"/>
           <p:cNvSpPr txBox="1"/>
           <p:nvPr/>
         </p:nvSpPr>
@@ -10443,20 +10409,20 @@
               <a:buNone/>
             </a:pPr>
             <a:r>
-              <a:rPr lang="en-US" sz="800" dirty="0">
+              <a:rPr lang="en-US" sz="900" dirty="0">
                 <a:solidFill>
                   <a:srgbClr val="FFFFFF"/>
                 </a:solidFill>
               </a:rPr>
               <a:t>Text</a:t>
             </a:r>
-            <a:endParaRPr lang="en-US" sz="800" dirty="0"/>
-          </a:p>
-        </p:txBody>
-      </p:sp>
-      <p:sp>
-        <p:nvSpPr>
-          <p:cNvPr id="19" name="text-448"/>
+            <a:endParaRPr lang="en-US" sz="900" dirty="0"/>
+          </a:p>
+        </p:txBody>
+      </p:sp>
+      <p:sp>
+        <p:nvSpPr>
+          <p:cNvPr id="19" name="text-446"/>
           <p:cNvSpPr txBox="1"/>
           <p:nvPr/>
         </p:nvSpPr>
@@ -10479,20 +10445,20 @@
               <a:buNone/>
             </a:pPr>
             <a:r>
-              <a:rPr lang="en-US" sz="800" dirty="0">
+              <a:rPr lang="en-US" sz="900" dirty="0">
                 <a:solidFill>
                   <a:srgbClr val="FFFFFF"/>
                 </a:solidFill>
               </a:rPr>
               <a:t>Effects</a:t>
             </a:r>
-            <a:endParaRPr lang="en-US" sz="800" dirty="0"/>
-          </a:p>
-        </p:txBody>
-      </p:sp>
-      <p:sp>
-        <p:nvSpPr>
-          <p:cNvPr id="20" name="num-449"/>
+            <a:endParaRPr lang="en-US" sz="900" dirty="0"/>
+          </a:p>
+        </p:txBody>
+      </p:sp>
+      <p:sp>
+        <p:nvSpPr>
+          <p:cNvPr id="20" name="num-447"/>
           <p:cNvSpPr/>
           <p:nvPr/>
         </p:nvSpPr>
@@ -10517,7 +10483,7 @@
       </p:sp>
       <p:sp>
         <p:nvSpPr>
-          <p:cNvPr id="21" name="text-450"/>
+          <p:cNvPr id="21" name="text-448"/>
           <p:cNvSpPr txBox="1"/>
           <p:nvPr/>
         </p:nvSpPr>
@@ -10553,7 +10519,7 @@
       </p:sp>
       <p:sp>
         <p:nvSpPr>
-          <p:cNvPr id="22" name="arrow-451"/>
+          <p:cNvPr id="22" name="arrow-449"/>
           <p:cNvSpPr/>
           <p:nvPr/>
         </p:nvSpPr>
@@ -10577,7 +10543,7 @@
       </p:sp>
       <p:sp>
         <p:nvSpPr>
-          <p:cNvPr id="23" name="num-452"/>
+          <p:cNvPr id="23" name="num-450"/>
           <p:cNvSpPr/>
           <p:nvPr/>
         </p:nvSpPr>
@@ -10602,7 +10568,7 @@
       </p:sp>
       <p:sp>
         <p:nvSpPr>
-          <p:cNvPr id="24" name="text-453"/>
+          <p:cNvPr id="24" name="text-451"/>
           <p:cNvSpPr txBox="1"/>
           <p:nvPr/>
         </p:nvSpPr>
@@ -10638,7 +10604,7 @@
       </p:sp>
       <p:sp>
         <p:nvSpPr>
-          <p:cNvPr id="25" name="arrow-454"/>
+          <p:cNvPr id="25" name="arrow-452"/>
           <p:cNvSpPr/>
           <p:nvPr/>
         </p:nvSpPr>
@@ -10662,7 +10628,7 @@
       </p:sp>
       <p:sp>
         <p:nvSpPr>
-          <p:cNvPr id="26" name="num-455"/>
+          <p:cNvPr id="26" name="num-453"/>
           <p:cNvSpPr/>
           <p:nvPr/>
         </p:nvSpPr>
@@ -10687,7 +10653,7 @@
       </p:sp>
       <p:sp>
         <p:nvSpPr>
-          <p:cNvPr id="27" name="text-456"/>
+          <p:cNvPr id="27" name="text-454"/>
           <p:cNvSpPr txBox="1"/>
           <p:nvPr/>
         </p:nvSpPr>
@@ -10723,7 +10689,7 @@
       </p:sp>
       <p:sp>
         <p:nvSpPr>
-          <p:cNvPr id="28" name="arrow-457"/>
+          <p:cNvPr id="28" name="arrow-455"/>
           <p:cNvSpPr/>
           <p:nvPr/>
         </p:nvSpPr>
@@ -10747,14 +10713,14 @@
       </p:sp>
       <p:sp>
         <p:nvSpPr>
-          <p:cNvPr id="29" name="text-458"/>
-          <p:cNvSpPr txBox="1"/>
-          <p:nvPr/>
-        </p:nvSpPr>
-        <p:spPr>
-          <a:xfrm>
-            <a:off x="457200" y="4736592"/>
-            <a:ext cx="3931920" cy="164592"/>
+          <p:cNvPr id="29" name="text-456"/>
+          <p:cNvSpPr txBox="1"/>
+          <p:nvPr/>
+        </p:nvSpPr>
+        <p:spPr>
+          <a:xfrm>
+            <a:off x="4206240" y="4572000"/>
+            <a:ext cx="4480560" cy="201168"/>
           </a:xfrm>
           <a:prstGeom prst="rect">
             <a:avLst/>
@@ -10770,26 +10736,26 @@
               <a:buNone/>
             </a:pPr>
             <a:r>
-              <a:rPr lang="en-US" sz="800" i="1" dirty="0">
+              <a:rPr lang="en-US" sz="1000" i="1" dirty="0">
                 <a:solidFill>
                   <a:schemeClr val="tx2"/>
                 </a:solidFill>
               </a:rPr>
-              <a:t>Schemă simplificată, nu captură reală. Denumirile pot diferi în funcție de versiune și limbă.</a:t>
-            </a:r>
-            <a:endParaRPr lang="en-US" sz="800" dirty="0"/>
-          </a:p>
-        </p:txBody>
-      </p:sp>
-      <p:sp>
-        <p:nvSpPr>
-          <p:cNvPr id="30" name="num-459"/>
+              <a:t>Schemă simplificată, nu captură reală. Meniurile pot diferi.</a:t>
+            </a:r>
+            <a:endParaRPr lang="en-US" sz="1000" dirty="0"/>
+          </a:p>
+        </p:txBody>
+      </p:sp>
+      <p:sp>
+        <p:nvSpPr>
+          <p:cNvPr id="30" name="num-457"/>
           <p:cNvSpPr/>
           <p:nvPr/>
         </p:nvSpPr>
         <p:spPr>
           <a:xfrm>
-            <a:off x="3657600" y="1188720"/>
+            <a:off x="3657600" y="1161288"/>
             <a:ext cx="384048" cy="384048"/>
           </a:xfrm>
           <a:prstGeom prst="ellipse">
@@ -10808,13 +10774,13 @@
       </p:sp>
       <p:sp>
         <p:nvSpPr>
-          <p:cNvPr id="31" name="text-460"/>
-          <p:cNvSpPr txBox="1"/>
-          <p:nvPr/>
-        </p:nvSpPr>
-        <p:spPr>
-          <a:xfrm>
-            <a:off x="3657600" y="1188720"/>
+          <p:cNvPr id="31" name="text-458"/>
+          <p:cNvSpPr txBox="1"/>
+          <p:nvPr/>
+        </p:nvSpPr>
+        <p:spPr>
+          <a:xfrm>
+            <a:off x="3657600" y="1161288"/>
             <a:ext cx="384048" cy="384048"/>
           </a:xfrm>
           <a:prstGeom prst="rect">
@@ -10844,13 +10810,13 @@
       </p:sp>
       <p:sp>
         <p:nvSpPr>
-          <p:cNvPr id="32" name="text-461"/>
-          <p:cNvSpPr txBox="1"/>
-          <p:nvPr/>
-        </p:nvSpPr>
-        <p:spPr>
-          <a:xfrm>
-            <a:off x="4206240" y="1143000"/>
+          <p:cNvPr id="32" name="text-459"/>
+          <p:cNvSpPr txBox="1"/>
+          <p:nvPr/>
+        </p:nvSpPr>
+        <p:spPr>
+          <a:xfrm>
+            <a:off x="4206240" y="1115568"/>
             <a:ext cx="4480560" cy="256032"/>
           </a:xfrm>
           <a:prstGeom prst="rect">
@@ -10880,13 +10846,13 @@
       </p:sp>
       <p:sp>
         <p:nvSpPr>
-          <p:cNvPr id="33" name="text-462"/>
-          <p:cNvSpPr txBox="1"/>
-          <p:nvPr/>
-        </p:nvSpPr>
-        <p:spPr>
-          <a:xfrm>
-            <a:off x="4206240" y="1399032"/>
+          <p:cNvPr id="33" name="text-460"/>
+          <p:cNvSpPr txBox="1"/>
+          <p:nvPr/>
+        </p:nvSpPr>
+        <p:spPr>
+          <a:xfrm>
+            <a:off x="4206240" y="1371600"/>
             <a:ext cx="4480560" cy="274320"/>
           </a:xfrm>
           <a:prstGeom prst="rect">
@@ -10916,13 +10882,13 @@
       </p:sp>
       <p:sp>
         <p:nvSpPr>
-          <p:cNvPr id="34" name="num-463"/>
+          <p:cNvPr id="34" name="num-461"/>
           <p:cNvSpPr/>
           <p:nvPr/>
         </p:nvSpPr>
         <p:spPr>
           <a:xfrm>
-            <a:off x="3657600" y="1792224"/>
+            <a:off x="3657600" y="1728216"/>
             <a:ext cx="384048" cy="384048"/>
           </a:xfrm>
           <a:prstGeom prst="ellipse">
@@ -10941,13 +10907,13 @@
       </p:sp>
       <p:sp>
         <p:nvSpPr>
-          <p:cNvPr id="35" name="text-464"/>
-          <p:cNvSpPr txBox="1"/>
-          <p:nvPr/>
-        </p:nvSpPr>
-        <p:spPr>
-          <a:xfrm>
-            <a:off x="3657600" y="1792224"/>
+          <p:cNvPr id="35" name="text-462"/>
+          <p:cNvSpPr txBox="1"/>
+          <p:nvPr/>
+        </p:nvSpPr>
+        <p:spPr>
+          <a:xfrm>
+            <a:off x="3657600" y="1728216"/>
             <a:ext cx="384048" cy="384048"/>
           </a:xfrm>
           <a:prstGeom prst="rect">
@@ -10977,13 +10943,13 @@
       </p:sp>
       <p:sp>
         <p:nvSpPr>
-          <p:cNvPr id="36" name="text-465"/>
-          <p:cNvSpPr txBox="1"/>
-          <p:nvPr/>
-        </p:nvSpPr>
-        <p:spPr>
-          <a:xfrm>
-            <a:off x="4206240" y="1746504"/>
+          <p:cNvPr id="36" name="text-463"/>
+          <p:cNvSpPr txBox="1"/>
+          <p:nvPr/>
+        </p:nvSpPr>
+        <p:spPr>
+          <a:xfrm>
+            <a:off x="4206240" y="1682496"/>
             <a:ext cx="4480560" cy="256032"/>
           </a:xfrm>
           <a:prstGeom prst="rect">
@@ -11013,13 +10979,13 @@
       </p:sp>
       <p:sp>
         <p:nvSpPr>
-          <p:cNvPr id="37" name="text-466"/>
-          <p:cNvSpPr txBox="1"/>
-          <p:nvPr/>
-        </p:nvSpPr>
-        <p:spPr>
-          <a:xfrm>
-            <a:off x="4206240" y="2002536"/>
+          <p:cNvPr id="37" name="text-464"/>
+          <p:cNvSpPr txBox="1"/>
+          <p:nvPr/>
+        </p:nvSpPr>
+        <p:spPr>
+          <a:xfrm>
+            <a:off x="4206240" y="1938528"/>
             <a:ext cx="4480560" cy="274320"/>
           </a:xfrm>
           <a:prstGeom prst="rect">
@@ -11049,13 +11015,13 @@
       </p:sp>
       <p:sp>
         <p:nvSpPr>
-          <p:cNvPr id="38" name="num-467"/>
+          <p:cNvPr id="38" name="num-465"/>
           <p:cNvSpPr/>
           <p:nvPr/>
         </p:nvSpPr>
         <p:spPr>
           <a:xfrm>
-            <a:off x="3657600" y="2395728"/>
+            <a:off x="3657600" y="2295144"/>
             <a:ext cx="384048" cy="384048"/>
           </a:xfrm>
           <a:prstGeom prst="ellipse">
@@ -11074,13 +11040,13 @@
       </p:sp>
       <p:sp>
         <p:nvSpPr>
-          <p:cNvPr id="39" name="text-468"/>
-          <p:cNvSpPr txBox="1"/>
-          <p:nvPr/>
-        </p:nvSpPr>
-        <p:spPr>
-          <a:xfrm>
-            <a:off x="3657600" y="2395728"/>
+          <p:cNvPr id="39" name="text-466"/>
+          <p:cNvSpPr txBox="1"/>
+          <p:nvPr/>
+        </p:nvSpPr>
+        <p:spPr>
+          <a:xfrm>
+            <a:off x="3657600" y="2295144"/>
             <a:ext cx="384048" cy="384048"/>
           </a:xfrm>
           <a:prstGeom prst="rect">
@@ -11110,13 +11076,13 @@
       </p:sp>
       <p:sp>
         <p:nvSpPr>
-          <p:cNvPr id="40" name="text-469"/>
-          <p:cNvSpPr txBox="1"/>
-          <p:nvPr/>
-        </p:nvSpPr>
-        <p:spPr>
-          <a:xfrm>
-            <a:off x="4206240" y="2350008"/>
+          <p:cNvPr id="40" name="text-467"/>
+          <p:cNvSpPr txBox="1"/>
+          <p:nvPr/>
+        </p:nvSpPr>
+        <p:spPr>
+          <a:xfrm>
+            <a:off x="4206240" y="2249424"/>
             <a:ext cx="4480560" cy="256032"/>
           </a:xfrm>
           <a:prstGeom prst="rect">
@@ -11146,13 +11112,13 @@
       </p:sp>
       <p:sp>
         <p:nvSpPr>
-          <p:cNvPr id="41" name="text-470"/>
-          <p:cNvSpPr txBox="1"/>
-          <p:nvPr/>
-        </p:nvSpPr>
-        <p:spPr>
-          <a:xfrm>
-            <a:off x="4206240" y="2606040"/>
+          <p:cNvPr id="41" name="text-468"/>
+          <p:cNvSpPr txBox="1"/>
+          <p:nvPr/>
+        </p:nvSpPr>
+        <p:spPr>
+          <a:xfrm>
+            <a:off x="4206240" y="2505456"/>
             <a:ext cx="4480560" cy="274320"/>
           </a:xfrm>
           <a:prstGeom prst="rect">
@@ -11182,13 +11148,13 @@
       </p:sp>
       <p:sp>
         <p:nvSpPr>
-          <p:cNvPr id="42" name="num-471"/>
+          <p:cNvPr id="42" name="num-469"/>
           <p:cNvSpPr/>
           <p:nvPr/>
         </p:nvSpPr>
         <p:spPr>
           <a:xfrm>
-            <a:off x="3657600" y="2999232"/>
+            <a:off x="3657600" y="2862072"/>
             <a:ext cx="384048" cy="384048"/>
           </a:xfrm>
           <a:prstGeom prst="ellipse">
@@ -11207,13 +11173,13 @@
       </p:sp>
       <p:sp>
         <p:nvSpPr>
-          <p:cNvPr id="43" name="text-472"/>
-          <p:cNvSpPr txBox="1"/>
-          <p:nvPr/>
-        </p:nvSpPr>
-        <p:spPr>
-          <a:xfrm>
-            <a:off x="3657600" y="2999232"/>
+          <p:cNvPr id="43" name="text-470"/>
+          <p:cNvSpPr txBox="1"/>
+          <p:nvPr/>
+        </p:nvSpPr>
+        <p:spPr>
+          <a:xfrm>
+            <a:off x="3657600" y="2862072"/>
             <a:ext cx="384048" cy="384048"/>
           </a:xfrm>
           <a:prstGeom prst="rect">
@@ -11243,13 +11209,13 @@
       </p:sp>
       <p:sp>
         <p:nvSpPr>
-          <p:cNvPr id="44" name="text-473"/>
-          <p:cNvSpPr txBox="1"/>
-          <p:nvPr/>
-        </p:nvSpPr>
-        <p:spPr>
-          <a:xfrm>
-            <a:off x="4206240" y="2953512"/>
+          <p:cNvPr id="44" name="text-471"/>
+          <p:cNvSpPr txBox="1"/>
+          <p:nvPr/>
+        </p:nvSpPr>
+        <p:spPr>
+          <a:xfrm>
+            <a:off x="4206240" y="2816352"/>
             <a:ext cx="4480560" cy="256032"/>
           </a:xfrm>
           <a:prstGeom prst="rect">
@@ -11279,13 +11245,13 @@
       </p:sp>
       <p:sp>
         <p:nvSpPr>
-          <p:cNvPr id="45" name="text-474"/>
-          <p:cNvSpPr txBox="1"/>
-          <p:nvPr/>
-        </p:nvSpPr>
-        <p:spPr>
-          <a:xfrm>
-            <a:off x="4206240" y="3209544"/>
+          <p:cNvPr id="45" name="text-472"/>
+          <p:cNvSpPr txBox="1"/>
+          <p:nvPr/>
+        </p:nvSpPr>
+        <p:spPr>
+          <a:xfrm>
+            <a:off x="4206240" y="3072384"/>
             <a:ext cx="4480560" cy="274320"/>
           </a:xfrm>
           <a:prstGeom prst="rect">
@@ -11315,13 +11281,13 @@
       </p:sp>
       <p:sp>
         <p:nvSpPr>
-          <p:cNvPr id="46" name="num-475"/>
+          <p:cNvPr id="46" name="num-473"/>
           <p:cNvSpPr/>
           <p:nvPr/>
         </p:nvSpPr>
         <p:spPr>
           <a:xfrm>
-            <a:off x="3657600" y="3602736"/>
+            <a:off x="3657600" y="3429000"/>
             <a:ext cx="384048" cy="384048"/>
           </a:xfrm>
           <a:prstGeom prst="ellipse">
@@ -11340,13 +11306,13 @@
       </p:sp>
       <p:sp>
         <p:nvSpPr>
-          <p:cNvPr id="47" name="text-476"/>
-          <p:cNvSpPr txBox="1"/>
-          <p:nvPr/>
-        </p:nvSpPr>
-        <p:spPr>
-          <a:xfrm>
-            <a:off x="3657600" y="3602736"/>
+          <p:cNvPr id="47" name="text-474"/>
+          <p:cNvSpPr txBox="1"/>
+          <p:nvPr/>
+        </p:nvSpPr>
+        <p:spPr>
+          <a:xfrm>
+            <a:off x="3657600" y="3429000"/>
             <a:ext cx="384048" cy="384048"/>
           </a:xfrm>
           <a:prstGeom prst="rect">
@@ -11376,13 +11342,13 @@
       </p:sp>
       <p:sp>
         <p:nvSpPr>
-          <p:cNvPr id="48" name="text-477"/>
-          <p:cNvSpPr txBox="1"/>
-          <p:nvPr/>
-        </p:nvSpPr>
-        <p:spPr>
-          <a:xfrm>
-            <a:off x="4206240" y="3557016"/>
+          <p:cNvPr id="48" name="text-475"/>
+          <p:cNvSpPr txBox="1"/>
+          <p:nvPr/>
+        </p:nvSpPr>
+        <p:spPr>
+          <a:xfrm>
+            <a:off x="4206240" y="3383280"/>
             <a:ext cx="4480560" cy="256032"/>
           </a:xfrm>
           <a:prstGeom prst="rect">
@@ -11412,13 +11378,13 @@
       </p:sp>
       <p:sp>
         <p:nvSpPr>
-          <p:cNvPr id="49" name="text-478"/>
-          <p:cNvSpPr txBox="1"/>
-          <p:nvPr/>
-        </p:nvSpPr>
-        <p:spPr>
-          <a:xfrm>
-            <a:off x="4206240" y="3813048"/>
+          <p:cNvPr id="49" name="text-476"/>
+          <p:cNvSpPr txBox="1"/>
+          <p:nvPr/>
+        </p:nvSpPr>
+        <p:spPr>
+          <a:xfrm>
+            <a:off x="4206240" y="3639312"/>
             <a:ext cx="4480560" cy="274320"/>
           </a:xfrm>
           <a:prstGeom prst="rect">
@@ -11448,13 +11414,13 @@
       </p:sp>
       <p:sp>
         <p:nvSpPr>
-          <p:cNvPr id="50" name="num-479"/>
+          <p:cNvPr id="50" name="num-477"/>
           <p:cNvSpPr/>
           <p:nvPr/>
         </p:nvSpPr>
         <p:spPr>
           <a:xfrm>
-            <a:off x="3657600" y="4206240"/>
+            <a:off x="3657600" y="3995928"/>
             <a:ext cx="384048" cy="384048"/>
           </a:xfrm>
           <a:prstGeom prst="ellipse">
@@ -11473,13 +11439,13 @@
       </p:sp>
       <p:sp>
         <p:nvSpPr>
-          <p:cNvPr id="51" name="text-480"/>
-          <p:cNvSpPr txBox="1"/>
-          <p:nvPr/>
-        </p:nvSpPr>
-        <p:spPr>
-          <a:xfrm>
-            <a:off x="3657600" y="4206240"/>
+          <p:cNvPr id="51" name="text-478"/>
+          <p:cNvSpPr txBox="1"/>
+          <p:nvPr/>
+        </p:nvSpPr>
+        <p:spPr>
+          <a:xfrm>
+            <a:off x="3657600" y="3995928"/>
             <a:ext cx="384048" cy="384048"/>
           </a:xfrm>
           <a:prstGeom prst="rect">
@@ -11509,13 +11475,13 @@
       </p:sp>
       <p:sp>
         <p:nvSpPr>
-          <p:cNvPr id="52" name="text-481"/>
-          <p:cNvSpPr txBox="1"/>
-          <p:nvPr/>
-        </p:nvSpPr>
-        <p:spPr>
-          <a:xfrm>
-            <a:off x="4206240" y="4160520"/>
+          <p:cNvPr id="52" name="text-479"/>
+          <p:cNvSpPr txBox="1"/>
+          <p:nvPr/>
+        </p:nvSpPr>
+        <p:spPr>
+          <a:xfrm>
+            <a:off x="4206240" y="3950208"/>
             <a:ext cx="4480560" cy="256032"/>
           </a:xfrm>
           <a:prstGeom prst="rect">
@@ -11545,13 +11511,13 @@
       </p:sp>
       <p:sp>
         <p:nvSpPr>
-          <p:cNvPr id="53" name="text-482"/>
-          <p:cNvSpPr txBox="1"/>
-          <p:nvPr/>
-        </p:nvSpPr>
-        <p:spPr>
-          <a:xfrm>
-            <a:off x="4206240" y="4416552"/>
+          <p:cNvPr id="53" name="text-480"/>
+          <p:cNvSpPr txBox="1"/>
+          <p:nvPr/>
+        </p:nvSpPr>
+        <p:spPr>
+          <a:xfrm>
+            <a:off x="4206240" y="4206240"/>
             <a:ext cx="4480560" cy="274320"/>
           </a:xfrm>
           <a:prstGeom prst="rect">
@@ -11607,7 +11573,7 @@
           <a:bodyPr lIns="0" tIns="0" rIns="0" bIns="0"/>
           <a:lstStyle>
             <a:lvl1pPr>
-              <a:defRPr sz="800">
+              <a:defRPr sz="900">
                 <a:solidFill>
                   <a:schemeClr val="tx2"/>
                 </a:solidFill>
@@ -11680,9 +11646,9 @@
                 <a:solidFill>
                   <a:schemeClr val="accent2"/>
                 </a:solidFill>
-                <a:latin typeface="Calibri" pitchFamily="34" charset="0"/>
-                <a:ea typeface="Calibri" pitchFamily="34" charset="-122"/>
-                <a:cs typeface="Calibri" pitchFamily="34" charset="-120"/>
+                <a:latin typeface="Arial" pitchFamily="34" charset="0"/>
+                <a:ea typeface="Arial" pitchFamily="34" charset="-122"/>
+                <a:cs typeface="Arial" pitchFamily="34" charset="-120"/>
               </a:rPr>
               <a:t>PARTEA V · EDITARE VIDEO CU CAPCUT</a:t>
             </a:r>
@@ -11721,9 +11687,9 @@
                 <a:solidFill>
                   <a:schemeClr val="tx1"/>
                 </a:solidFill>
-                <a:latin typeface="Cambria" pitchFamily="34" charset="0"/>
-                <a:ea typeface="Cambria" pitchFamily="34" charset="-122"/>
-                <a:cs typeface="Cambria" pitchFamily="34" charset="-120"/>
+                <a:latin typeface="Georgia" pitchFamily="34" charset="0"/>
+                <a:ea typeface="Georgia" pitchFamily="34" charset="-122"/>
+                <a:cs typeface="Georgia" pitchFamily="34" charset="-120"/>
               </a:rPr>
               <a:t>CapCut, pas cu pas: text, voce, export</a:t>
             </a:r>
@@ -11733,16 +11699,14 @@
       </p:sp>
       <p:pic>
         <p:nvPicPr>
-          <p:cNvPr id="4" name="watermark-483" descr="preencoded.png">    </p:cNvPr>
+          <p:cNvPr id="4" name="watermark-481" descr="preencoded.png">    </p:cNvPr>
           <p:cNvPicPr>
             <a:picLocks noChangeAspect="1"/>
           </p:cNvPicPr>
           <p:nvPr/>
         </p:nvPicPr>
         <p:blipFill>
-          <a:blip r:embed="rId1">
-            <a:alphaModFix amt="5000"/>
-          </a:blip>
+          <a:blip r:embed="rId1"/>
           <a:stretch>
             <a:fillRect/>
           </a:stretch>
@@ -11759,7 +11723,7 @@
       </p:pic>
       <p:sp>
         <p:nvSpPr>
-          <p:cNvPr id="5" name="card-484"/>
+          <p:cNvPr id="5" name="card-482"/>
           <p:cNvSpPr/>
           <p:nvPr/>
         </p:nvSpPr>
@@ -11786,7 +11750,7 @@
       </p:sp>
       <p:sp>
         <p:nvSpPr>
-          <p:cNvPr id="6" name="num-485"/>
+          <p:cNvPr id="6" name="num-483"/>
           <p:cNvSpPr/>
           <p:nvPr/>
         </p:nvSpPr>
@@ -11811,7 +11775,7 @@
       </p:sp>
       <p:sp>
         <p:nvSpPr>
-          <p:cNvPr id="7" name="text-486"/>
+          <p:cNvPr id="7" name="text-484"/>
           <p:cNvSpPr txBox="1"/>
           <p:nvPr/>
         </p:nvSpPr>
@@ -11847,7 +11811,7 @@
       </p:sp>
       <p:pic>
         <p:nvPicPr>
-          <p:cNvPr id="8" name="ui-487" descr="preencoded.png">    </p:cNvPr>
+          <p:cNvPr id="8" name="ui-485" descr="preencoded.png">    </p:cNvPr>
           <p:cNvPicPr>
             <a:picLocks noChangeAspect="1"/>
           </p:cNvPicPr>
@@ -11871,7 +11835,7 @@
       </p:pic>
       <p:sp>
         <p:nvSpPr>
-          <p:cNvPr id="9" name="text-488"/>
+          <p:cNvPr id="9" name="text-486"/>
           <p:cNvSpPr txBox="1"/>
           <p:nvPr/>
         </p:nvSpPr>
@@ -11907,7 +11871,7 @@
       </p:sp>
       <p:sp>
         <p:nvSpPr>
-          <p:cNvPr id="10" name="text-489"/>
+          <p:cNvPr id="10" name="text-487"/>
           <p:cNvSpPr txBox="1"/>
           <p:nvPr/>
         </p:nvSpPr>
@@ -11943,7 +11907,7 @@
       </p:sp>
       <p:sp>
         <p:nvSpPr>
-          <p:cNvPr id="11" name="card-490"/>
+          <p:cNvPr id="11" name="card-488"/>
           <p:cNvSpPr/>
           <p:nvPr/>
         </p:nvSpPr>
@@ -11970,7 +11934,7 @@
       </p:sp>
       <p:sp>
         <p:nvSpPr>
-          <p:cNvPr id="12" name="num-491"/>
+          <p:cNvPr id="12" name="num-489"/>
           <p:cNvSpPr/>
           <p:nvPr/>
         </p:nvSpPr>
@@ -11995,7 +11959,7 @@
       </p:sp>
       <p:sp>
         <p:nvSpPr>
-          <p:cNvPr id="13" name="text-492"/>
+          <p:cNvPr id="13" name="text-490"/>
           <p:cNvSpPr txBox="1"/>
           <p:nvPr/>
         </p:nvSpPr>
@@ -12031,7 +11995,7 @@
       </p:sp>
       <p:pic>
         <p:nvPicPr>
-          <p:cNvPr id="14" name="ui-493" descr="preencoded.png">    </p:cNvPr>
+          <p:cNvPr id="14" name="ui-491" descr="preencoded.png">    </p:cNvPr>
           <p:cNvPicPr>
             <a:picLocks noChangeAspect="1"/>
           </p:cNvPicPr>
@@ -12055,7 +12019,7 @@
       </p:pic>
       <p:sp>
         <p:nvSpPr>
-          <p:cNvPr id="15" name="text-494"/>
+          <p:cNvPr id="15" name="text-492"/>
           <p:cNvSpPr txBox="1"/>
           <p:nvPr/>
         </p:nvSpPr>
@@ -12091,7 +12055,7 @@
       </p:sp>
       <p:sp>
         <p:nvSpPr>
-          <p:cNvPr id="16" name="text-495"/>
+          <p:cNvPr id="16" name="text-493"/>
           <p:cNvSpPr txBox="1"/>
           <p:nvPr/>
         </p:nvSpPr>
@@ -12127,7 +12091,7 @@
       </p:sp>
       <p:sp>
         <p:nvSpPr>
-          <p:cNvPr id="17" name="card-496"/>
+          <p:cNvPr id="17" name="card-494"/>
           <p:cNvSpPr/>
           <p:nvPr/>
         </p:nvSpPr>
@@ -12154,7 +12118,7 @@
       </p:sp>
       <p:sp>
         <p:nvSpPr>
-          <p:cNvPr id="18" name="num-497"/>
+          <p:cNvPr id="18" name="num-495"/>
           <p:cNvSpPr/>
           <p:nvPr/>
         </p:nvSpPr>
@@ -12179,7 +12143,7 @@
       </p:sp>
       <p:sp>
         <p:nvSpPr>
-          <p:cNvPr id="19" name="text-498"/>
+          <p:cNvPr id="19" name="text-496"/>
           <p:cNvSpPr txBox="1"/>
           <p:nvPr/>
         </p:nvSpPr>
@@ -12215,7 +12179,7 @@
       </p:sp>
       <p:pic>
         <p:nvPicPr>
-          <p:cNvPr id="20" name="ui-499" descr="preencoded.png">    </p:cNvPr>
+          <p:cNvPr id="20" name="ui-497" descr="preencoded.png">    </p:cNvPr>
           <p:cNvPicPr>
             <a:picLocks noChangeAspect="1"/>
           </p:cNvPicPr>
@@ -12239,7 +12203,7 @@
       </p:pic>
       <p:sp>
         <p:nvSpPr>
-          <p:cNvPr id="21" name="text-500"/>
+          <p:cNvPr id="21" name="text-498"/>
           <p:cNvSpPr txBox="1"/>
           <p:nvPr/>
         </p:nvSpPr>
@@ -12275,7 +12239,7 @@
       </p:sp>
       <p:sp>
         <p:nvSpPr>
-          <p:cNvPr id="22" name="text-501"/>
+          <p:cNvPr id="22" name="text-499"/>
           <p:cNvSpPr txBox="1"/>
           <p:nvPr/>
         </p:nvSpPr>
@@ -12311,7 +12275,7 @@
       </p:sp>
       <p:sp>
         <p:nvSpPr>
-          <p:cNvPr id="23" name="card-502"/>
+          <p:cNvPr id="23" name="card-500"/>
           <p:cNvSpPr/>
           <p:nvPr/>
         </p:nvSpPr>
@@ -12338,7 +12302,7 @@
       </p:sp>
       <p:sp>
         <p:nvSpPr>
-          <p:cNvPr id="24" name="num-503"/>
+          <p:cNvPr id="24" name="num-501"/>
           <p:cNvSpPr/>
           <p:nvPr/>
         </p:nvSpPr>
@@ -12363,7 +12327,7 @@
       </p:sp>
       <p:sp>
         <p:nvSpPr>
-          <p:cNvPr id="25" name="text-504"/>
+          <p:cNvPr id="25" name="text-502"/>
           <p:cNvSpPr txBox="1"/>
           <p:nvPr/>
         </p:nvSpPr>
@@ -12399,7 +12363,7 @@
       </p:sp>
       <p:pic>
         <p:nvPicPr>
-          <p:cNvPr id="26" name="ui-505" descr="preencoded.png">    </p:cNvPr>
+          <p:cNvPr id="26" name="ui-503" descr="preencoded.png">    </p:cNvPr>
           <p:cNvPicPr>
             <a:picLocks noChangeAspect="1"/>
           </p:cNvPicPr>
@@ -12423,7 +12387,7 @@
       </p:pic>
       <p:sp>
         <p:nvSpPr>
-          <p:cNvPr id="27" name="text-506"/>
+          <p:cNvPr id="27" name="text-504"/>
           <p:cNvSpPr txBox="1"/>
           <p:nvPr/>
         </p:nvSpPr>
@@ -12459,7 +12423,7 @@
       </p:sp>
       <p:sp>
         <p:nvSpPr>
-          <p:cNvPr id="28" name="text-507"/>
+          <p:cNvPr id="28" name="text-505"/>
           <p:cNvSpPr txBox="1"/>
           <p:nvPr/>
         </p:nvSpPr>
@@ -12495,7 +12459,7 @@
       </p:sp>
       <p:sp>
         <p:nvSpPr>
-          <p:cNvPr id="29" name="card-508"/>
+          <p:cNvPr id="29" name="card-506"/>
           <p:cNvSpPr/>
           <p:nvPr/>
         </p:nvSpPr>
@@ -12522,7 +12486,7 @@
       </p:sp>
       <p:sp>
         <p:nvSpPr>
-          <p:cNvPr id="30" name="num-509"/>
+          <p:cNvPr id="30" name="num-507"/>
           <p:cNvSpPr/>
           <p:nvPr/>
         </p:nvSpPr>
@@ -12547,7 +12511,7 @@
       </p:sp>
       <p:sp>
         <p:nvSpPr>
-          <p:cNvPr id="31" name="text-510"/>
+          <p:cNvPr id="31" name="text-508"/>
           <p:cNvSpPr txBox="1"/>
           <p:nvPr/>
         </p:nvSpPr>
@@ -12583,7 +12547,7 @@
       </p:sp>
       <p:pic>
         <p:nvPicPr>
-          <p:cNvPr id="32" name="ui-511" descr="preencoded.png">    </p:cNvPr>
+          <p:cNvPr id="32" name="ui-509" descr="preencoded.png">    </p:cNvPr>
           <p:cNvPicPr>
             <a:picLocks noChangeAspect="1"/>
           </p:cNvPicPr>
@@ -12607,7 +12571,7 @@
       </p:pic>
       <p:sp>
         <p:nvSpPr>
-          <p:cNvPr id="33" name="text-512"/>
+          <p:cNvPr id="33" name="text-510"/>
           <p:cNvSpPr txBox="1"/>
           <p:nvPr/>
         </p:nvSpPr>
@@ -12643,7 +12607,7 @@
       </p:sp>
       <p:sp>
         <p:nvSpPr>
-          <p:cNvPr id="34" name="text-513"/>
+          <p:cNvPr id="34" name="text-511"/>
           <p:cNvSpPr txBox="1"/>
           <p:nvPr/>
         </p:nvSpPr>
@@ -12679,7 +12643,7 @@
       </p:sp>
       <p:sp>
         <p:nvSpPr>
-          <p:cNvPr id="35" name="card-514"/>
+          <p:cNvPr id="35" name="card-512"/>
           <p:cNvSpPr/>
           <p:nvPr/>
         </p:nvSpPr>
@@ -12706,7 +12670,7 @@
       </p:sp>
       <p:sp>
         <p:nvSpPr>
-          <p:cNvPr id="36" name="num-515"/>
+          <p:cNvPr id="36" name="num-513"/>
           <p:cNvSpPr/>
           <p:nvPr/>
         </p:nvSpPr>
@@ -12731,7 +12695,7 @@
       </p:sp>
       <p:sp>
         <p:nvSpPr>
-          <p:cNvPr id="37" name="text-516"/>
+          <p:cNvPr id="37" name="text-514"/>
           <p:cNvSpPr txBox="1"/>
           <p:nvPr/>
         </p:nvSpPr>
@@ -12767,7 +12731,7 @@
       </p:sp>
       <p:pic>
         <p:nvPicPr>
-          <p:cNvPr id="38" name="ui-517" descr="preencoded.png">    </p:cNvPr>
+          <p:cNvPr id="38" name="ui-515" descr="preencoded.png">    </p:cNvPr>
           <p:cNvPicPr>
             <a:picLocks noChangeAspect="1"/>
           </p:cNvPicPr>
@@ -12791,7 +12755,7 @@
       </p:pic>
       <p:sp>
         <p:nvSpPr>
-          <p:cNvPr id="39" name="text-518"/>
+          <p:cNvPr id="39" name="text-516"/>
           <p:cNvSpPr txBox="1"/>
           <p:nvPr/>
         </p:nvSpPr>
@@ -12827,7 +12791,7 @@
       </p:sp>
       <p:sp>
         <p:nvSpPr>
-          <p:cNvPr id="40" name="text-519"/>
+          <p:cNvPr id="40" name="text-517"/>
           <p:cNvSpPr txBox="1"/>
           <p:nvPr/>
         </p:nvSpPr>
@@ -12889,7 +12853,7 @@
           <a:bodyPr lIns="0" tIns="0" rIns="0" bIns="0"/>
           <a:lstStyle>
             <a:lvl1pPr>
-              <a:defRPr sz="800">
+              <a:defRPr sz="900">
                 <a:solidFill>
                   <a:schemeClr val="tx2"/>
                 </a:solidFill>
@@ -12962,9 +12926,9 @@
                 <a:solidFill>
                   <a:schemeClr val="accent2"/>
                 </a:solidFill>
-                <a:latin typeface="Calibri" pitchFamily="34" charset="0"/>
-                <a:ea typeface="Calibri" pitchFamily="34" charset="-122"/>
-                <a:cs typeface="Calibri" pitchFamily="34" charset="-120"/>
+                <a:latin typeface="Arial" pitchFamily="34" charset="0"/>
+                <a:ea typeface="Arial" pitchFamily="34" charset="-122"/>
+                <a:cs typeface="Arial" pitchFamily="34" charset="-120"/>
               </a:rPr>
               <a:t>PARTEA V · EDITARE VIDEO CU CAPCUT</a:t>
             </a:r>
@@ -13003,9 +12967,9 @@
                 <a:solidFill>
                   <a:schemeClr val="tx1"/>
                 </a:solidFill>
-                <a:latin typeface="Cambria" pitchFamily="34" charset="0"/>
-                <a:ea typeface="Cambria" pitchFamily="34" charset="-122"/>
-                <a:cs typeface="Cambria" pitchFamily="34" charset="-120"/>
+                <a:latin typeface="Georgia" pitchFamily="34" charset="0"/>
+                <a:ea typeface="Georgia" pitchFamily="34" charset="-122"/>
+                <a:cs typeface="Georgia" pitchFamily="34" charset="-120"/>
               </a:rPr>
               <a:t>CapCut gratuit sau CapCut Pro?</a:t>
             </a:r>
@@ -13015,16 +12979,14 @@
       </p:sp>
       <p:pic>
         <p:nvPicPr>
-          <p:cNvPr id="4" name="watermark-520" descr="preencoded.png">    </p:cNvPr>
+          <p:cNvPr id="4" name="watermark-518" descr="preencoded.png">    </p:cNvPr>
           <p:cNvPicPr>
             <a:picLocks noChangeAspect="1"/>
           </p:cNvPicPr>
           <p:nvPr/>
         </p:nvPicPr>
         <p:blipFill>
-          <a:blip r:embed="rId1">
-            <a:alphaModFix amt="5000"/>
-          </a:blip>
+          <a:blip r:embed="rId1"/>
           <a:stretch>
             <a:fillRect/>
           </a:stretch>
@@ -13041,7 +13003,7 @@
       </p:pic>
       <p:graphicFrame>
         <p:nvGraphicFramePr>
-          <p:cNvPr id="19" name="table-521"/>
+          <p:cNvPr id="19" name="table-519"/>
           <p:cNvGraphicFramePr>
             <a:graphicFrameLocks noGrp="1"/>
           </p:cNvGraphicFramePr>
@@ -14367,7 +14329,7 @@
       </p:graphicFrame>
       <p:sp>
         <p:nvSpPr>
-          <p:cNvPr id="6" name="card-522"/>
+          <p:cNvPr id="6" name="card-520"/>
           <p:cNvSpPr/>
           <p:nvPr/>
         </p:nvSpPr>
@@ -14394,7 +14356,7 @@
       </p:sp>
       <p:sp>
         <p:nvSpPr>
-          <p:cNvPr id="7" name="badge-523"/>
+          <p:cNvPr id="7" name="badge-521"/>
           <p:cNvSpPr/>
           <p:nvPr/>
         </p:nvSpPr>
@@ -14419,7 +14381,7 @@
       </p:sp>
       <p:pic>
         <p:nvPicPr>
-          <p:cNvPr id="8" name="icon-524" descr="preencoded.png">    </p:cNvPr>
+          <p:cNvPr id="8" name="icon-522" descr="preencoded.png">    </p:cNvPr>
           <p:cNvPicPr>
             <a:picLocks noChangeAspect="1"/>
           </p:cNvPicPr>
@@ -14443,7 +14405,7 @@
       </p:pic>
       <p:sp>
         <p:nvSpPr>
-          <p:cNvPr id="9" name="text-525"/>
+          <p:cNvPr id="9" name="text-523"/>
           <p:cNvSpPr txBox="1"/>
           <p:nvPr/>
         </p:nvSpPr>
@@ -14470,9 +14432,9 @@
                 <a:solidFill>
                   <a:schemeClr val="accent3"/>
                 </a:solidFill>
-                <a:latin typeface="Cambria" pitchFamily="34" charset="0"/>
-                <a:ea typeface="Cambria" pitchFamily="34" charset="-122"/>
-                <a:cs typeface="Cambria" pitchFamily="34" charset="-120"/>
+                <a:latin typeface="Georgia" pitchFamily="34" charset="0"/>
+                <a:ea typeface="Georgia" pitchFamily="34" charset="-122"/>
+                <a:cs typeface="Georgia" pitchFamily="34" charset="-120"/>
               </a:rPr>
               <a:t>Ai nevoie de Pro?</a:t>
             </a:r>
@@ -14482,7 +14444,7 @@
       </p:sp>
       <p:sp>
         <p:nvSpPr>
-          <p:cNvPr id="10" name="text-526"/>
+          <p:cNvPr id="10" name="text-524"/>
           <p:cNvSpPr txBox="1"/>
           <p:nvPr/>
         </p:nvSpPr>
@@ -14518,7 +14480,7 @@
       </p:sp>
       <p:sp>
         <p:nvSpPr>
-          <p:cNvPr id="11" name="text-527"/>
+          <p:cNvPr id="11" name="text-525"/>
           <p:cNvSpPr txBox="1"/>
           <p:nvPr/>
         </p:nvSpPr>
@@ -14554,7 +14516,7 @@
       </p:sp>
       <p:sp>
         <p:nvSpPr>
-          <p:cNvPr id="12" name="text-528"/>
+          <p:cNvPr id="12" name="text-526"/>
           <p:cNvSpPr txBox="1"/>
           <p:nvPr/>
         </p:nvSpPr>
@@ -14582,7 +14544,7 @@
                   <a:schemeClr val="tx2"/>
                 </a:solidFill>
               </a:rPr>
-              <a:t>Funcțiile și prețurile variază după versiune, dispozitiv și țară. Verifică în aplicație (pictograma Pro/diamant).</a:t>
+              <a:t>Funcțiile și prețurile diferă în funcție de versiune, dispozitiv și țară. Verifică în aplicație (pictograma Pro / diamant).</a:t>
             </a:r>
             <a:endParaRPr lang="en-US" sz="1100" dirty="0"/>
           </a:p>
@@ -14616,7 +14578,7 @@
           <a:bodyPr lIns="0" tIns="0" rIns="0" bIns="0"/>
           <a:lstStyle>
             <a:lvl1pPr>
-              <a:defRPr sz="800">
+              <a:defRPr sz="900">
                 <a:solidFill>
                   <a:schemeClr val="tx2"/>
                 </a:solidFill>
@@ -14689,9 +14651,9 @@
                 <a:solidFill>
                   <a:schemeClr val="accent2"/>
                 </a:solidFill>
-                <a:latin typeface="Calibri" pitchFamily="34" charset="0"/>
-                <a:ea typeface="Calibri" pitchFamily="34" charset="-122"/>
-                <a:cs typeface="Calibri" pitchFamily="34" charset="-120"/>
+                <a:latin typeface="Arial" pitchFamily="34" charset="0"/>
+                <a:ea typeface="Arial" pitchFamily="34" charset="-122"/>
+                <a:cs typeface="Arial" pitchFamily="34" charset="-120"/>
               </a:rPr>
               <a:t>PARTEA V · EDITARE VIDEO CU CAPCUT</a:t>
             </a:r>
@@ -14730,9 +14692,9 @@
                 <a:solidFill>
                   <a:schemeClr val="tx1"/>
                 </a:solidFill>
-                <a:latin typeface="Cambria" pitchFamily="34" charset="0"/>
-                <a:ea typeface="Cambria" pitchFamily="34" charset="-122"/>
-                <a:cs typeface="Cambria" pitchFamily="34" charset="-120"/>
+                <a:latin typeface="Georgia" pitchFamily="34" charset="0"/>
+                <a:ea typeface="Georgia" pitchFamily="34" charset="-122"/>
+                <a:cs typeface="Georgia" pitchFamily="34" charset="-120"/>
               </a:rPr>
               <a:t>Sfaturi CapCut și tutoriale video</a:t>
             </a:r>
@@ -14742,16 +14704,14 @@
       </p:sp>
       <p:pic>
         <p:nvPicPr>
-          <p:cNvPr id="4" name="watermark-529" descr="preencoded.png">    </p:cNvPr>
+          <p:cNvPr id="4" name="watermark-527" descr="preencoded.png">    </p:cNvPr>
           <p:cNvPicPr>
             <a:picLocks noChangeAspect="1"/>
           </p:cNvPicPr>
           <p:nvPr/>
         </p:nvPicPr>
         <p:blipFill>
-          <a:blip r:embed="rId1">
-            <a:alphaModFix amt="5000"/>
-          </a:blip>
+          <a:blip r:embed="rId1"/>
           <a:stretch>
             <a:fillRect/>
           </a:stretch>
@@ -14768,7 +14728,7 @@
       </p:pic>
       <p:sp>
         <p:nvSpPr>
-          <p:cNvPr id="5" name="card-530"/>
+          <p:cNvPr id="5" name="card-528"/>
           <p:cNvSpPr/>
           <p:nvPr/>
         </p:nvSpPr>
@@ -14795,7 +14755,7 @@
       </p:sp>
       <p:sp>
         <p:nvSpPr>
-          <p:cNvPr id="6" name="num-531"/>
+          <p:cNvPr id="6" name="num-529"/>
           <p:cNvSpPr/>
           <p:nvPr/>
         </p:nvSpPr>
@@ -14820,7 +14780,7 @@
       </p:sp>
       <p:sp>
         <p:nvSpPr>
-          <p:cNvPr id="7" name="text-532"/>
+          <p:cNvPr id="7" name="text-530"/>
           <p:cNvSpPr txBox="1"/>
           <p:nvPr/>
         </p:nvSpPr>
@@ -14856,7 +14816,7 @@
       </p:sp>
       <p:sp>
         <p:nvSpPr>
-          <p:cNvPr id="8" name="text-533"/>
+          <p:cNvPr id="8" name="text-531"/>
           <p:cNvSpPr txBox="1"/>
           <p:nvPr/>
         </p:nvSpPr>
@@ -14884,7 +14844,7 @@
                   <a:schemeClr val="tx1"/>
                 </a:solidFill>
               </a:rPr>
-              <a:t>Filmează direct vertical</a:t>
+              <a:t>Filmează vertical</a:t>
             </a:r>
             <a:endParaRPr lang="en-US" sz="1300" dirty="0"/>
           </a:p>
@@ -14892,7 +14852,7 @@
       </p:sp>
       <p:sp>
         <p:nvSpPr>
-          <p:cNvPr id="9" name="text-534"/>
+          <p:cNvPr id="9" name="text-532"/>
           <p:cNvSpPr txBox="1"/>
           <p:nvPr/>
         </p:nvSpPr>
@@ -14928,7 +14888,7 @@
       </p:sp>
       <p:sp>
         <p:nvSpPr>
-          <p:cNvPr id="10" name="card-535"/>
+          <p:cNvPr id="10" name="card-533"/>
           <p:cNvSpPr/>
           <p:nvPr/>
         </p:nvSpPr>
@@ -14955,7 +14915,7 @@
       </p:sp>
       <p:sp>
         <p:nvSpPr>
-          <p:cNvPr id="11" name="num-536"/>
+          <p:cNvPr id="11" name="num-534"/>
           <p:cNvSpPr/>
           <p:nvPr/>
         </p:nvSpPr>
@@ -14980,7 +14940,7 @@
       </p:sp>
       <p:sp>
         <p:nvSpPr>
-          <p:cNvPr id="12" name="text-537"/>
+          <p:cNvPr id="12" name="text-535"/>
           <p:cNvSpPr txBox="1"/>
           <p:nvPr/>
         </p:nvSpPr>
@@ -15016,7 +14976,7 @@
       </p:sp>
       <p:sp>
         <p:nvSpPr>
-          <p:cNvPr id="13" name="text-538"/>
+          <p:cNvPr id="13" name="text-536"/>
           <p:cNvSpPr txBox="1"/>
           <p:nvPr/>
         </p:nvSpPr>
@@ -15052,7 +15012,7 @@
       </p:sp>
       <p:sp>
         <p:nvSpPr>
-          <p:cNvPr id="14" name="text-539"/>
+          <p:cNvPr id="14" name="text-537"/>
           <p:cNvSpPr txBox="1"/>
           <p:nvPr/>
         </p:nvSpPr>
@@ -15088,7 +15048,7 @@
       </p:sp>
       <p:sp>
         <p:nvSpPr>
-          <p:cNvPr id="15" name="card-540"/>
+          <p:cNvPr id="15" name="card-538"/>
           <p:cNvSpPr/>
           <p:nvPr/>
         </p:nvSpPr>
@@ -15115,7 +15075,7 @@
       </p:sp>
       <p:sp>
         <p:nvSpPr>
-          <p:cNvPr id="16" name="num-541"/>
+          <p:cNvPr id="16" name="num-539"/>
           <p:cNvSpPr/>
           <p:nvPr/>
         </p:nvSpPr>
@@ -15140,7 +15100,7 @@
       </p:sp>
       <p:sp>
         <p:nvSpPr>
-          <p:cNvPr id="17" name="text-542"/>
+          <p:cNvPr id="17" name="text-540"/>
           <p:cNvSpPr txBox="1"/>
           <p:nvPr/>
         </p:nvSpPr>
@@ -15176,7 +15136,7 @@
       </p:sp>
       <p:sp>
         <p:nvSpPr>
-          <p:cNvPr id="18" name="text-543"/>
+          <p:cNvPr id="18" name="text-541"/>
           <p:cNvSpPr txBox="1"/>
           <p:nvPr/>
         </p:nvSpPr>
@@ -15212,7 +15172,7 @@
       </p:sp>
       <p:sp>
         <p:nvSpPr>
-          <p:cNvPr id="19" name="text-544"/>
+          <p:cNvPr id="19" name="text-542"/>
           <p:cNvSpPr txBox="1"/>
           <p:nvPr/>
         </p:nvSpPr>
@@ -15248,7 +15208,7 @@
       </p:sp>
       <p:sp>
         <p:nvSpPr>
-          <p:cNvPr id="20" name="card-545"/>
+          <p:cNvPr id="20" name="card-543"/>
           <p:cNvSpPr/>
           <p:nvPr/>
         </p:nvSpPr>
@@ -15275,7 +15235,7 @@
       </p:sp>
       <p:sp>
         <p:nvSpPr>
-          <p:cNvPr id="21" name="num-546"/>
+          <p:cNvPr id="21" name="num-544"/>
           <p:cNvSpPr/>
           <p:nvPr/>
         </p:nvSpPr>
@@ -15300,7 +15260,7 @@
       </p:sp>
       <p:sp>
         <p:nvSpPr>
-          <p:cNvPr id="22" name="text-547"/>
+          <p:cNvPr id="22" name="text-545"/>
           <p:cNvSpPr txBox="1"/>
           <p:nvPr/>
         </p:nvSpPr>
@@ -15336,7 +15296,7 @@
       </p:sp>
       <p:sp>
         <p:nvSpPr>
-          <p:cNvPr id="23" name="text-548"/>
+          <p:cNvPr id="23" name="text-546"/>
           <p:cNvSpPr txBox="1"/>
           <p:nvPr/>
         </p:nvSpPr>
@@ -15372,7 +15332,7 @@
       </p:sp>
       <p:sp>
         <p:nvSpPr>
-          <p:cNvPr id="24" name="text-549"/>
+          <p:cNvPr id="24" name="text-547"/>
           <p:cNvSpPr txBox="1"/>
           <p:nvPr/>
         </p:nvSpPr>
@@ -15408,7 +15368,7 @@
       </p:sp>
       <p:sp>
         <p:nvSpPr>
-          <p:cNvPr id="25" name="card-550"/>
+          <p:cNvPr id="25" name="card-548"/>
           <p:cNvSpPr/>
           <p:nvPr/>
         </p:nvSpPr>
@@ -15435,7 +15395,7 @@
       </p:sp>
       <p:sp>
         <p:nvSpPr>
-          <p:cNvPr id="26" name="num-551"/>
+          <p:cNvPr id="26" name="num-549"/>
           <p:cNvSpPr/>
           <p:nvPr/>
         </p:nvSpPr>
@@ -15460,7 +15420,7 @@
       </p:sp>
       <p:sp>
         <p:nvSpPr>
-          <p:cNvPr id="27" name="text-552"/>
+          <p:cNvPr id="27" name="text-550"/>
           <p:cNvSpPr txBox="1"/>
           <p:nvPr/>
         </p:nvSpPr>
@@ -15496,7 +15456,7 @@
       </p:sp>
       <p:sp>
         <p:nvSpPr>
-          <p:cNvPr id="28" name="text-553"/>
+          <p:cNvPr id="28" name="text-551"/>
           <p:cNvSpPr txBox="1"/>
           <p:nvPr/>
         </p:nvSpPr>
@@ -15532,7 +15492,7 @@
       </p:sp>
       <p:sp>
         <p:nvSpPr>
-          <p:cNvPr id="29" name="text-554"/>
+          <p:cNvPr id="29" name="text-552"/>
           <p:cNvSpPr txBox="1"/>
           <p:nvPr/>
         </p:nvSpPr>
@@ -15568,7 +15528,7 @@
       </p:sp>
       <p:sp>
         <p:nvSpPr>
-          <p:cNvPr id="30" name="card-555"/>
+          <p:cNvPr id="30" name="card-553"/>
           <p:cNvSpPr/>
           <p:nvPr/>
         </p:nvSpPr>
@@ -15595,7 +15555,7 @@
       </p:sp>
       <p:sp>
         <p:nvSpPr>
-          <p:cNvPr id="31" name="num-556"/>
+          <p:cNvPr id="31" name="num-554"/>
           <p:cNvSpPr/>
           <p:nvPr/>
         </p:nvSpPr>
@@ -15620,7 +15580,7 @@
       </p:sp>
       <p:sp>
         <p:nvSpPr>
-          <p:cNvPr id="32" name="text-557"/>
+          <p:cNvPr id="32" name="text-555"/>
           <p:cNvSpPr txBox="1"/>
           <p:nvPr/>
         </p:nvSpPr>
@@ -15656,7 +15616,7 @@
       </p:sp>
       <p:sp>
         <p:nvSpPr>
-          <p:cNvPr id="33" name="text-558"/>
+          <p:cNvPr id="33" name="text-556"/>
           <p:cNvSpPr txBox="1"/>
           <p:nvPr/>
         </p:nvSpPr>
@@ -15692,7 +15652,7 @@
       </p:sp>
       <p:sp>
         <p:nvSpPr>
-          <p:cNvPr id="34" name="text-559"/>
+          <p:cNvPr id="34" name="text-557"/>
           <p:cNvSpPr txBox="1"/>
           <p:nvPr/>
         </p:nvSpPr>
@@ -15728,7 +15688,7 @@
       </p:sp>
       <p:sp>
         <p:nvSpPr>
-          <p:cNvPr id="35" name="card-560"/>
+          <p:cNvPr id="35" name="card-558"/>
           <p:cNvSpPr/>
           <p:nvPr/>
         </p:nvSpPr>
@@ -15755,7 +15715,7 @@
       </p:sp>
       <p:sp>
         <p:nvSpPr>
-          <p:cNvPr id="36" name="badge-561"/>
+          <p:cNvPr id="36" name="badge-559"/>
           <p:cNvSpPr/>
           <p:nvPr/>
         </p:nvSpPr>
@@ -15780,7 +15740,7 @@
       </p:sp>
       <p:pic>
         <p:nvPicPr>
-          <p:cNvPr id="37" name="icon-562" descr="preencoded.png">    </p:cNvPr>
+          <p:cNvPr id="37" name="icon-560" descr="preencoded.png">    </p:cNvPr>
           <p:cNvPicPr>
             <a:picLocks noChangeAspect="1"/>
           </p:cNvPicPr>
@@ -15804,7 +15764,7 @@
       </p:pic>
       <p:sp>
         <p:nvSpPr>
-          <p:cNvPr id="38" name="text-563"/>
+          <p:cNvPr id="38" name="text-561"/>
           <p:cNvSpPr txBox="1"/>
           <p:nvPr/>
         </p:nvSpPr>
@@ -15840,7 +15800,7 @@
       </p:sp>
       <p:sp>
         <p:nvSpPr>
-          <p:cNvPr id="39" name="text-564"/>
+          <p:cNvPr id="39" name="text-562"/>
           <p:cNvSpPr txBox="1"/>
           <p:nvPr/>
         </p:nvSpPr>
@@ -16012,7 +15972,7 @@
       </p:sp>
       <p:sp>
         <p:nvSpPr>
-          <p:cNvPr id="40" name="text-565"/>
+          <p:cNvPr id="40" name="text-563"/>
           <p:cNvSpPr txBox="1"/>
           <p:nvPr/>
         </p:nvSpPr>
@@ -16074,7 +16034,7 @@
           <a:bodyPr lIns="0" tIns="0" rIns="0" bIns="0"/>
           <a:lstStyle>
             <a:lvl1pPr>
-              <a:defRPr sz="800">
+              <a:defRPr sz="900">
                 <a:solidFill>
                   <a:schemeClr val="tx2"/>
                 </a:solidFill>
@@ -16147,9 +16107,9 @@
                 <a:solidFill>
                   <a:schemeClr val="accent2"/>
                 </a:solidFill>
-                <a:latin typeface="Calibri" pitchFamily="34" charset="0"/>
-                <a:ea typeface="Calibri" pitchFamily="34" charset="-122"/>
-                <a:cs typeface="Calibri" pitchFamily="34" charset="-120"/>
+                <a:latin typeface="Arial" pitchFamily="34" charset="0"/>
+                <a:ea typeface="Arial" pitchFamily="34" charset="-122"/>
+                <a:cs typeface="Arial" pitchFamily="34" charset="-120"/>
               </a:rPr>
               <a:t>PARTEA I · CUM ÎNCEPEM</a:t>
             </a:r>
@@ -16188,9 +16148,9 @@
                 <a:solidFill>
                   <a:schemeClr val="tx1"/>
                 </a:solidFill>
-                <a:latin typeface="Cambria" pitchFamily="34" charset="0"/>
-                <a:ea typeface="Cambria" pitchFamily="34" charset="-122"/>
-                <a:cs typeface="Cambria" pitchFamily="34" charset="-120"/>
+                <a:latin typeface="Georgia" pitchFamily="34" charset="0"/>
+                <a:ea typeface="Georgia" pitchFamily="34" charset="-122"/>
+                <a:cs typeface="Georgia" pitchFamily="34" charset="-120"/>
               </a:rPr>
               <a:t>Clientele te caută întâi pe telefon</a:t>
             </a:r>
@@ -16617,9 +16577,9 @@
                 <a:solidFill>
                   <a:schemeClr val="tx1"/>
                 </a:solidFill>
-                <a:latin typeface="Cambria" pitchFamily="34" charset="0"/>
-                <a:ea typeface="Cambria" pitchFamily="34" charset="-122"/>
-                <a:cs typeface="Cambria" pitchFamily="34" charset="-120"/>
+                <a:latin typeface="Georgia" pitchFamily="34" charset="0"/>
+                <a:ea typeface="Georgia" pitchFamily="34" charset="-122"/>
+                <a:cs typeface="Georgia" pitchFamily="34" charset="-120"/>
               </a:rPr>
               <a:t>Alege-ți nișa</a:t>
             </a:r>
@@ -16657,7 +16617,7 @@
                   <a:schemeClr val="tx2"/>
                 </a:solidFill>
               </a:rPr>
-              <a:t>Ce știi să faci cel mai bine? Începe DOAR cu aia.</a:t>
+              <a:t>Ce știi să faci cel mai bine? Începe doar cu asta.</a:t>
             </a:r>
             <a:endParaRPr lang="en-US" sz="1400" dirty="0"/>
           </a:p>
@@ -17074,7 +17034,7 @@
           <a:bodyPr lIns="0" tIns="0" rIns="0" bIns="0"/>
           <a:lstStyle>
             <a:lvl1pPr>
-              <a:defRPr sz="800">
+              <a:defRPr sz="900">
                 <a:solidFill>
                   <a:schemeClr val="tx2"/>
                 </a:solidFill>
@@ -17118,7 +17078,7 @@
       </p:grpSpPr>
       <p:sp>
         <p:nvSpPr>
-          <p:cNvPr id="2" name="text-566"/>
+          <p:cNvPr id="2" name="text-564"/>
           <p:cNvSpPr txBox="1"/>
           <p:nvPr/>
         </p:nvSpPr>
@@ -17154,7 +17114,7 @@
       </p:sp>
       <p:sp>
         <p:nvSpPr>
-          <p:cNvPr id="3" name="text-567"/>
+          <p:cNvPr id="3" name="text-565"/>
           <p:cNvSpPr txBox="1"/>
           <p:nvPr/>
         </p:nvSpPr>
@@ -17181,9 +17141,9 @@
                 <a:solidFill>
                   <a:schemeClr val="bg1"/>
                 </a:solidFill>
-                <a:latin typeface="Cambria" pitchFamily="34" charset="0"/>
-                <a:ea typeface="Cambria" pitchFamily="34" charset="-122"/>
-                <a:cs typeface="Cambria" pitchFamily="34" charset="-120"/>
+                <a:latin typeface="Georgia" pitchFamily="34" charset="0"/>
+                <a:ea typeface="Georgia" pitchFamily="34" charset="-122"/>
+                <a:cs typeface="Georgia" pitchFamily="34" charset="-120"/>
               </a:rPr>
               <a:t>„Nu trebuie să fii influencer ca să îți promovezi munca. Trebuie doar să începi să o arăți.”</a:t>
             </a:r>
@@ -17193,7 +17153,7 @@
       </p:sp>
       <p:sp>
         <p:nvSpPr>
-          <p:cNvPr id="4" name="badge-568"/>
+          <p:cNvPr id="4" name="badge-566"/>
           <p:cNvSpPr/>
           <p:nvPr/>
         </p:nvSpPr>
@@ -17218,7 +17178,7 @@
       </p:sp>
       <p:pic>
         <p:nvPicPr>
-          <p:cNvPr id="5" name="icon-569" descr="preencoded.png">    </p:cNvPr>
+          <p:cNvPr id="5" name="icon-567" descr="preencoded.png">    </p:cNvPr>
           <p:cNvPicPr>
             <a:picLocks noChangeAspect="1"/>
           </p:cNvPicPr>
@@ -17242,7 +17202,7 @@
       </p:pic>
       <p:sp>
         <p:nvSpPr>
-          <p:cNvPr id="6" name="text-570"/>
+          <p:cNvPr id="6" name="text-568"/>
           <p:cNvSpPr txBox="1"/>
           <p:nvPr/>
         </p:nvSpPr>
@@ -17278,7 +17238,7 @@
       </p:sp>
       <p:sp>
         <p:nvSpPr>
-          <p:cNvPr id="7" name="text-571"/>
+          <p:cNvPr id="7" name="text-569"/>
           <p:cNvSpPr txBox="1"/>
           <p:nvPr/>
         </p:nvSpPr>
@@ -17314,7 +17274,7 @@
       </p:sp>
       <p:sp>
         <p:nvSpPr>
-          <p:cNvPr id="8" name="arrow-572"/>
+          <p:cNvPr id="8" name="arrow-570"/>
           <p:cNvSpPr/>
           <p:nvPr/>
         </p:nvSpPr>
@@ -17338,7 +17298,7 @@
       </p:sp>
       <p:sp>
         <p:nvSpPr>
-          <p:cNvPr id="9" name="badge-573"/>
+          <p:cNvPr id="9" name="badge-571"/>
           <p:cNvSpPr/>
           <p:nvPr/>
         </p:nvSpPr>
@@ -17363,7 +17323,7 @@
       </p:sp>
       <p:pic>
         <p:nvPicPr>
-          <p:cNvPr id="10" name="icon-574" descr="preencoded.png">    </p:cNvPr>
+          <p:cNvPr id="10" name="icon-572" descr="preencoded.png">    </p:cNvPr>
           <p:cNvPicPr>
             <a:picLocks noChangeAspect="1"/>
           </p:cNvPicPr>
@@ -17387,7 +17347,7 @@
       </p:pic>
       <p:sp>
         <p:nvSpPr>
-          <p:cNvPr id="11" name="text-575"/>
+          <p:cNvPr id="11" name="text-573"/>
           <p:cNvSpPr txBox="1"/>
           <p:nvPr/>
         </p:nvSpPr>
@@ -17423,7 +17383,7 @@
       </p:sp>
       <p:sp>
         <p:nvSpPr>
-          <p:cNvPr id="12" name="text-576"/>
+          <p:cNvPr id="12" name="text-574"/>
           <p:cNvSpPr txBox="1"/>
           <p:nvPr/>
         </p:nvSpPr>
@@ -17459,7 +17419,7 @@
       </p:sp>
       <p:sp>
         <p:nvSpPr>
-          <p:cNvPr id="13" name="arrow-577"/>
+          <p:cNvPr id="13" name="arrow-575"/>
           <p:cNvSpPr/>
           <p:nvPr/>
         </p:nvSpPr>
@@ -17483,7 +17443,7 @@
       </p:sp>
       <p:sp>
         <p:nvSpPr>
-          <p:cNvPr id="14" name="badge-578"/>
+          <p:cNvPr id="14" name="badge-576"/>
           <p:cNvSpPr/>
           <p:nvPr/>
         </p:nvSpPr>
@@ -17508,7 +17468,7 @@
       </p:sp>
       <p:pic>
         <p:nvPicPr>
-          <p:cNvPr id="15" name="icon-579" descr="preencoded.png">    </p:cNvPr>
+          <p:cNvPr id="15" name="icon-577" descr="preencoded.png">    </p:cNvPr>
           <p:cNvPicPr>
             <a:picLocks noChangeAspect="1"/>
           </p:cNvPicPr>
@@ -17532,7 +17492,7 @@
       </p:pic>
       <p:sp>
         <p:nvSpPr>
-          <p:cNvPr id="16" name="text-580"/>
+          <p:cNvPr id="16" name="text-578"/>
           <p:cNvSpPr txBox="1"/>
           <p:nvPr/>
         </p:nvSpPr>
@@ -17568,7 +17528,7 @@
       </p:sp>
       <p:sp>
         <p:nvSpPr>
-          <p:cNvPr id="17" name="text-581"/>
+          <p:cNvPr id="17" name="text-579"/>
           <p:cNvSpPr txBox="1"/>
           <p:nvPr/>
         </p:nvSpPr>
@@ -17604,7 +17564,7 @@
       </p:sp>
       <p:sp>
         <p:nvSpPr>
-          <p:cNvPr id="18" name="arrow-582"/>
+          <p:cNvPr id="18" name="arrow-580"/>
           <p:cNvSpPr/>
           <p:nvPr/>
         </p:nvSpPr>
@@ -17628,7 +17588,7 @@
       </p:sp>
       <p:sp>
         <p:nvSpPr>
-          <p:cNvPr id="19" name="badge-583"/>
+          <p:cNvPr id="19" name="badge-581"/>
           <p:cNvSpPr/>
           <p:nvPr/>
         </p:nvSpPr>
@@ -17653,7 +17613,7 @@
       </p:sp>
       <p:pic>
         <p:nvPicPr>
-          <p:cNvPr id="20" name="icon-584" descr="preencoded.png">    </p:cNvPr>
+          <p:cNvPr id="20" name="icon-582" descr="preencoded.png">    </p:cNvPr>
           <p:cNvPicPr>
             <a:picLocks noChangeAspect="1"/>
           </p:cNvPicPr>
@@ -17677,7 +17637,7 @@
       </p:pic>
       <p:sp>
         <p:nvSpPr>
-          <p:cNvPr id="21" name="text-585"/>
+          <p:cNvPr id="21" name="text-583"/>
           <p:cNvSpPr txBox="1"/>
           <p:nvPr/>
         </p:nvSpPr>
@@ -17713,7 +17673,7 @@
       </p:sp>
       <p:sp>
         <p:nvSpPr>
-          <p:cNvPr id="22" name="text-586"/>
+          <p:cNvPr id="22" name="text-584"/>
           <p:cNvSpPr txBox="1"/>
           <p:nvPr/>
         </p:nvSpPr>
@@ -17749,7 +17709,7 @@
       </p:sp>
       <p:sp>
         <p:nvSpPr>
-          <p:cNvPr id="23" name="arrow-587"/>
+          <p:cNvPr id="23" name="arrow-585"/>
           <p:cNvSpPr/>
           <p:nvPr/>
         </p:nvSpPr>
@@ -17773,7 +17733,7 @@
       </p:sp>
       <p:sp>
         <p:nvSpPr>
-          <p:cNvPr id="24" name="badge-588"/>
+          <p:cNvPr id="24" name="badge-586"/>
           <p:cNvSpPr/>
           <p:nvPr/>
         </p:nvSpPr>
@@ -17798,7 +17758,7 @@
       </p:sp>
       <p:pic>
         <p:nvPicPr>
-          <p:cNvPr id="25" name="icon-589" descr="preencoded.png">    </p:cNvPr>
+          <p:cNvPr id="25" name="icon-587" descr="preencoded.png">    </p:cNvPr>
           <p:cNvPicPr>
             <a:picLocks noChangeAspect="1"/>
           </p:cNvPicPr>
@@ -17822,7 +17782,7 @@
       </p:pic>
       <p:sp>
         <p:nvSpPr>
-          <p:cNvPr id="26" name="text-590"/>
+          <p:cNvPr id="26" name="text-588"/>
           <p:cNvSpPr txBox="1"/>
           <p:nvPr/>
         </p:nvSpPr>
@@ -17858,7 +17818,7 @@
       </p:sp>
       <p:sp>
         <p:nvSpPr>
-          <p:cNvPr id="27" name="text-591"/>
+          <p:cNvPr id="27" name="text-589"/>
           <p:cNvSpPr txBox="1"/>
           <p:nvPr/>
         </p:nvSpPr>
@@ -17948,9 +17908,9 @@
                 <a:solidFill>
                   <a:schemeClr val="accent2"/>
                 </a:solidFill>
-                <a:latin typeface="Calibri" pitchFamily="34" charset="0"/>
-                <a:ea typeface="Calibri" pitchFamily="34" charset="-122"/>
-                <a:cs typeface="Calibri" pitchFamily="34" charset="-120"/>
+                <a:latin typeface="Arial" pitchFamily="34" charset="0"/>
+                <a:ea typeface="Arial" pitchFamily="34" charset="-122"/>
+                <a:cs typeface="Arial" pitchFamily="34" charset="-120"/>
               </a:rPr>
               <a:t>PARTEA I · CUM ÎNCEPEM</a:t>
             </a:r>
@@ -17989,9 +17949,9 @@
                 <a:solidFill>
                   <a:schemeClr val="tx1"/>
                 </a:solidFill>
-                <a:latin typeface="Cambria" pitchFamily="34" charset="0"/>
-                <a:ea typeface="Cambria" pitchFamily="34" charset="-122"/>
-                <a:cs typeface="Cambria" pitchFamily="34" charset="-120"/>
+                <a:latin typeface="Georgia" pitchFamily="34" charset="0"/>
+                <a:ea typeface="Georgia" pitchFamily="34" charset="-122"/>
+                <a:cs typeface="Georgia" pitchFamily="34" charset="-120"/>
               </a:rPr>
               <a:t>Cum te filmezi fără emoții: 3 etape</a:t>
             </a:r>
@@ -18147,9 +18107,9 @@
                 <a:solidFill>
                   <a:schemeClr val="tx1"/>
                 </a:solidFill>
-                <a:latin typeface="Cambria" pitchFamily="34" charset="0"/>
-                <a:ea typeface="Cambria" pitchFamily="34" charset="-122"/>
-                <a:cs typeface="Cambria" pitchFamily="34" charset="-120"/>
+                <a:latin typeface="Georgia" pitchFamily="34" charset="0"/>
+                <a:ea typeface="Georgia" pitchFamily="34" charset="-122"/>
+                <a:cs typeface="Georgia" pitchFamily="34" charset="-120"/>
               </a:rPr>
               <a:t>Doar transformarea</a:t>
             </a:r>
@@ -18377,9 +18337,9 @@
                 <a:solidFill>
                   <a:schemeClr val="tx1"/>
                 </a:solidFill>
-                <a:latin typeface="Cambria" pitchFamily="34" charset="0"/>
-                <a:ea typeface="Cambria" pitchFamily="34" charset="-122"/>
-                <a:cs typeface="Cambria" pitchFamily="34" charset="-120"/>
+                <a:latin typeface="Georgia" pitchFamily="34" charset="0"/>
+                <a:ea typeface="Georgia" pitchFamily="34" charset="-122"/>
+                <a:cs typeface="Georgia" pitchFamily="34" charset="-120"/>
               </a:rPr>
               <a:t>Vocea ta pe fundal</a:t>
             </a:r>
@@ -18607,9 +18567,9 @@
                 <a:solidFill>
                   <a:schemeClr val="bg1"/>
                 </a:solidFill>
-                <a:latin typeface="Cambria" pitchFamily="34" charset="0"/>
-                <a:ea typeface="Cambria" pitchFamily="34" charset="-122"/>
-                <a:cs typeface="Cambria" pitchFamily="34" charset="-120"/>
+                <a:latin typeface="Georgia" pitchFamily="34" charset="0"/>
+                <a:ea typeface="Georgia" pitchFamily="34" charset="-122"/>
+                <a:cs typeface="Georgia" pitchFamily="34" charset="-120"/>
               </a:rPr>
               <a:t>Apari în cadru</a:t>
             </a:r>
@@ -18779,7 +18739,7 @@
                   <a:schemeClr val="tx1"/>
                 </a:solidFill>
               </a:rPr>
-              <a:t>trepied, nu mână · vorbește cu clienta, nu cu camera · filmează 5 dubluri, publică una · prima postare nu e examen de bacalaureat.</a:t>
+              <a:t>trepied, nu mână · vorbește cu clienta, nu cu camera · filmează 5 dubluri, publică una · prima postare nu e examenul de bacalaureat.</a:t>
             </a:r>
             <a:endParaRPr lang="en-US" sz="1300" dirty="0"/>
           </a:p>
@@ -18813,7 +18773,7 @@
           <a:bodyPr lIns="0" tIns="0" rIns="0" bIns="0"/>
           <a:lstStyle>
             <a:lvl1pPr>
-              <a:defRPr sz="800">
+              <a:defRPr sz="900">
                 <a:solidFill>
                   <a:schemeClr val="tx2"/>
                 </a:solidFill>
@@ -18886,9 +18846,9 @@
                 <a:solidFill>
                   <a:schemeClr val="accent2"/>
                 </a:solidFill>
-                <a:latin typeface="Calibri" pitchFamily="34" charset="0"/>
-                <a:ea typeface="Calibri" pitchFamily="34" charset="-122"/>
-                <a:cs typeface="Calibri" pitchFamily="34" charset="-120"/>
+                <a:latin typeface="Arial" pitchFamily="34" charset="0"/>
+                <a:ea typeface="Arial" pitchFamily="34" charset="-122"/>
+                <a:cs typeface="Arial" pitchFamily="34" charset="-120"/>
               </a:rPr>
               <a:t>PARTEA II · FACEBOOK</a:t>
             </a:r>
@@ -18927,9 +18887,9 @@
                 <a:solidFill>
                   <a:schemeClr val="tx1"/>
                 </a:solidFill>
-                <a:latin typeface="Cambria" pitchFamily="34" charset="0"/>
-                <a:ea typeface="Cambria" pitchFamily="34" charset="-122"/>
-                <a:cs typeface="Cambria" pitchFamily="34" charset="-120"/>
+                <a:latin typeface="Georgia" pitchFamily="34" charset="0"/>
+                <a:ea typeface="Georgia" pitchFamily="34" charset="-122"/>
+                <a:cs typeface="Georgia" pitchFamily="34" charset="-120"/>
               </a:rPr>
               <a:t>Facebook: pagina salonului, nu profilul tău</a:t>
             </a:r>
@@ -18946,9 +18906,7 @@
           <p:nvPr/>
         </p:nvPicPr>
         <p:blipFill>
-          <a:blip r:embed="rId1">
-            <a:alphaModFix amt="7000"/>
-          </a:blip>
+          <a:blip r:embed="rId1"/>
           <a:stretch>
             <a:fillRect/>
           </a:stretch>
@@ -19105,7 +19063,7 @@
                   <a:schemeClr val="tx2"/>
                 </a:solidFill>
               </a:rPr>
-              <a:t>Limită de prieteni</a:t>
+              <a:t>Maximum 5.000 de prieteni</a:t>
             </a:r>
             <a:endParaRPr lang="en-US" sz="1400" dirty="0"/>
           </a:p>
@@ -19548,8 +19506,8 @@
         </p:nvSpPr>
         <p:spPr>
           <a:xfrm>
-            <a:off x="6208776" y="2770632"/>
-            <a:ext cx="1472184" cy="219456"/>
+            <a:off x="6208776" y="2761488"/>
+            <a:ext cx="1472184" cy="237744"/>
           </a:xfrm>
           <a:prstGeom prst="rect">
             <a:avLst/>
@@ -19565,14 +19523,14 @@
               <a:buNone/>
             </a:pPr>
             <a:r>
-              <a:rPr lang="en-US" sz="1000" dirty="0">
+              <a:rPr lang="en-US" sz="1100" dirty="0">
                 <a:solidFill>
                   <a:schemeClr val="tx2"/>
                 </a:solidFill>
               </a:rPr>
               <a:t>Adresă + hartă</a:t>
             </a:r>
-            <a:endParaRPr lang="en-US" sz="1000" dirty="0"/>
+            <a:endParaRPr lang="en-US" sz="1100" dirty="0"/>
           </a:p>
         </p:txBody>
       </p:sp>
@@ -19608,8 +19566,8 @@
         </p:nvSpPr>
         <p:spPr>
           <a:xfrm>
-            <a:off x="6208776" y="3044952"/>
-            <a:ext cx="1472184" cy="219456"/>
+            <a:off x="6208776" y="3035808"/>
+            <a:ext cx="1472184" cy="237744"/>
           </a:xfrm>
           <a:prstGeom prst="rect">
             <a:avLst/>
@@ -19625,14 +19583,14 @@
               <a:buNone/>
             </a:pPr>
             <a:r>
-              <a:rPr lang="en-US" sz="1000" dirty="0">
+              <a:rPr lang="en-US" sz="1100" dirty="0">
                 <a:solidFill>
                   <a:schemeClr val="tx2"/>
                 </a:solidFill>
               </a:rPr>
               <a:t>Program</a:t>
             </a:r>
-            <a:endParaRPr lang="en-US" sz="1000" dirty="0"/>
+            <a:endParaRPr lang="en-US" sz="1100" dirty="0"/>
           </a:p>
         </p:txBody>
       </p:sp>
@@ -19668,8 +19626,8 @@
         </p:nvSpPr>
         <p:spPr>
           <a:xfrm>
-            <a:off x="6208776" y="3319272"/>
-            <a:ext cx="1472184" cy="219456"/>
+            <a:off x="6208776" y="3310128"/>
+            <a:ext cx="1472184" cy="237744"/>
           </a:xfrm>
           <a:prstGeom prst="rect">
             <a:avLst/>
@@ -19685,14 +19643,14 @@
               <a:buNone/>
             </a:pPr>
             <a:r>
-              <a:rPr lang="en-US" sz="1000" dirty="0">
+              <a:rPr lang="en-US" sz="1100" dirty="0">
                 <a:solidFill>
                   <a:schemeClr val="tx2"/>
                 </a:solidFill>
               </a:rPr>
               <a:t>Telefon / WhatsApp</a:t>
             </a:r>
-            <a:endParaRPr lang="en-US" sz="1000" dirty="0"/>
+            <a:endParaRPr lang="en-US" sz="1100" dirty="0"/>
           </a:p>
         </p:txBody>
       </p:sp>
@@ -19728,8 +19686,8 @@
         </p:nvSpPr>
         <p:spPr>
           <a:xfrm>
-            <a:off x="6208776" y="3593592"/>
-            <a:ext cx="1472184" cy="219456"/>
+            <a:off x="6208776" y="3584448"/>
+            <a:ext cx="1472184" cy="237744"/>
           </a:xfrm>
           <a:prstGeom prst="rect">
             <a:avLst/>
@@ -19745,14 +19703,14 @@
               <a:buNone/>
             </a:pPr>
             <a:r>
-              <a:rPr lang="en-US" sz="1000" dirty="0">
+              <a:rPr lang="en-US" sz="1100" dirty="0">
                 <a:solidFill>
                   <a:schemeClr val="tx2"/>
                 </a:solidFill>
               </a:rPr>
               <a:t>Recenzii</a:t>
             </a:r>
-            <a:endParaRPr lang="en-US" sz="1000" dirty="0"/>
+            <a:endParaRPr lang="en-US" sz="1100" dirty="0"/>
           </a:p>
         </p:txBody>
       </p:sp>
@@ -19907,7 +19865,7 @@
           <a:bodyPr lIns="0" tIns="0" rIns="0" bIns="0"/>
           <a:lstStyle>
             <a:lvl1pPr>
-              <a:defRPr sz="800">
+              <a:defRPr sz="900">
                 <a:solidFill>
                   <a:schemeClr val="tx2"/>
                 </a:solidFill>
@@ -19980,9 +19938,9 @@
                 <a:solidFill>
                   <a:schemeClr val="accent2"/>
                 </a:solidFill>
-                <a:latin typeface="Calibri" pitchFamily="34" charset="0"/>
-                <a:ea typeface="Calibri" pitchFamily="34" charset="-122"/>
-                <a:cs typeface="Calibri" pitchFamily="34" charset="-120"/>
+                <a:latin typeface="Arial" pitchFamily="34" charset="0"/>
+                <a:ea typeface="Arial" pitchFamily="34" charset="-122"/>
+                <a:cs typeface="Arial" pitchFamily="34" charset="-120"/>
               </a:rPr>
               <a:t>PARTEA II · FACEBOOK</a:t>
             </a:r>
@@ -20021,9 +19979,9 @@
                 <a:solidFill>
                   <a:schemeClr val="tx1"/>
                 </a:solidFill>
-                <a:latin typeface="Cambria" pitchFamily="34" charset="0"/>
-                <a:ea typeface="Cambria" pitchFamily="34" charset="-122"/>
-                <a:cs typeface="Cambria" pitchFamily="34" charset="-120"/>
+                <a:latin typeface="Georgia" pitchFamily="34" charset="0"/>
+                <a:ea typeface="Georgia" pitchFamily="34" charset="-122"/>
+                <a:cs typeface="Georgia" pitchFamily="34" charset="-120"/>
               </a:rPr>
               <a:t>Facebook: de la like la programare</a:t>
             </a:r>
@@ -20040,9 +19998,7 @@
           <p:nvPr/>
         </p:nvPicPr>
         <p:blipFill>
-          <a:blip r:embed="rId1">
-            <a:alphaModFix amt="7000"/>
-          </a:blip>
+          <a:blip r:embed="rId1"/>
           <a:stretch>
             <a:fillRect/>
           </a:stretch>
@@ -20678,11 +20634,11 @@
                 <a:solidFill>
                   <a:schemeClr val="tx1"/>
                 </a:solidFill>
-                <a:latin typeface="Cambria" pitchFamily="34" charset="0"/>
-                <a:ea typeface="Cambria" pitchFamily="34" charset="-122"/>
-                <a:cs typeface="Cambria" pitchFamily="34" charset="-120"/>
-              </a:rPr>
-              <a:t>Interes → programare</a:t>
+                <a:latin typeface="Georgia" pitchFamily="34" charset="0"/>
+                <a:ea typeface="Georgia" pitchFamily="34" charset="-122"/>
+                <a:cs typeface="Georgia" pitchFamily="34" charset="-120"/>
+              </a:rPr>
+              <a:t>De la interes la programare</a:t>
             </a:r>
             <a:endParaRPr lang="en-US" sz="1500" dirty="0"/>
           </a:p>
@@ -21128,7 +21084,7 @@
           <a:bodyPr lIns="0" tIns="0" rIns="0" bIns="0"/>
           <a:lstStyle>
             <a:lvl1pPr>
-              <a:defRPr sz="800">
+              <a:defRPr sz="900">
                 <a:solidFill>
                   <a:schemeClr val="tx2"/>
                 </a:solidFill>
@@ -21201,9 +21157,9 @@
                 <a:solidFill>
                   <a:schemeClr val="accent2"/>
                 </a:solidFill>
-                <a:latin typeface="Calibri" pitchFamily="34" charset="0"/>
-                <a:ea typeface="Calibri" pitchFamily="34" charset="-122"/>
-                <a:cs typeface="Calibri" pitchFamily="34" charset="-120"/>
+                <a:latin typeface="Arial" pitchFamily="34" charset="0"/>
+                <a:ea typeface="Arial" pitchFamily="34" charset="-122"/>
+                <a:cs typeface="Arial" pitchFamily="34" charset="-120"/>
               </a:rPr>
               <a:t>PARTEA III · INSTAGRAM</a:t>
             </a:r>
@@ -21242,9 +21198,9 @@
                 <a:solidFill>
                   <a:schemeClr val="tx1"/>
                 </a:solidFill>
-                <a:latin typeface="Cambria" pitchFamily="34" charset="0"/>
-                <a:ea typeface="Cambria" pitchFamily="34" charset="-122"/>
-                <a:cs typeface="Cambria" pitchFamily="34" charset="-120"/>
+                <a:latin typeface="Georgia" pitchFamily="34" charset="0"/>
+                <a:ea typeface="Georgia" pitchFamily="34" charset="-122"/>
+                <a:cs typeface="Georgia" pitchFamily="34" charset="-120"/>
               </a:rPr>
               <a:t>Story, Reels sau postare? Fiecare are rolul ei</a:t>
             </a:r>
@@ -21261,9 +21217,7 @@
           <p:nvPr/>
         </p:nvPicPr>
         <p:blipFill>
-          <a:blip r:embed="rId1">
-            <a:alphaModFix amt="7000"/>
-          </a:blip>
+          <a:blip r:embed="rId1"/>
           <a:stretch>
             <a:fillRect/>
           </a:stretch>
@@ -21390,9 +21344,9 @@
                 <a:solidFill>
                   <a:schemeClr val="tx1"/>
                 </a:solidFill>
-                <a:latin typeface="Cambria" pitchFamily="34" charset="0"/>
-                <a:ea typeface="Cambria" pitchFamily="34" charset="-122"/>
-                <a:cs typeface="Cambria" pitchFamily="34" charset="-120"/>
+                <a:latin typeface="Georgia" pitchFamily="34" charset="0"/>
+                <a:ea typeface="Georgia" pitchFamily="34" charset="-122"/>
+                <a:cs typeface="Georgia" pitchFamily="34" charset="-120"/>
               </a:rPr>
               <a:t>Story</a:t>
             </a:r>
@@ -21696,9 +21650,9 @@
                 <a:solidFill>
                   <a:schemeClr val="bg1"/>
                 </a:solidFill>
-                <a:latin typeface="Cambria" pitchFamily="34" charset="0"/>
-                <a:ea typeface="Cambria" pitchFamily="34" charset="-122"/>
-                <a:cs typeface="Cambria" pitchFamily="34" charset="-120"/>
+                <a:latin typeface="Georgia" pitchFamily="34" charset="0"/>
+                <a:ea typeface="Georgia" pitchFamily="34" charset="-122"/>
+                <a:cs typeface="Georgia" pitchFamily="34" charset="-120"/>
               </a:rPr>
               <a:t>Reels</a:t>
             </a:r>
@@ -22002,9 +21956,9 @@
                 <a:solidFill>
                   <a:schemeClr val="tx1"/>
                 </a:solidFill>
-                <a:latin typeface="Cambria" pitchFamily="34" charset="0"/>
-                <a:ea typeface="Cambria" pitchFamily="34" charset="-122"/>
-                <a:cs typeface="Cambria" pitchFamily="34" charset="-120"/>
+                <a:latin typeface="Georgia" pitchFamily="34" charset="0"/>
+                <a:ea typeface="Georgia" pitchFamily="34" charset="-122"/>
+                <a:cs typeface="Georgia" pitchFamily="34" charset="-120"/>
               </a:rPr>
               <a:t>Postare</a:t>
             </a:r>
@@ -22224,7 +22178,7 @@
           <a:bodyPr lIns="0" tIns="0" rIns="0" bIns="0"/>
           <a:lstStyle>
             <a:lvl1pPr>
-              <a:defRPr sz="800">
+              <a:defRPr sz="900">
                 <a:solidFill>
                   <a:schemeClr val="tx2"/>
                 </a:solidFill>
@@ -22297,9 +22251,9 @@
                 <a:solidFill>
                   <a:schemeClr val="accent2"/>
                 </a:solidFill>
-                <a:latin typeface="Calibri" pitchFamily="34" charset="0"/>
-                <a:ea typeface="Calibri" pitchFamily="34" charset="-122"/>
-                <a:cs typeface="Calibri" pitchFamily="34" charset="-120"/>
+                <a:latin typeface="Arial" pitchFamily="34" charset="0"/>
+                <a:ea typeface="Arial" pitchFamily="34" charset="-122"/>
+                <a:cs typeface="Arial" pitchFamily="34" charset="-120"/>
               </a:rPr>
               <a:t>PARTEA III · INSTAGRAM</a:t>
             </a:r>
@@ -22338,11 +22292,11 @@
                 <a:solidFill>
                   <a:schemeClr val="tx1"/>
                 </a:solidFill>
-                <a:latin typeface="Cambria" pitchFamily="34" charset="0"/>
-                <a:ea typeface="Cambria" pitchFamily="34" charset="-122"/>
-                <a:cs typeface="Cambria" pitchFamily="34" charset="-120"/>
-              </a:rPr>
-              <a:t>Profil atractiv, urmăritori potriviți, ritm realist</a:t>
+                <a:latin typeface="Georgia" pitchFamily="34" charset="0"/>
+                <a:ea typeface="Georgia" pitchFamily="34" charset="-122"/>
+                <a:cs typeface="Georgia" pitchFamily="34" charset="-120"/>
+              </a:rPr>
+              <a:t>Profil, urmăritori și ritm realist</a:t>
             </a:r>
             <a:endParaRPr lang="en-US" sz="2800" dirty="0"/>
           </a:p>
@@ -22357,9 +22311,7 @@
           <p:nvPr/>
         </p:nvPicPr>
         <p:blipFill>
-          <a:blip r:embed="rId1">
-            <a:alphaModFix amt="7000"/>
-          </a:blip>
+          <a:blip r:embed="rId1"/>
           <a:stretch>
             <a:fillRect/>
           </a:stretch>
@@ -22495,8 +22447,8 @@
         </p:nvSpPr>
         <p:spPr>
           <a:xfrm>
-            <a:off x="1252728" y="1481328"/>
-            <a:ext cx="1152144" cy="228600"/>
+            <a:off x="1234440" y="1435608"/>
+            <a:ext cx="1197864" cy="274320"/>
           </a:xfrm>
           <a:prstGeom prst="rect">
             <a:avLst/>
@@ -22512,12 +22464,48 @@
               <a:buNone/>
             </a:pPr>
             <a:r>
-              <a:rPr lang="en-US" sz="900" b="1" dirty="0">
+              <a:rPr lang="en-US" sz="1000" b="1" dirty="0">
                 <a:solidFill>
                   <a:schemeClr val="tx1"/>
                 </a:solidFill>
               </a:rPr>
-              <a:t>Ana | Blond &amp; Balayage</a:t>
+              <a:t>Ana | Balayage</a:t>
+            </a:r>
+            <a:endParaRPr lang="en-US" sz="1000" dirty="0"/>
+          </a:p>
+        </p:txBody>
+      </p:sp>
+      <p:sp>
+        <p:nvSpPr>
+          <p:cNvPr id="10" name="text-166"/>
+          <p:cNvSpPr txBox="1"/>
+          <p:nvPr/>
+        </p:nvSpPr>
+        <p:spPr>
+          <a:xfrm>
+            <a:off x="1234440" y="1709928"/>
+            <a:ext cx="1197864" cy="201168"/>
+          </a:xfrm>
+          <a:prstGeom prst="rect">
+            <a:avLst/>
+          </a:prstGeom>
+          <a:noFill/>
+          <a:ln/>
+        </p:spPr>
+        <p:txBody>
+          <a:bodyPr wrap="square" lIns="0" tIns="0" rIns="0" bIns="0" rtlCol="0" anchor="t"/>
+          <a:lstStyle/>
+          <a:p>
+            <a:pPr indent="0" marL="0">
+              <a:buNone/>
+            </a:pPr>
+            <a:r>
+              <a:rPr lang="en-US" sz="900" dirty="0">
+                <a:solidFill>
+                  <a:schemeClr val="tx2"/>
+                </a:solidFill>
+              </a:rPr>
+              <a:t>Coloristă · Cluj</a:t>
             </a:r>
             <a:endParaRPr lang="en-US" sz="900" dirty="0"/>
           </a:p>
@@ -22525,14 +22513,14 @@
       </p:sp>
       <p:sp>
         <p:nvSpPr>
-          <p:cNvPr id="10" name="text-166"/>
-          <p:cNvSpPr txBox="1"/>
-          <p:nvPr/>
-        </p:nvSpPr>
-        <p:spPr>
-          <a:xfrm>
-            <a:off x="1252728" y="1709928"/>
-            <a:ext cx="1152144" cy="201168"/>
+          <p:cNvPr id="11" name="text-167"/>
+          <p:cNvSpPr txBox="1"/>
+          <p:nvPr/>
+        </p:nvSpPr>
+        <p:spPr>
+          <a:xfrm>
+            <a:off x="658368" y="2011680"/>
+            <a:ext cx="1700784" cy="594360"/>
           </a:xfrm>
           <a:prstGeom prst="rect">
             <a:avLst/>
@@ -22550,76 +22538,40 @@
             <a:r>
               <a:rPr lang="en-US" sz="900" dirty="0">
                 <a:solidFill>
-                  <a:schemeClr val="tx2"/>
-                </a:solidFill>
-              </a:rPr>
-              <a:t>Coloristă · Cluj</a:t>
+                  <a:schemeClr val="tx1"/>
+                </a:solidFill>
+              </a:rPr>
+              <a:t>Blond rece &amp; AirTouch</a:t>
             </a:r>
             <a:endParaRPr lang="en-US" sz="900" dirty="0"/>
           </a:p>
-        </p:txBody>
-      </p:sp>
-      <p:sp>
-        <p:nvSpPr>
-          <p:cNvPr id="11" name="text-167"/>
-          <p:cNvSpPr txBox="1"/>
-          <p:nvPr/>
-        </p:nvSpPr>
-        <p:spPr>
-          <a:xfrm>
-            <a:off x="658368" y="2029968"/>
-            <a:ext cx="1700784" cy="548640"/>
-          </a:xfrm>
-          <a:prstGeom prst="rect">
-            <a:avLst/>
-          </a:prstGeom>
-          <a:noFill/>
-          <a:ln/>
-        </p:spPr>
-        <p:txBody>
-          <a:bodyPr wrap="square" lIns="0" tIns="0" rIns="0" bIns="0" rtlCol="0" anchor="t"/>
-          <a:lstStyle/>
           <a:p>
             <a:pPr indent="0" marL="0">
               <a:buNone/>
             </a:pPr>
             <a:r>
-              <a:rPr lang="en-US" sz="800" dirty="0">
+              <a:rPr lang="en-US" sz="900" dirty="0">
                 <a:solidFill>
                   <a:schemeClr val="tx1"/>
                 </a:solidFill>
               </a:rPr>
-              <a:t>Specialist blond rece &amp; AirTouch</a:t>
-            </a:r>
-            <a:endParaRPr lang="en-US" sz="800" dirty="0"/>
+              <a:t>Programări: link mai jos</a:t>
+            </a:r>
+            <a:endParaRPr lang="en-US" sz="900" dirty="0"/>
           </a:p>
           <a:p>
             <a:pPr indent="0" marL="0">
               <a:buNone/>
             </a:pPr>
             <a:r>
-              <a:rPr lang="en-US" sz="800" dirty="0">
+              <a:rPr lang="en-US" sz="900" dirty="0">
                 <a:solidFill>
                   <a:schemeClr val="tx1"/>
                 </a:solidFill>
               </a:rPr>
-              <a:t>Programări: link mai jos</a:t>
-            </a:r>
-            <a:endParaRPr lang="en-US" sz="800" dirty="0"/>
-          </a:p>
-          <a:p>
-            <a:pPr indent="0" marL="0">
-              <a:buNone/>
-            </a:pPr>
-            <a:r>
-              <a:rPr lang="en-US" sz="800" dirty="0">
-                <a:solidFill>
-                  <a:schemeClr val="tx1"/>
-                </a:solidFill>
-              </a:rPr>
-              <a:t>Salonul X, str. Exemplu 10</a:t>
-            </a:r>
-            <a:endParaRPr lang="en-US" sz="800" dirty="0"/>
+              <a:t>Salonul X, Cluj</a:t>
+            </a:r>
+            <a:endParaRPr lang="en-US" sz="900" dirty="0"/>
           </a:p>
         </p:txBody>
       </p:sp>
@@ -22631,7 +22583,7 @@
         </p:nvSpPr>
         <p:spPr>
           <a:xfrm>
-            <a:off x="667512" y="2670048"/>
+            <a:off x="731520" y="2642616"/>
             <a:ext cx="347472" cy="347472"/>
           </a:xfrm>
           <a:prstGeom prst="ellipse">
@@ -22656,8 +22608,8 @@
         </p:nvSpPr>
         <p:spPr>
           <a:xfrm>
-            <a:off x="576072" y="3035808"/>
-            <a:ext cx="530352" cy="182880"/>
+            <a:off x="594360" y="3017520"/>
+            <a:ext cx="621792" cy="201168"/>
           </a:xfrm>
           <a:prstGeom prst="rect">
             <a:avLst/>
@@ -22673,14 +22625,14 @@
               <a:buNone/>
             </a:pPr>
             <a:r>
-              <a:rPr lang="en-US" sz="600" dirty="0">
+              <a:rPr lang="en-US" sz="800" dirty="0">
                 <a:solidFill>
                   <a:schemeClr val="tx2"/>
                 </a:solidFill>
               </a:rPr>
               <a:t>Prețuri</a:t>
             </a:r>
-            <a:endParaRPr lang="en-US" sz="600" dirty="0"/>
+            <a:endParaRPr lang="en-US" sz="800" dirty="0"/>
           </a:p>
         </p:txBody>
       </p:sp>
@@ -22692,7 +22644,7 @@
         </p:nvSpPr>
         <p:spPr>
           <a:xfrm>
-            <a:off x="1152144" y="2670048"/>
+            <a:off x="1371600" y="2642616"/>
             <a:ext cx="347472" cy="347472"/>
           </a:xfrm>
           <a:prstGeom prst="ellipse">
@@ -22717,8 +22669,8 @@
         </p:nvSpPr>
         <p:spPr>
           <a:xfrm>
-            <a:off x="1060704" y="3035808"/>
-            <a:ext cx="530352" cy="182880"/>
+            <a:off x="1234440" y="3017520"/>
+            <a:ext cx="621792" cy="201168"/>
           </a:xfrm>
           <a:prstGeom prst="rect">
             <a:avLst/>
@@ -22734,14 +22686,14 @@
               <a:buNone/>
             </a:pPr>
             <a:r>
-              <a:rPr lang="en-US" sz="600" dirty="0">
+              <a:rPr lang="en-US" sz="800" dirty="0">
                 <a:solidFill>
                   <a:schemeClr val="tx2"/>
                 </a:solidFill>
               </a:rPr>
-              <a:t>Înainte/după</a:t>
-            </a:r>
-            <a:endParaRPr lang="en-US" sz="600" dirty="0"/>
+              <a:t>Recenzii</a:t>
+            </a:r>
+            <a:endParaRPr lang="en-US" sz="800" dirty="0"/>
           </a:p>
         </p:txBody>
       </p:sp>
@@ -22753,7 +22705,7 @@
         </p:nvSpPr>
         <p:spPr>
           <a:xfrm>
-            <a:off x="1636776" y="2670048"/>
+            <a:off x="2011680" y="2642616"/>
             <a:ext cx="347472" cy="347472"/>
           </a:xfrm>
           <a:prstGeom prst="ellipse">
@@ -22778,8 +22730,8 @@
         </p:nvSpPr>
         <p:spPr>
           <a:xfrm>
-            <a:off x="1545336" y="3035808"/>
-            <a:ext cx="530352" cy="182880"/>
+            <a:off x="1874520" y="3017520"/>
+            <a:ext cx="621792" cy="201168"/>
           </a:xfrm>
           <a:prstGeom prst="rect">
             <a:avLst/>
@@ -22795,81 +22747,20 @@
               <a:buNone/>
             </a:pPr>
             <a:r>
-              <a:rPr lang="en-US" sz="600" dirty="0">
+              <a:rPr lang="en-US" sz="800" dirty="0">
                 <a:solidFill>
                   <a:schemeClr val="tx2"/>
                 </a:solidFill>
               </a:rPr>
-              <a:t>Recenzii</a:t>
-            </a:r>
-            <a:endParaRPr lang="en-US" sz="600" dirty="0"/>
-          </a:p>
-        </p:txBody>
-      </p:sp>
-      <p:sp>
-        <p:nvSpPr>
-          <p:cNvPr id="18" name="hl-174"/>
-          <p:cNvSpPr/>
-          <p:nvPr/>
-        </p:nvSpPr>
-        <p:spPr>
-          <a:xfrm>
-            <a:off x="2121408" y="2670048"/>
-            <a:ext cx="347472" cy="347472"/>
-          </a:xfrm>
-          <a:prstGeom prst="ellipse">
-            <a:avLst/>
-          </a:prstGeom>
-          <a:solidFill>
-            <a:schemeClr val="bg2"/>
-          </a:solidFill>
-          <a:ln w="12700">
-            <a:solidFill>
-              <a:schemeClr val="accent1"/>
-            </a:solidFill>
-            <a:prstDash val="solid"/>
-          </a:ln>
-        </p:spPr>
-      </p:sp>
-      <p:sp>
-        <p:nvSpPr>
-          <p:cNvPr id="19" name="text-175"/>
-          <p:cNvSpPr txBox="1"/>
-          <p:nvPr/>
-        </p:nvSpPr>
-        <p:spPr>
-          <a:xfrm>
-            <a:off x="2029968" y="3035808"/>
-            <a:ext cx="530352" cy="182880"/>
-          </a:xfrm>
-          <a:prstGeom prst="rect">
-            <a:avLst/>
-          </a:prstGeom>
-          <a:noFill/>
-          <a:ln/>
-        </p:spPr>
-        <p:txBody>
-          <a:bodyPr wrap="square" lIns="0" tIns="0" rIns="0" bIns="0" rtlCol="0" anchor="t"/>
-          <a:lstStyle/>
-          <a:p>
-            <a:pPr algn="ctr" indent="0" marL="0">
-              <a:buNone/>
-            </a:pPr>
-            <a:r>
-              <a:rPr lang="en-US" sz="600" dirty="0">
-                <a:solidFill>
-                  <a:schemeClr val="tx2"/>
-                </a:solidFill>
-              </a:rPr>
               <a:t>Locație</a:t>
             </a:r>
-            <a:endParaRPr lang="en-US" sz="600" dirty="0"/>
-          </a:p>
-        </p:txBody>
-      </p:sp>
-      <p:sp>
-        <p:nvSpPr>
-          <p:cNvPr id="20" name="grid-176"/>
+            <a:endParaRPr lang="en-US" sz="800" dirty="0"/>
+          </a:p>
+        </p:txBody>
+      </p:sp>
+      <p:sp>
+        <p:nvSpPr>
+          <p:cNvPr id="18" name="grid-174"/>
           <p:cNvSpPr/>
           <p:nvPr/>
         </p:nvSpPr>
@@ -22894,7 +22785,7 @@
       </p:sp>
       <p:sp>
         <p:nvSpPr>
-          <p:cNvPr id="21" name="grid-177"/>
+          <p:cNvPr id="19" name="grid-175"/>
           <p:cNvSpPr/>
           <p:nvPr/>
         </p:nvSpPr>
@@ -22919,7 +22810,7 @@
       </p:sp>
       <p:sp>
         <p:nvSpPr>
-          <p:cNvPr id="22" name="grid-178"/>
+          <p:cNvPr id="20" name="grid-176"/>
           <p:cNvSpPr/>
           <p:nvPr/>
         </p:nvSpPr>
@@ -22944,7 +22835,7 @@
       </p:sp>
       <p:sp>
         <p:nvSpPr>
-          <p:cNvPr id="23" name="grid-179"/>
+          <p:cNvPr id="21" name="grid-177"/>
           <p:cNvSpPr/>
           <p:nvPr/>
         </p:nvSpPr>
@@ -22969,7 +22860,7 @@
       </p:sp>
       <p:sp>
         <p:nvSpPr>
-          <p:cNvPr id="24" name="grid-180"/>
+          <p:cNvPr id="22" name="grid-178"/>
           <p:cNvSpPr/>
           <p:nvPr/>
         </p:nvSpPr>
@@ -22994,7 +22885,7 @@
       </p:sp>
       <p:sp>
         <p:nvSpPr>
-          <p:cNvPr id="25" name="grid-181"/>
+          <p:cNvPr id="23" name="grid-179"/>
           <p:cNvSpPr/>
           <p:nvPr/>
         </p:nvSpPr>
@@ -23019,7 +22910,7 @@
       </p:sp>
       <p:sp>
         <p:nvSpPr>
-          <p:cNvPr id="26" name="arrow-182"/>
+          <p:cNvPr id="24" name="arrow-180"/>
           <p:cNvSpPr/>
           <p:nvPr/>
         </p:nvSpPr>
@@ -23043,7 +22934,7 @@
       </p:sp>
       <p:sp>
         <p:nvSpPr>
-          <p:cNvPr id="27" name="text-183"/>
+          <p:cNvPr id="25" name="text-181"/>
           <p:cNvSpPr txBox="1"/>
           <p:nvPr/>
         </p:nvSpPr>
@@ -23079,7 +22970,7 @@
       </p:sp>
       <p:sp>
         <p:nvSpPr>
-          <p:cNvPr id="28" name="arrow-184"/>
+          <p:cNvPr id="26" name="arrow-182"/>
           <p:cNvSpPr/>
           <p:nvPr/>
         </p:nvSpPr>
@@ -23103,7 +22994,7 @@
       </p:sp>
       <p:sp>
         <p:nvSpPr>
-          <p:cNvPr id="29" name="text-185"/>
+          <p:cNvPr id="27" name="text-183"/>
           <p:cNvSpPr txBox="1"/>
           <p:nvPr/>
         </p:nvSpPr>
@@ -23139,7 +23030,7 @@
       </p:sp>
       <p:sp>
         <p:nvSpPr>
-          <p:cNvPr id="30" name="text-186"/>
+          <p:cNvPr id="28" name="text-184"/>
           <p:cNvSpPr txBox="1"/>
           <p:nvPr/>
         </p:nvSpPr>
@@ -23166,9 +23057,9 @@
                 <a:solidFill>
                   <a:schemeClr val="tx1"/>
                 </a:solidFill>
-                <a:latin typeface="Cambria" pitchFamily="34" charset="0"/>
-                <a:ea typeface="Cambria" pitchFamily="34" charset="-122"/>
-                <a:cs typeface="Cambria" pitchFamily="34" charset="-120"/>
+                <a:latin typeface="Georgia" pitchFamily="34" charset="0"/>
+                <a:ea typeface="Georgia" pitchFamily="34" charset="-122"/>
+                <a:cs typeface="Georgia" pitchFamily="34" charset="-120"/>
               </a:rPr>
               <a:t>Atragi urmăritorii potriviți</a:t>
             </a:r>
@@ -23178,7 +23069,7 @@
       </p:sp>
       <p:sp>
         <p:nvSpPr>
-          <p:cNvPr id="31" name="text-187"/>
+          <p:cNvPr id="29" name="text-185"/>
           <p:cNvSpPr txBox="1"/>
           <p:nvPr/>
         </p:nvSpPr>
@@ -23254,7 +23145,7 @@
       </p:sp>
       <p:sp>
         <p:nvSpPr>
-          <p:cNvPr id="32" name="text-188"/>
+          <p:cNvPr id="30" name="text-186"/>
           <p:cNvSpPr txBox="1"/>
           <p:nvPr/>
         </p:nvSpPr>
@@ -23281,9 +23172,9 @@
                 <a:solidFill>
                   <a:schemeClr val="tx1"/>
                 </a:solidFill>
-                <a:latin typeface="Cambria" pitchFamily="34" charset="0"/>
-                <a:ea typeface="Cambria" pitchFamily="34" charset="-122"/>
-                <a:cs typeface="Cambria" pitchFamily="34" charset="-120"/>
+                <a:latin typeface="Georgia" pitchFamily="34" charset="0"/>
+                <a:ea typeface="Georgia" pitchFamily="34" charset="-122"/>
+                <a:cs typeface="Georgia" pitchFamily="34" charset="-120"/>
               </a:rPr>
               <a:t>Ritm realist pe săptămână</a:t>
             </a:r>
@@ -23293,7 +23184,7 @@
       </p:sp>
       <p:sp>
         <p:nvSpPr>
-          <p:cNvPr id="33" name="day-189"/>
+          <p:cNvPr id="31" name="day-187"/>
           <p:cNvSpPr/>
           <p:nvPr/>
         </p:nvSpPr>
@@ -23320,7 +23211,7 @@
       </p:sp>
       <p:sp>
         <p:nvSpPr>
-          <p:cNvPr id="34" name="text-190"/>
+          <p:cNvPr id="32" name="text-188"/>
           <p:cNvSpPr txBox="1"/>
           <p:nvPr/>
         </p:nvSpPr>
@@ -23356,7 +23247,7 @@
       </p:sp>
       <p:sp>
         <p:nvSpPr>
-          <p:cNvPr id="35" name="text-191"/>
+          <p:cNvPr id="33" name="text-189"/>
           <p:cNvSpPr txBox="1"/>
           <p:nvPr/>
         </p:nvSpPr>
@@ -23392,7 +23283,7 @@
       </p:sp>
       <p:sp>
         <p:nvSpPr>
-          <p:cNvPr id="36" name="day-192"/>
+          <p:cNvPr id="34" name="day-190"/>
           <p:cNvSpPr/>
           <p:nvPr/>
         </p:nvSpPr>
@@ -23419,7 +23310,7 @@
       </p:sp>
       <p:sp>
         <p:nvSpPr>
-          <p:cNvPr id="37" name="text-193"/>
+          <p:cNvPr id="35" name="text-191"/>
           <p:cNvSpPr txBox="1"/>
           <p:nvPr/>
         </p:nvSpPr>
@@ -23455,7 +23346,7 @@
       </p:sp>
       <p:sp>
         <p:nvSpPr>
-          <p:cNvPr id="38" name="text-194"/>
+          <p:cNvPr id="36" name="text-192"/>
           <p:cNvSpPr txBox="1"/>
           <p:nvPr/>
         </p:nvSpPr>
@@ -23491,7 +23382,7 @@
       </p:sp>
       <p:sp>
         <p:nvSpPr>
-          <p:cNvPr id="39" name="day-195"/>
+          <p:cNvPr id="37" name="day-193"/>
           <p:cNvSpPr/>
           <p:nvPr/>
         </p:nvSpPr>
@@ -23518,7 +23409,7 @@
       </p:sp>
       <p:sp>
         <p:nvSpPr>
-          <p:cNvPr id="40" name="text-196"/>
+          <p:cNvPr id="38" name="text-194"/>
           <p:cNvSpPr txBox="1"/>
           <p:nvPr/>
         </p:nvSpPr>
@@ -23554,7 +23445,7 @@
       </p:sp>
       <p:sp>
         <p:nvSpPr>
-          <p:cNvPr id="41" name="text-197"/>
+          <p:cNvPr id="39" name="text-195"/>
           <p:cNvSpPr txBox="1"/>
           <p:nvPr/>
         </p:nvSpPr>
@@ -23590,7 +23481,7 @@
       </p:sp>
       <p:sp>
         <p:nvSpPr>
-          <p:cNvPr id="42" name="day-198"/>
+          <p:cNvPr id="40" name="day-196"/>
           <p:cNvSpPr/>
           <p:nvPr/>
         </p:nvSpPr>
@@ -23617,7 +23508,7 @@
       </p:sp>
       <p:sp>
         <p:nvSpPr>
-          <p:cNvPr id="43" name="text-199"/>
+          <p:cNvPr id="41" name="text-197"/>
           <p:cNvSpPr txBox="1"/>
           <p:nvPr/>
         </p:nvSpPr>
@@ -23653,7 +23544,7 @@
       </p:sp>
       <p:sp>
         <p:nvSpPr>
-          <p:cNvPr id="44" name="text-200"/>
+          <p:cNvPr id="42" name="text-198"/>
           <p:cNvSpPr txBox="1"/>
           <p:nvPr/>
         </p:nvSpPr>
@@ -23689,7 +23580,7 @@
       </p:sp>
       <p:sp>
         <p:nvSpPr>
-          <p:cNvPr id="45" name="day-201"/>
+          <p:cNvPr id="43" name="day-199"/>
           <p:cNvSpPr/>
           <p:nvPr/>
         </p:nvSpPr>
@@ -23716,7 +23607,7 @@
       </p:sp>
       <p:sp>
         <p:nvSpPr>
-          <p:cNvPr id="46" name="text-202"/>
+          <p:cNvPr id="44" name="text-200"/>
           <p:cNvSpPr txBox="1"/>
           <p:nvPr/>
         </p:nvSpPr>
@@ -23752,7 +23643,7 @@
       </p:sp>
       <p:sp>
         <p:nvSpPr>
-          <p:cNvPr id="47" name="text-203"/>
+          <p:cNvPr id="45" name="text-201"/>
           <p:cNvSpPr txBox="1"/>
           <p:nvPr/>
         </p:nvSpPr>
@@ -23788,7 +23679,7 @@
       </p:sp>
       <p:sp>
         <p:nvSpPr>
-          <p:cNvPr id="48" name="day-204"/>
+          <p:cNvPr id="46" name="day-202"/>
           <p:cNvSpPr/>
           <p:nvPr/>
         </p:nvSpPr>
@@ -23815,7 +23706,7 @@
       </p:sp>
       <p:sp>
         <p:nvSpPr>
-          <p:cNvPr id="49" name="text-205"/>
+          <p:cNvPr id="47" name="text-203"/>
           <p:cNvSpPr txBox="1"/>
           <p:nvPr/>
         </p:nvSpPr>
@@ -23851,7 +23742,7 @@
       </p:sp>
       <p:sp>
         <p:nvSpPr>
-          <p:cNvPr id="50" name="text-206"/>
+          <p:cNvPr id="48" name="text-204"/>
           <p:cNvSpPr txBox="1"/>
           <p:nvPr/>
         </p:nvSpPr>
@@ -23887,7 +23778,7 @@
       </p:sp>
       <p:sp>
         <p:nvSpPr>
-          <p:cNvPr id="51" name="day-207"/>
+          <p:cNvPr id="49" name="day-205"/>
           <p:cNvSpPr/>
           <p:nvPr/>
         </p:nvSpPr>
@@ -23914,7 +23805,7 @@
       </p:sp>
       <p:sp>
         <p:nvSpPr>
-          <p:cNvPr id="52" name="text-208"/>
+          <p:cNvPr id="50" name="text-206"/>
           <p:cNvSpPr txBox="1"/>
           <p:nvPr/>
         </p:nvSpPr>
@@ -23950,7 +23841,7 @@
       </p:sp>
       <p:sp>
         <p:nvSpPr>
-          <p:cNvPr id="53" name="text-209"/>
+          <p:cNvPr id="51" name="text-207"/>
           <p:cNvSpPr txBox="1"/>
           <p:nvPr/>
         </p:nvSpPr>
@@ -23986,7 +23877,7 @@
       </p:sp>
       <p:sp>
         <p:nvSpPr>
-          <p:cNvPr id="54" name="text-210"/>
+          <p:cNvPr id="52" name="text-208"/>
           <p:cNvSpPr txBox="1"/>
           <p:nvPr/>
         </p:nvSpPr>
@@ -24048,7 +23939,7 @@
           <a:bodyPr lIns="0" tIns="0" rIns="0" bIns="0"/>
           <a:lstStyle>
             <a:lvl1pPr>
-              <a:defRPr sz="800">
+              <a:defRPr sz="900">
                 <a:solidFill>
                   <a:schemeClr val="tx2"/>
                 </a:solidFill>
@@ -24121,9 +24012,9 @@
                 <a:solidFill>
                   <a:schemeClr val="accent2"/>
                 </a:solidFill>
-                <a:latin typeface="Calibri" pitchFamily="34" charset="0"/>
-                <a:ea typeface="Calibri" pitchFamily="34" charset="-122"/>
-                <a:cs typeface="Calibri" pitchFamily="34" charset="-120"/>
+                <a:latin typeface="Arial" pitchFamily="34" charset="0"/>
+                <a:ea typeface="Arial" pitchFamily="34" charset="-122"/>
+                <a:cs typeface="Arial" pitchFamily="34" charset="-120"/>
               </a:rPr>
               <a:t>PARTEA III · INSTAGRAM</a:t>
             </a:r>
@@ -24162,9 +24053,9 @@
                 <a:solidFill>
                   <a:schemeClr val="tx1"/>
                 </a:solidFill>
-                <a:latin typeface="Cambria" pitchFamily="34" charset="0"/>
-                <a:ea typeface="Cambria" pitchFamily="34" charset="-122"/>
-                <a:cs typeface="Cambria" pitchFamily="34" charset="-120"/>
+                <a:latin typeface="Georgia" pitchFamily="34" charset="0"/>
+                <a:ea typeface="Georgia" pitchFamily="34" charset="-122"/>
+                <a:cs typeface="Georgia" pitchFamily="34" charset="-120"/>
               </a:rPr>
               <a:t>Îndemnul la acțiune și înainte și după corect</a:t>
             </a:r>
@@ -24174,16 +24065,14 @@
       </p:sp>
       <p:pic>
         <p:nvPicPr>
-          <p:cNvPr id="4" name="watermark-211" descr="preencoded.png">    </p:cNvPr>
+          <p:cNvPr id="4" name="watermark-209" descr="preencoded.png">    </p:cNvPr>
           <p:cNvPicPr>
             <a:picLocks noChangeAspect="1"/>
           </p:cNvPicPr>
           <p:nvPr/>
         </p:nvPicPr>
         <p:blipFill>
-          <a:blip r:embed="rId1">
-            <a:alphaModFix amt="7000"/>
-          </a:blip>
+          <a:blip r:embed="rId1"/>
           <a:stretch>
             <a:fillRect/>
           </a:stretch>
@@ -24200,7 +24089,7 @@
       </p:pic>
       <p:sp>
         <p:nvSpPr>
-          <p:cNvPr id="5" name="text-212"/>
+          <p:cNvPr id="5" name="text-210"/>
           <p:cNvSpPr txBox="1"/>
           <p:nvPr/>
         </p:nvSpPr>
@@ -24227,9 +24116,9 @@
                 <a:solidFill>
                   <a:schemeClr val="tx1"/>
                 </a:solidFill>
-                <a:latin typeface="Cambria" pitchFamily="34" charset="0"/>
-                <a:ea typeface="Cambria" pitchFamily="34" charset="-122"/>
-                <a:cs typeface="Cambria" pitchFamily="34" charset="-120"/>
+                <a:latin typeface="Georgia" pitchFamily="34" charset="0"/>
+                <a:ea typeface="Georgia" pitchFamily="34" charset="-122"/>
+                <a:cs typeface="Georgia" pitchFamily="34" charset="-120"/>
               </a:rPr>
               <a:t>Spune clar ce să facă omul acum:</a:t>
             </a:r>
@@ -24239,7 +24128,7 @@
       </p:sp>
       <p:sp>
         <p:nvSpPr>
-          <p:cNvPr id="6" name="card-213"/>
+          <p:cNvPr id="6" name="card-211"/>
           <p:cNvSpPr/>
           <p:nvPr/>
         </p:nvSpPr>
@@ -24266,7 +24155,7 @@
       </p:sp>
       <p:sp>
         <p:nvSpPr>
-          <p:cNvPr id="7" name="badge-214"/>
+          <p:cNvPr id="7" name="badge-212"/>
           <p:cNvSpPr/>
           <p:nvPr/>
         </p:nvSpPr>
@@ -24291,7 +24180,7 @@
       </p:sp>
       <p:pic>
         <p:nvPicPr>
-          <p:cNvPr id="8" name="icon-215" descr="preencoded.png">    </p:cNvPr>
+          <p:cNvPr id="8" name="icon-213" descr="preencoded.png">    </p:cNvPr>
           <p:cNvPicPr>
             <a:picLocks noChangeAspect="1"/>
           </p:cNvPicPr>
@@ -24315,7 +24204,7 @@
       </p:pic>
       <p:sp>
         <p:nvSpPr>
-          <p:cNvPr id="9" name="text-216"/>
+          <p:cNvPr id="9" name="text-214"/>
           <p:cNvSpPr txBox="1"/>
           <p:nvPr/>
         </p:nvSpPr>
@@ -24351,7 +24240,7 @@
       </p:sp>
       <p:sp>
         <p:nvSpPr>
-          <p:cNvPr id="10" name="text-217"/>
+          <p:cNvPr id="10" name="text-215"/>
           <p:cNvSpPr txBox="1"/>
           <p:nvPr/>
         </p:nvSpPr>
@@ -24387,7 +24276,7 @@
       </p:sp>
       <p:sp>
         <p:nvSpPr>
-          <p:cNvPr id="11" name="card-218"/>
+          <p:cNvPr id="11" name="card-216"/>
           <p:cNvSpPr/>
           <p:nvPr/>
         </p:nvSpPr>
@@ -24414,7 +24303,7 @@
       </p:sp>
       <p:sp>
         <p:nvSpPr>
-          <p:cNvPr id="12" name="badge-219"/>
+          <p:cNvPr id="12" name="badge-217"/>
           <p:cNvSpPr/>
           <p:nvPr/>
         </p:nvSpPr>
@@ -24439,7 +24328,7 @@
       </p:sp>
       <p:pic>
         <p:nvPicPr>
-          <p:cNvPr id="13" name="icon-220" descr="preencoded.png">    </p:cNvPr>
+          <p:cNvPr id="13" name="icon-218" descr="preencoded.png">    </p:cNvPr>
           <p:cNvPicPr>
             <a:picLocks noChangeAspect="1"/>
           </p:cNvPicPr>
@@ -24463,7 +24352,7 @@
       </p:pic>
       <p:sp>
         <p:nvSpPr>
-          <p:cNvPr id="14" name="text-221"/>
+          <p:cNvPr id="14" name="text-219"/>
           <p:cNvSpPr txBox="1"/>
           <p:nvPr/>
         </p:nvSpPr>
@@ -24499,7 +24388,7 @@
       </p:sp>
       <p:sp>
         <p:nvSpPr>
-          <p:cNvPr id="15" name="text-222"/>
+          <p:cNvPr id="15" name="text-220"/>
           <p:cNvSpPr txBox="1"/>
           <p:nvPr/>
         </p:nvSpPr>
@@ -24527,7 +24416,7 @@
                   <a:schemeClr val="tx1"/>
                 </a:solidFill>
               </a:rPr>
-              <a:t>„Salvează și arată-i poza coloristei tale.”</a:t>
+              <a:t>„Salvează postarea și arată-mi-o la programare.”</a:t>
             </a:r>
             <a:endParaRPr lang="en-US" sz="1400" dirty="0"/>
           </a:p>
@@ -24535,7 +24424,7 @@
       </p:sp>
       <p:sp>
         <p:nvSpPr>
-          <p:cNvPr id="16" name="card-223"/>
+          <p:cNvPr id="16" name="card-221"/>
           <p:cNvSpPr/>
           <p:nvPr/>
         </p:nvSpPr>
@@ -24562,7 +24451,7 @@
       </p:sp>
       <p:sp>
         <p:nvSpPr>
-          <p:cNvPr id="17" name="badge-224"/>
+          <p:cNvPr id="17" name="badge-222"/>
           <p:cNvSpPr/>
           <p:nvPr/>
         </p:nvSpPr>
@@ -24587,7 +24476,7 @@
       </p:sp>
       <p:pic>
         <p:nvPicPr>
-          <p:cNvPr id="18" name="icon-225" descr="preencoded.png">    </p:cNvPr>
+          <p:cNvPr id="18" name="icon-223" descr="preencoded.png">    </p:cNvPr>
           <p:cNvPicPr>
             <a:picLocks noChangeAspect="1"/>
           </p:cNvPicPr>
@@ -24611,7 +24500,7 @@
       </p:pic>
       <p:sp>
         <p:nvSpPr>
-          <p:cNvPr id="19" name="text-226"/>
+          <p:cNvPr id="19" name="text-224"/>
           <p:cNvSpPr txBox="1"/>
           <p:nvPr/>
         </p:nvSpPr>
@@ -24647,7 +24536,7 @@
       </p:sp>
       <p:sp>
         <p:nvSpPr>
-          <p:cNvPr id="20" name="text-227"/>
+          <p:cNvPr id="20" name="text-225"/>
           <p:cNvSpPr txBox="1"/>
           <p:nvPr/>
         </p:nvSpPr>
@@ -24683,7 +24572,7 @@
       </p:sp>
       <p:sp>
         <p:nvSpPr>
-          <p:cNvPr id="21" name="card-228"/>
+          <p:cNvPr id="21" name="card-226"/>
           <p:cNvSpPr/>
           <p:nvPr/>
         </p:nvSpPr>
@@ -24710,7 +24599,7 @@
       </p:sp>
       <p:sp>
         <p:nvSpPr>
-          <p:cNvPr id="22" name="text-229"/>
+          <p:cNvPr id="22" name="text-227"/>
           <p:cNvSpPr txBox="1"/>
           <p:nvPr/>
         </p:nvSpPr>
@@ -24737,9 +24626,9 @@
                 <a:solidFill>
                   <a:schemeClr val="bg1"/>
                 </a:solidFill>
-                <a:latin typeface="Cambria" pitchFamily="34" charset="0"/>
-                <a:ea typeface="Cambria" pitchFamily="34" charset="-122"/>
-                <a:cs typeface="Cambria" pitchFamily="34" charset="-120"/>
+                <a:latin typeface="Georgia" pitchFamily="34" charset="0"/>
+                <a:ea typeface="Georgia" pitchFamily="34" charset="-122"/>
+                <a:cs typeface="Georgia" pitchFamily="34" charset="-120"/>
               </a:rPr>
               <a:t>Înainte și după, ca la carte</a:t>
             </a:r>
@@ -24749,7 +24638,7 @@
       </p:sp>
       <p:pic>
         <p:nvPicPr>
-          <p:cNvPr id="23" name="before-230" descr="preencoded.png">    </p:cNvPr>
+          <p:cNvPr id="23" name="before-228" descr="preencoded.png">    </p:cNvPr>
           <p:cNvPicPr>
             <a:picLocks noChangeAspect="1"/>
           </p:cNvPicPr>
@@ -24773,7 +24662,7 @@
       </p:pic>
       <p:pic>
         <p:nvPicPr>
-          <p:cNvPr id="24" name="after-231" descr="preencoded.png">    </p:cNvPr>
+          <p:cNvPr id="24" name="after-229" descr="preencoded.png">    </p:cNvPr>
           <p:cNvPicPr>
             <a:picLocks noChangeAspect="1"/>
           </p:cNvPicPr>
@@ -24797,7 +24686,7 @@
       </p:pic>
       <p:pic>
         <p:nvPicPr>
-          <p:cNvPr id="25" name="check-232" descr="preencoded.png">    </p:cNvPr>
+          <p:cNvPr id="25" name="check-230" descr="preencoded.png">    </p:cNvPr>
           <p:cNvPicPr>
             <a:picLocks noChangeAspect="1"/>
           </p:cNvPicPr>
@@ -24821,7 +24710,7 @@
       </p:pic>
       <p:sp>
         <p:nvSpPr>
-          <p:cNvPr id="26" name="text-233"/>
+          <p:cNvPr id="26" name="text-231"/>
           <p:cNvSpPr txBox="1"/>
           <p:nvPr/>
         </p:nvSpPr>
@@ -24857,7 +24746,7 @@
       </p:sp>
       <p:pic>
         <p:nvPicPr>
-          <p:cNvPr id="27" name="check-234" descr="preencoded.png">    </p:cNvPr>
+          <p:cNvPr id="27" name="check-232" descr="preencoded.png">    </p:cNvPr>
           <p:cNvPicPr>
             <a:picLocks noChangeAspect="1"/>
           </p:cNvPicPr>
@@ -24881,7 +24770,7 @@
       </p:pic>
       <p:sp>
         <p:nvSpPr>
-          <p:cNvPr id="28" name="text-235"/>
+          <p:cNvPr id="28" name="text-233"/>
           <p:cNvSpPr txBox="1"/>
           <p:nvPr/>
         </p:nvSpPr>
@@ -24917,7 +24806,7 @@
       </p:sp>
       <p:pic>
         <p:nvPicPr>
-          <p:cNvPr id="29" name="check-236" descr="preencoded.png">    </p:cNvPr>
+          <p:cNvPr id="29" name="check-234" descr="preencoded.png">    </p:cNvPr>
           <p:cNvPicPr>
             <a:picLocks noChangeAspect="1"/>
           </p:cNvPicPr>
@@ -24941,7 +24830,7 @@
       </p:pic>
       <p:sp>
         <p:nvSpPr>
-          <p:cNvPr id="30" name="text-237"/>
+          <p:cNvPr id="30" name="text-235"/>
           <p:cNvSpPr txBox="1"/>
           <p:nvPr/>
         </p:nvSpPr>
@@ -24977,7 +24866,7 @@
       </p:sp>
       <p:pic>
         <p:nvPicPr>
-          <p:cNvPr id="31" name="check-238" descr="preencoded.png">    </p:cNvPr>
+          <p:cNvPr id="31" name="check-236" descr="preencoded.png">    </p:cNvPr>
           <p:cNvPicPr>
             <a:picLocks noChangeAspect="1"/>
           </p:cNvPicPr>
@@ -25001,7 +24890,7 @@
       </p:pic>
       <p:sp>
         <p:nvSpPr>
-          <p:cNvPr id="32" name="text-239"/>
+          <p:cNvPr id="32" name="text-237"/>
           <p:cNvSpPr txBox="1"/>
           <p:nvPr/>
         </p:nvSpPr>
@@ -25037,7 +24926,7 @@
       </p:sp>
       <p:pic>
         <p:nvPicPr>
-          <p:cNvPr id="33" name="check-240" descr="preencoded.png">    </p:cNvPr>
+          <p:cNvPr id="33" name="check-238" descr="preencoded.png">    </p:cNvPr>
           <p:cNvPicPr>
             <a:picLocks noChangeAspect="1"/>
           </p:cNvPicPr>
@@ -25061,7 +24950,7 @@
       </p:pic>
       <p:sp>
         <p:nvSpPr>
-          <p:cNvPr id="34" name="text-241"/>
+          <p:cNvPr id="34" name="text-239"/>
           <p:cNvSpPr txBox="1"/>
           <p:nvPr/>
         </p:nvSpPr>
@@ -25097,7 +24986,7 @@
       </p:sp>
       <p:sp>
         <p:nvSpPr>
-          <p:cNvPr id="35" name="text-242"/>
+          <p:cNvPr id="35" name="text-240"/>
           <p:cNvSpPr txBox="1"/>
           <p:nvPr/>
         </p:nvSpPr>
@@ -25159,7 +25048,7 @@
           <a:bodyPr lIns="0" tIns="0" rIns="0" bIns="0"/>
           <a:lstStyle>
             <a:lvl1pPr>
-              <a:defRPr sz="800">
+              <a:defRPr sz="900">
                 <a:solidFill>
                   <a:schemeClr val="tx2"/>
                 </a:solidFill>
@@ -25232,9 +25121,9 @@
                 <a:solidFill>
                   <a:schemeClr val="accent2"/>
                 </a:solidFill>
-                <a:latin typeface="Calibri" pitchFamily="34" charset="0"/>
-                <a:ea typeface="Calibri" pitchFamily="34" charset="-122"/>
-                <a:cs typeface="Calibri" pitchFamily="34" charset="-120"/>
+                <a:latin typeface="Arial" pitchFamily="34" charset="0"/>
+                <a:ea typeface="Arial" pitchFamily="34" charset="-122"/>
+                <a:cs typeface="Arial" pitchFamily="34" charset="-120"/>
               </a:rPr>
               <a:t>PARTEA III · INSTAGRAM</a:t>
             </a:r>
@@ -25273,11 +25162,11 @@
                 <a:solidFill>
                   <a:schemeClr val="tx1"/>
                 </a:solidFill>
-                <a:latin typeface="Cambria" pitchFamily="34" charset="0"/>
-                <a:ea typeface="Cambria" pitchFamily="34" charset="-122"/>
-                <a:cs typeface="Cambria" pitchFamily="34" charset="-120"/>
-              </a:rPr>
-              <a:t>Giveaway: concurs cu premii, făcut ca la carte</a:t>
+                <a:latin typeface="Georgia" pitchFamily="34" charset="0"/>
+                <a:ea typeface="Georgia" pitchFamily="34" charset="-122"/>
+                <a:cs typeface="Georgia" pitchFamily="34" charset="-120"/>
+              </a:rPr>
+              <a:t>Giveaway: concurs cu premii, ca la carte</a:t>
             </a:r>
             <a:endParaRPr lang="en-US" sz="2800" dirty="0"/>
           </a:p>
@@ -25285,16 +25174,14 @@
       </p:sp>
       <p:pic>
         <p:nvPicPr>
-          <p:cNvPr id="4" name="watermark-243" descr="preencoded.png">    </p:cNvPr>
+          <p:cNvPr id="4" name="watermark-241" descr="preencoded.png">    </p:cNvPr>
           <p:cNvPicPr>
             <a:picLocks noChangeAspect="1"/>
           </p:cNvPicPr>
           <p:nvPr/>
         </p:nvPicPr>
         <p:blipFill>
-          <a:blip r:embed="rId1">
-            <a:alphaModFix amt="7000"/>
-          </a:blip>
+          <a:blip r:embed="rId1"/>
           <a:stretch>
             <a:fillRect/>
           </a:stretch>
@@ -25311,7 +25198,7 @@
       </p:pic>
       <p:sp>
         <p:nvSpPr>
-          <p:cNvPr id="5" name="num-244"/>
+          <p:cNvPr id="5" name="num-242"/>
           <p:cNvSpPr/>
           <p:nvPr/>
         </p:nvSpPr>
@@ -25336,7 +25223,7 @@
       </p:sp>
       <p:sp>
         <p:nvSpPr>
-          <p:cNvPr id="6" name="text-245"/>
+          <p:cNvPr id="6" name="text-243"/>
           <p:cNvSpPr txBox="1"/>
           <p:nvPr/>
         </p:nvSpPr>
@@ -25372,7 +25259,7 @@
       </p:sp>
       <p:sp>
         <p:nvSpPr>
-          <p:cNvPr id="7" name="text-246"/>
+          <p:cNvPr id="7" name="text-244"/>
           <p:cNvSpPr txBox="1"/>
           <p:nvPr/>
         </p:nvSpPr>
@@ -25408,7 +25295,7 @@
       </p:sp>
       <p:sp>
         <p:nvSpPr>
-          <p:cNvPr id="8" name="conn-247"/>
+          <p:cNvPr id="8" name="conn-245"/>
           <p:cNvSpPr/>
           <p:nvPr/>
         </p:nvSpPr>
@@ -25431,7 +25318,7 @@
       </p:sp>
       <p:sp>
         <p:nvSpPr>
-          <p:cNvPr id="9" name="num-248"/>
+          <p:cNvPr id="9" name="num-246"/>
           <p:cNvSpPr/>
           <p:nvPr/>
         </p:nvSpPr>
@@ -25456,7 +25343,7 @@
       </p:sp>
       <p:sp>
         <p:nvSpPr>
-          <p:cNvPr id="10" name="text-249"/>
+          <p:cNvPr id="10" name="text-247"/>
           <p:cNvSpPr txBox="1"/>
           <p:nvPr/>
         </p:nvSpPr>
@@ -25492,7 +25379,7 @@
       </p:sp>
       <p:sp>
         <p:nvSpPr>
-          <p:cNvPr id="11" name="text-250"/>
+          <p:cNvPr id="11" name="text-248"/>
           <p:cNvSpPr txBox="1"/>
           <p:nvPr/>
         </p:nvSpPr>
@@ -25528,7 +25415,7 @@
       </p:sp>
       <p:sp>
         <p:nvSpPr>
-          <p:cNvPr id="12" name="conn-251"/>
+          <p:cNvPr id="12" name="conn-249"/>
           <p:cNvSpPr/>
           <p:nvPr/>
         </p:nvSpPr>
@@ -25551,7 +25438,7 @@
       </p:sp>
       <p:sp>
         <p:nvSpPr>
-          <p:cNvPr id="13" name="num-252"/>
+          <p:cNvPr id="13" name="num-250"/>
           <p:cNvSpPr/>
           <p:nvPr/>
         </p:nvSpPr>
@@ -25576,7 +25463,7 @@
       </p:sp>
       <p:sp>
         <p:nvSpPr>
-          <p:cNvPr id="14" name="text-253"/>
+          <p:cNvPr id="14" name="text-251"/>
           <p:cNvSpPr txBox="1"/>
           <p:nvPr/>
         </p:nvSpPr>
@@ -25612,7 +25499,7 @@
       </p:sp>
       <p:sp>
         <p:nvSpPr>
-          <p:cNvPr id="15" name="text-254"/>
+          <p:cNvPr id="15" name="text-252"/>
           <p:cNvSpPr txBox="1"/>
           <p:nvPr/>
         </p:nvSpPr>
@@ -25648,7 +25535,7 @@
       </p:sp>
       <p:sp>
         <p:nvSpPr>
-          <p:cNvPr id="16" name="conn-255"/>
+          <p:cNvPr id="16" name="conn-253"/>
           <p:cNvSpPr/>
           <p:nvPr/>
         </p:nvSpPr>
@@ -25671,7 +25558,7 @@
       </p:sp>
       <p:sp>
         <p:nvSpPr>
-          <p:cNvPr id="17" name="num-256"/>
+          <p:cNvPr id="17" name="num-254"/>
           <p:cNvSpPr/>
           <p:nvPr/>
         </p:nvSpPr>
@@ -25696,7 +25583,7 @@
       </p:sp>
       <p:sp>
         <p:nvSpPr>
-          <p:cNvPr id="18" name="text-257"/>
+          <p:cNvPr id="18" name="text-255"/>
           <p:cNvSpPr txBox="1"/>
           <p:nvPr/>
         </p:nvSpPr>
@@ -25732,7 +25619,7 @@
       </p:sp>
       <p:sp>
         <p:nvSpPr>
-          <p:cNvPr id="19" name="text-258"/>
+          <p:cNvPr id="19" name="text-256"/>
           <p:cNvSpPr txBox="1"/>
           <p:nvPr/>
         </p:nvSpPr>
@@ -25768,7 +25655,7 @@
       </p:sp>
       <p:sp>
         <p:nvSpPr>
-          <p:cNvPr id="20" name="conn-259"/>
+          <p:cNvPr id="20" name="conn-257"/>
           <p:cNvSpPr/>
           <p:nvPr/>
         </p:nvSpPr>
@@ -25791,7 +25678,7 @@
       </p:sp>
       <p:sp>
         <p:nvSpPr>
-          <p:cNvPr id="21" name="num-260"/>
+          <p:cNvPr id="21" name="num-258"/>
           <p:cNvSpPr/>
           <p:nvPr/>
         </p:nvSpPr>
@@ -25816,7 +25703,7 @@
       </p:sp>
       <p:sp>
         <p:nvSpPr>
-          <p:cNvPr id="22" name="text-261"/>
+          <p:cNvPr id="22" name="text-259"/>
           <p:cNvSpPr txBox="1"/>
           <p:nvPr/>
         </p:nvSpPr>
@@ -25852,7 +25739,7 @@
       </p:sp>
       <p:sp>
         <p:nvSpPr>
-          <p:cNvPr id="23" name="text-262"/>
+          <p:cNvPr id="23" name="text-260"/>
           <p:cNvSpPr txBox="1"/>
           <p:nvPr/>
         </p:nvSpPr>
@@ -25888,7 +25775,7 @@
       </p:sp>
       <p:sp>
         <p:nvSpPr>
-          <p:cNvPr id="24" name="card-263"/>
+          <p:cNvPr id="24" name="card-261"/>
           <p:cNvSpPr/>
           <p:nvPr/>
         </p:nvSpPr>
@@ -25915,7 +25802,7 @@
       </p:sp>
       <p:sp>
         <p:nvSpPr>
-          <p:cNvPr id="25" name="badge-264"/>
+          <p:cNvPr id="25" name="badge-262"/>
           <p:cNvSpPr/>
           <p:nvPr/>
         </p:nvSpPr>
@@ -25940,7 +25827,7 @@
       </p:sp>
       <p:pic>
         <p:nvPicPr>
-          <p:cNvPr id="26" name="icon-265" descr="preencoded.png">    </p:cNvPr>
+          <p:cNvPr id="26" name="icon-263" descr="preencoded.png">    </p:cNvPr>
           <p:cNvPicPr>
             <a:picLocks noChangeAspect="1"/>
           </p:cNvPicPr>
@@ -25964,7 +25851,7 @@
       </p:pic>
       <p:sp>
         <p:nvSpPr>
-          <p:cNvPr id="27" name="text-266"/>
+          <p:cNvPr id="27" name="text-264"/>
           <p:cNvSpPr txBox="1"/>
           <p:nvPr/>
         </p:nvSpPr>
@@ -25991,9 +25878,9 @@
                 <a:solidFill>
                   <a:schemeClr val="tx1"/>
                 </a:solidFill>
-                <a:latin typeface="Cambria" pitchFamily="34" charset="0"/>
-                <a:ea typeface="Cambria" pitchFamily="34" charset="-122"/>
-                <a:cs typeface="Cambria" pitchFamily="34" charset="-120"/>
+                <a:latin typeface="Georgia" pitchFamily="34" charset="0"/>
+                <a:ea typeface="Georgia" pitchFamily="34" charset="-122"/>
+                <a:cs typeface="Georgia" pitchFamily="34" charset="-120"/>
               </a:rPr>
               <a:t>Premiul potrivit</a:t>
             </a:r>
@@ -26003,7 +25890,7 @@
       </p:sp>
       <p:sp>
         <p:nvSpPr>
-          <p:cNvPr id="28" name="text-267"/>
+          <p:cNvPr id="28" name="text-265"/>
           <p:cNvSpPr txBox="1"/>
           <p:nvPr/>
         </p:nvSpPr>
@@ -26079,7 +25966,7 @@
       </p:sp>
       <p:sp>
         <p:nvSpPr>
-          <p:cNvPr id="29" name="text-268"/>
+          <p:cNvPr id="29" name="text-266"/>
           <p:cNvSpPr txBox="1"/>
           <p:nvPr/>
         </p:nvSpPr>
@@ -26107,7 +25994,7 @@
                   <a:schemeClr val="accent2"/>
                 </a:solidFill>
               </a:rPr>
-              <a:t>Evită un telefon: atrage vânători de premii, nu cliente.</a:t>
+              <a:t>Evită premii ca un telefon: atrag vânători de premii, nu cliente.</a:t>
             </a:r>
             <a:endParaRPr lang="en-US" sz="1200" dirty="0"/>
           </a:p>
@@ -26115,7 +26002,7 @@
       </p:sp>
       <p:sp>
         <p:nvSpPr>
-          <p:cNvPr id="30" name="card-269"/>
+          <p:cNvPr id="30" name="card-267"/>
           <p:cNvSpPr/>
           <p:nvPr/>
         </p:nvSpPr>
@@ -26142,7 +26029,7 @@
       </p:sp>
       <p:sp>
         <p:nvSpPr>
-          <p:cNvPr id="31" name="badge-270"/>
+          <p:cNvPr id="31" name="badge-268"/>
           <p:cNvSpPr/>
           <p:nvPr/>
         </p:nvSpPr>
@@ -26167,7 +26054,7 @@
       </p:sp>
       <p:pic>
         <p:nvPicPr>
-          <p:cNvPr id="32" name="icon-271" descr="preencoded.png">    </p:cNvPr>
+          <p:cNvPr id="32" name="icon-269" descr="preencoded.png">    </p:cNvPr>
           <p:cNvPicPr>
             <a:picLocks noChangeAspect="1"/>
           </p:cNvPicPr>
@@ -26191,7 +26078,7 @@
       </p:pic>
       <p:sp>
         <p:nvSpPr>
-          <p:cNvPr id="33" name="text-272"/>
+          <p:cNvPr id="33" name="text-270"/>
           <p:cNvSpPr txBox="1"/>
           <p:nvPr/>
         </p:nvSpPr>
@@ -26218,9 +26105,9 @@
                 <a:solidFill>
                   <a:schemeClr val="bg1"/>
                 </a:solidFill>
-                <a:latin typeface="Cambria" pitchFamily="34" charset="0"/>
-                <a:ea typeface="Cambria" pitchFamily="34" charset="-122"/>
-                <a:cs typeface="Cambria" pitchFamily="34" charset="-120"/>
+                <a:latin typeface="Georgia" pitchFamily="34" charset="0"/>
+                <a:ea typeface="Georgia" pitchFamily="34" charset="-122"/>
+                <a:cs typeface="Georgia" pitchFamily="34" charset="-120"/>
               </a:rPr>
               <a:t>Reguli obligatorii</a:t>
             </a:r>
@@ -26230,7 +26117,7 @@
       </p:sp>
       <p:sp>
         <p:nvSpPr>
-          <p:cNvPr id="34" name="text-273"/>
+          <p:cNvPr id="34" name="text-271"/>
           <p:cNvSpPr txBox="1"/>
           <p:nvPr/>
         </p:nvSpPr>
@@ -26350,7 +26237,7 @@
           <a:bodyPr lIns="0" tIns="0" rIns="0" bIns="0"/>
           <a:lstStyle>
             <a:lvl1pPr>
-              <a:defRPr sz="800">
+              <a:defRPr sz="900">
                 <a:solidFill>
                   <a:schemeClr val="tx2"/>
                 </a:solidFill>
@@ -26418,7 +26305,7 @@
     </a:clrScheme>
     <a:fontScheme name="Blonde Ambition">
       <a:majorFont>
-        <a:latin typeface="Cambria"/>
+        <a:latin typeface="Georgia"/>
         <a:ea typeface=""/>
         <a:cs typeface=""/>
         <a:font script="Jpan" typeface="游ゴシック Light"/>
@@ -26470,7 +26357,7 @@
         <a:font script="Tfng" typeface="Ebrima"/>
       </a:majorFont>
       <a:minorFont>
-        <a:latin typeface="Calibri"/>
+        <a:latin typeface="Arial"/>
         <a:ea typeface=""/>
         <a:cs typeface=""/>
         <a:font script="Jpan" typeface="游ゴシック"/>

--- a/SOCIAL_MEDIA_PREZENTARE.pptx
+++ b/SOCIAL_MEDIA_PREZENTARE.pptx
@@ -7517,9 +7517,6 @@
               </a:rPr>
               <a:t>România: </a:t>
             </a:r>
-            <a:pPr indent="0" marL="0">
-              <a:buNone/>
-            </a:pPr>
             <a:r>
               <a:rPr lang="en-US" sz="1200" dirty="0">
                 <a:solidFill>
@@ -7851,9 +7848,6 @@
               </a:rPr>
               <a:t>Verifici: </a:t>
             </a:r>
-            <a:pPr indent="0" marL="0">
-              <a:buNone/>
-            </a:pPr>
             <a:r>
               <a:rPr lang="en-US" sz="1200" dirty="0">
                 <a:solidFill>
@@ -16991,9 +16985,6 @@
               </a:rPr>
               <a:t>Identitate vizuală: </a:t>
             </a:r>
-            <a:pPr indent="0" marL="0">
-              <a:buNone/>
-            </a:pPr>
             <a:r>
               <a:rPr lang="en-US" sz="1300" dirty="0">
                 <a:solidFill>
@@ -18730,9 +18721,6 @@
               </a:rPr>
               <a:t>Anti-emoții: </a:t>
             </a:r>
-            <a:pPr indent="0" marL="0">
-              <a:buNone/>
-            </a:pPr>
             <a:r>
               <a:rPr lang="en-US" sz="1300" dirty="0">
                 <a:solidFill>
@@ -19285,9 +19273,6 @@
               </a:rPr>
               <a:t>Creezi: </a:t>
             </a:r>
-            <a:pPr indent="0" marL="0">
-              <a:buNone/>
-            </a:pPr>
             <a:r>
               <a:rPr lang="en-US" sz="1300" dirty="0">
                 <a:solidFill>
